--- a/AGU-ECO-KAN.pptx
+++ b/AGU-ECO-KAN.pptx
@@ -5,19 +5,18 @@
     <p:sldMasterId id="2147483648" r:id="rId1"/>
   </p:sldMasterIdLst>
   <p:notesMasterIdLst>
-    <p:notesMasterId r:id="rId12"/>
+    <p:notesMasterId r:id="rId11"/>
   </p:notesMasterIdLst>
   <p:sldIdLst>
     <p:sldId id="256" r:id="rId2"/>
     <p:sldId id="380" r:id="rId3"/>
     <p:sldId id="382" r:id="rId4"/>
-    <p:sldId id="381" r:id="rId5"/>
-    <p:sldId id="384" r:id="rId6"/>
-    <p:sldId id="386" r:id="rId7"/>
-    <p:sldId id="387" r:id="rId8"/>
-    <p:sldId id="385" r:id="rId9"/>
-    <p:sldId id="388" r:id="rId10"/>
-    <p:sldId id="376" r:id="rId11"/>
+    <p:sldId id="384" r:id="rId5"/>
+    <p:sldId id="386" r:id="rId6"/>
+    <p:sldId id="387" r:id="rId7"/>
+    <p:sldId id="385" r:id="rId8"/>
+    <p:sldId id="388" r:id="rId9"/>
+    <p:sldId id="376" r:id="rId10"/>
   </p:sldIdLst>
   <p:sldSz cx="12192000" cy="6858000"/>
   <p:notesSz cx="6858000" cy="9144000"/>
@@ -568,90 +567,6 @@
   <p:cSld>
     <p:spTree>
       <p:nvGrpSpPr>
-        <p:cNvPr id="1" name=""/>
-        <p:cNvGrpSpPr/>
-        <p:nvPr/>
-      </p:nvGrpSpPr>
-      <p:grpSpPr>
-        <a:xfrm>
-          <a:off x="0" y="0"/>
-          <a:ext cx="0" cy="0"/>
-          <a:chOff x="0" y="0"/>
-          <a:chExt cx="0" cy="0"/>
-        </a:xfrm>
-      </p:grpSpPr>
-      <p:sp>
-        <p:nvSpPr>
-          <p:cNvPr id="2" name="Slide Image Placeholder 1"/>
-          <p:cNvSpPr>
-            <a:spLocks noGrp="1" noRot="1" noChangeAspect="1"/>
-          </p:cNvSpPr>
-          <p:nvPr>
-            <p:ph type="sldImg"/>
-          </p:nvPr>
-        </p:nvSpPr>
-        <p:spPr/>
-      </p:sp>
-      <p:sp>
-        <p:nvSpPr>
-          <p:cNvPr id="3" name="Notes Placeholder 2"/>
-          <p:cNvSpPr>
-            <a:spLocks noGrp="1"/>
-          </p:cNvSpPr>
-          <p:nvPr>
-            <p:ph type="body" idx="1"/>
-          </p:nvPr>
-        </p:nvSpPr>
-        <p:spPr/>
-        <p:txBody>
-          <a:bodyPr/>
-          <a:lstStyle/>
-          <a:p>
-            <a:endParaRPr lang="en-US" dirty="0"/>
-          </a:p>
-        </p:txBody>
-      </p:sp>
-      <p:sp>
-        <p:nvSpPr>
-          <p:cNvPr id="4" name="Slide Number Placeholder 3"/>
-          <p:cNvSpPr>
-            <a:spLocks noGrp="1"/>
-          </p:cNvSpPr>
-          <p:nvPr>
-            <p:ph type="sldNum" sz="quarter" idx="5"/>
-          </p:nvPr>
-        </p:nvSpPr>
-        <p:spPr/>
-        <p:txBody>
-          <a:bodyPr/>
-          <a:lstStyle/>
-          <a:p>
-            <a:fld id="{E216BF73-B614-8A46-AC98-1BCEF04B53FC}" type="slidenum">
-              <a:rPr lang="en-US" smtClean="0"/>
-              <a:t>4</a:t>
-            </a:fld>
-            <a:endParaRPr lang="en-US"/>
-          </a:p>
-        </p:txBody>
-      </p:sp>
-    </p:spTree>
-    <p:extLst>
-      <p:ext uri="{BB962C8B-B14F-4D97-AF65-F5344CB8AC3E}">
-        <p14:creationId xmlns:p14="http://schemas.microsoft.com/office/powerpoint/2010/main" val="1011253623"/>
-      </p:ext>
-    </p:extLst>
-  </p:cSld>
-  <p:clrMapOvr>
-    <a:masterClrMapping/>
-  </p:clrMapOvr>
-</p:notes>
-</file>
-
-<file path=ppt/notesSlides/notesSlide3.xml><?xml version="1.0" encoding="utf-8"?>
-<p:notes xmlns:a="http://schemas.openxmlformats.org/drawingml/2006/main" xmlns:r="http://schemas.openxmlformats.org/officeDocument/2006/relationships" xmlns:p="http://schemas.openxmlformats.org/presentationml/2006/main">
-  <p:cSld>
-    <p:spTree>
-      <p:nvGrpSpPr>
         <p:cNvPr id="1" name="">
           <a:extLst>
             <a:ext uri="{FF2B5EF4-FFF2-40B4-BE49-F238E27FC236}">
@@ -736,7 +651,7 @@
           <a:p>
             <a:fld id="{E216BF73-B614-8A46-AC98-1BCEF04B53FC}" type="slidenum">
               <a:rPr lang="en-US" smtClean="0"/>
-              <a:t>5</a:t>
+              <a:t>4</a:t>
             </a:fld>
             <a:endParaRPr lang="en-US"/>
           </a:p>
@@ -755,7 +670,7 @@
 </p:notes>
 </file>
 
-<file path=ppt/notesSlides/notesSlide4.xml><?xml version="1.0" encoding="utf-8"?>
+<file path=ppt/notesSlides/notesSlide3.xml><?xml version="1.0" encoding="utf-8"?>
 <p:notes xmlns:a="http://schemas.openxmlformats.org/drawingml/2006/main" xmlns:r="http://schemas.openxmlformats.org/officeDocument/2006/relationships" xmlns:p="http://schemas.openxmlformats.org/presentationml/2006/main">
   <p:cSld>
     <p:spTree>
@@ -844,7 +759,7 @@
           <a:p>
             <a:fld id="{E216BF73-B614-8A46-AC98-1BCEF04B53FC}" type="slidenum">
               <a:rPr lang="en-US" smtClean="0"/>
-              <a:t>6</a:t>
+              <a:t>5</a:t>
             </a:fld>
             <a:endParaRPr lang="en-US"/>
           </a:p>
@@ -863,7 +778,7 @@
 </p:notes>
 </file>
 
-<file path=ppt/notesSlides/notesSlide5.xml><?xml version="1.0" encoding="utf-8"?>
+<file path=ppt/notesSlides/notesSlide4.xml><?xml version="1.0" encoding="utf-8"?>
 <p:notes xmlns:a="http://schemas.openxmlformats.org/drawingml/2006/main" xmlns:r="http://schemas.openxmlformats.org/officeDocument/2006/relationships" xmlns:p="http://schemas.openxmlformats.org/presentationml/2006/main">
   <p:cSld>
     <p:spTree>
@@ -952,7 +867,7 @@
           <a:p>
             <a:fld id="{E216BF73-B614-8A46-AC98-1BCEF04B53FC}" type="slidenum">
               <a:rPr lang="en-US" smtClean="0"/>
-              <a:t>7</a:t>
+              <a:t>6</a:t>
             </a:fld>
             <a:endParaRPr lang="en-US"/>
           </a:p>
@@ -971,7 +886,7 @@
 </p:notes>
 </file>
 
-<file path=ppt/notesSlides/notesSlide6.xml><?xml version="1.0" encoding="utf-8"?>
+<file path=ppt/notesSlides/notesSlide5.xml><?xml version="1.0" encoding="utf-8"?>
 <p:notes xmlns:a="http://schemas.openxmlformats.org/drawingml/2006/main" xmlns:r="http://schemas.openxmlformats.org/officeDocument/2006/relationships" xmlns:p="http://schemas.openxmlformats.org/presentationml/2006/main">
   <p:cSld>
     <p:spTree>
@@ -1060,7 +975,7 @@
           <a:p>
             <a:fld id="{E216BF73-B614-8A46-AC98-1BCEF04B53FC}" type="slidenum">
               <a:rPr lang="en-US" smtClean="0"/>
-              <a:t>8</a:t>
+              <a:t>7</a:t>
             </a:fld>
             <a:endParaRPr lang="en-US"/>
           </a:p>
@@ -1079,7 +994,7 @@
 </p:notes>
 </file>
 
-<file path=ppt/notesSlides/notesSlide7.xml><?xml version="1.0" encoding="utf-8"?>
+<file path=ppt/notesSlides/notesSlide6.xml><?xml version="1.0" encoding="utf-8"?>
 <p:notes xmlns:a="http://schemas.openxmlformats.org/drawingml/2006/main" xmlns:r="http://schemas.openxmlformats.org/officeDocument/2006/relationships" xmlns:p="http://schemas.openxmlformats.org/presentationml/2006/main">
   <p:cSld>
     <p:spTree>
@@ -1168,7 +1083,7 @@
           <a:p>
             <a:fld id="{E216BF73-B614-8A46-AC98-1BCEF04B53FC}" type="slidenum">
               <a:rPr lang="en-US" smtClean="0"/>
-              <a:t>9</a:t>
+              <a:t>8</a:t>
             </a:fld>
             <a:endParaRPr lang="en-US"/>
           </a:p>
@@ -4694,15 +4609,7 @@
             </a:r>
             <a:r>
               <a:rPr lang="en-US" sz="1600" dirty="0"/>
-              <a:t>School of Computing and Information </a:t>
-            </a:r>
-            <a:r>
-              <a:rPr lang="en-US" sz="1600" dirty="0" err="1"/>
-              <a:t>Science,University</a:t>
-            </a:r>
-            <a:r>
-              <a:rPr lang="en-US" sz="1600" dirty="0"/>
-              <a:t> of Maine, Orono, ME, United States</a:t>
+              <a:t>School of Computing and Information Science, University of Maine, Orono, ME, United States</a:t>
             </a:r>
           </a:p>
           <a:p>
@@ -5188,464 +5095,6 @@
     </mc:Choice>
     <mc:Fallback xmlns="">
       <p:transition spd="slow" advTm="22503"/>
-    </mc:Fallback>
-  </mc:AlternateContent>
-</p:sld>
-</file>
-
-<file path=ppt/slides/slide10.xml><?xml version="1.0" encoding="utf-8"?>
-<p:sld xmlns:a="http://schemas.openxmlformats.org/drawingml/2006/main" xmlns:r="http://schemas.openxmlformats.org/officeDocument/2006/relationships" xmlns:p="http://schemas.openxmlformats.org/presentationml/2006/main">
-  <p:cSld>
-    <p:spTree>
-      <p:nvGrpSpPr>
-        <p:cNvPr id="1" name=""/>
-        <p:cNvGrpSpPr/>
-        <p:nvPr/>
-      </p:nvGrpSpPr>
-      <p:grpSpPr>
-        <a:xfrm>
-          <a:off x="0" y="0"/>
-          <a:ext cx="0" cy="0"/>
-          <a:chOff x="0" y="0"/>
-          <a:chExt cx="0" cy="0"/>
-        </a:xfrm>
-      </p:grpSpPr>
-      <p:sp>
-        <p:nvSpPr>
-          <p:cNvPr id="4" name="Slide Number Placeholder 3">
-            <a:extLst>
-              <a:ext uri="{FF2B5EF4-FFF2-40B4-BE49-F238E27FC236}">
-                <a16:creationId xmlns:a16="http://schemas.microsoft.com/office/drawing/2014/main" id="{F4C31815-7CA9-9C7D-7FC4-8A6E9DB3BABD}"/>
-              </a:ext>
-            </a:extLst>
-          </p:cNvPr>
-          <p:cNvSpPr>
-            <a:spLocks noGrp="1"/>
-          </p:cNvSpPr>
-          <p:nvPr>
-            <p:ph type="sldNum" sz="quarter" idx="12"/>
-          </p:nvPr>
-        </p:nvSpPr>
-        <p:spPr/>
-        <p:txBody>
-          <a:bodyPr/>
-          <a:lstStyle/>
-          <a:p>
-            <a:fld id="{F02AFB4B-EED2-CD4B-9AB0-9DB25B714611}" type="slidenum">
-              <a:rPr lang="en-US" smtClean="0"/>
-              <a:t>10</a:t>
-            </a:fld>
-            <a:endParaRPr lang="en-US"/>
-          </a:p>
-        </p:txBody>
-      </p:sp>
-      <p:sp>
-        <p:nvSpPr>
-          <p:cNvPr id="5" name="Title 1">
-            <a:extLst>
-              <a:ext uri="{FF2B5EF4-FFF2-40B4-BE49-F238E27FC236}">
-                <a16:creationId xmlns:a16="http://schemas.microsoft.com/office/drawing/2014/main" id="{AEBEA98D-F588-92B2-D1C1-D654179ED64F}"/>
-              </a:ext>
-            </a:extLst>
-          </p:cNvPr>
-          <p:cNvSpPr txBox="1">
-            <a:spLocks/>
-          </p:cNvSpPr>
-          <p:nvPr/>
-        </p:nvSpPr>
-        <p:spPr>
-          <a:xfrm>
-            <a:off x="1141296" y="2388995"/>
-            <a:ext cx="4002236" cy="1325563"/>
-          </a:xfrm>
-          <a:prstGeom prst="rect">
-            <a:avLst/>
-          </a:prstGeom>
-        </p:spPr>
-        <p:txBody>
-          <a:bodyPr vert="horz" lIns="91440" tIns="45720" rIns="91440" bIns="45720" rtlCol="0" anchor="ctr">
-            <a:normAutofit/>
-          </a:bodyPr>
-          <a:lstStyle>
-            <a:lvl1pPr algn="l" defTabSz="914400" rtl="0" eaLnBrk="1" latinLnBrk="0" hangingPunct="1">
-              <a:lnSpc>
-                <a:spcPct val="90000"/>
-              </a:lnSpc>
-              <a:spcBef>
-                <a:spcPct val="0"/>
-              </a:spcBef>
-              <a:buNone/>
-              <a:defRPr sz="4400" kern="1200">
-                <a:solidFill>
-                  <a:schemeClr val="tx1"/>
-                </a:solidFill>
-                <a:latin typeface="+mj-lt"/>
-                <a:ea typeface="+mj-ea"/>
-                <a:cs typeface="+mj-cs"/>
-              </a:defRPr>
-            </a:lvl1pPr>
-          </a:lstStyle>
-          <a:p>
-            <a:r>
-              <a:rPr lang="en-US" b="1" dirty="0">
-                <a:latin typeface="Avenir Next Heavy" panose="020B0503020202020204" pitchFamily="34" charset="0"/>
-              </a:rPr>
-              <a:t>Thank you!</a:t>
-            </a:r>
-          </a:p>
-        </p:txBody>
-      </p:sp>
-      <p:sp>
-        <p:nvSpPr>
-          <p:cNvPr id="6" name="TextBox 5">
-            <a:extLst>
-              <a:ext uri="{FF2B5EF4-FFF2-40B4-BE49-F238E27FC236}">
-                <a16:creationId xmlns:a16="http://schemas.microsoft.com/office/drawing/2014/main" id="{A0BFDE45-F6F4-CEC6-4605-8D01CFC71178}"/>
-              </a:ext>
-            </a:extLst>
-          </p:cNvPr>
-          <p:cNvSpPr txBox="1"/>
-          <p:nvPr/>
-        </p:nvSpPr>
-        <p:spPr>
-          <a:xfrm>
-            <a:off x="1181192" y="3370253"/>
-            <a:ext cx="3329758" cy="400110"/>
-          </a:xfrm>
-          <a:prstGeom prst="rect">
-            <a:avLst/>
-          </a:prstGeom>
-          <a:noFill/>
-        </p:spPr>
-        <p:txBody>
-          <a:bodyPr wrap="none" rtlCol="0">
-            <a:spAutoFit/>
-          </a:bodyPr>
-          <a:lstStyle/>
-          <a:p>
-            <a:r>
-              <a:rPr lang="en-US" sz="2000" dirty="0" err="1">
-                <a:latin typeface="Avenir Next" panose="020B0503020202020204" pitchFamily="34" charset="0"/>
-              </a:rPr>
-              <a:t>zhangyu.wang@maine.edu</a:t>
-            </a:r>
-            <a:endParaRPr lang="en-US" sz="2000" dirty="0">
-              <a:latin typeface="Avenir Next" panose="020B0503020202020204" pitchFamily="34" charset="0"/>
-            </a:endParaRPr>
-          </a:p>
-        </p:txBody>
-      </p:sp>
-      <p:sp>
-        <p:nvSpPr>
-          <p:cNvPr id="9" name="Title 1">
-            <a:extLst>
-              <a:ext uri="{FF2B5EF4-FFF2-40B4-BE49-F238E27FC236}">
-                <a16:creationId xmlns:a16="http://schemas.microsoft.com/office/drawing/2014/main" id="{FF8B9C2C-8527-DB12-43E8-B235674CF938}"/>
-              </a:ext>
-            </a:extLst>
-          </p:cNvPr>
-          <p:cNvSpPr txBox="1">
-            <a:spLocks/>
-          </p:cNvSpPr>
-          <p:nvPr/>
-        </p:nvSpPr>
-        <p:spPr>
-          <a:xfrm>
-            <a:off x="6408301" y="1559557"/>
-            <a:ext cx="4002236" cy="1325563"/>
-          </a:xfrm>
-          <a:prstGeom prst="rect">
-            <a:avLst/>
-          </a:prstGeom>
-        </p:spPr>
-        <p:txBody>
-          <a:bodyPr vert="horz" lIns="91440" tIns="45720" rIns="91440" bIns="45720" rtlCol="0" anchor="ctr">
-            <a:normAutofit/>
-          </a:bodyPr>
-          <a:lstStyle>
-            <a:lvl1pPr algn="l" defTabSz="914400" rtl="0" eaLnBrk="1" latinLnBrk="0" hangingPunct="1">
-              <a:lnSpc>
-                <a:spcPct val="90000"/>
-              </a:lnSpc>
-              <a:spcBef>
-                <a:spcPct val="0"/>
-              </a:spcBef>
-              <a:buNone/>
-              <a:defRPr sz="4400" kern="1200">
-                <a:solidFill>
-                  <a:schemeClr val="tx1"/>
-                </a:solidFill>
-                <a:latin typeface="+mj-lt"/>
-                <a:ea typeface="+mj-ea"/>
-                <a:cs typeface="+mj-cs"/>
-              </a:defRPr>
-            </a:lvl1pPr>
-          </a:lstStyle>
-          <a:p>
-            <a:r>
-              <a:rPr lang="en-US" sz="3200" b="1" dirty="0">
-                <a:latin typeface="Avenir Next Heavy" panose="020B0503020202020204" pitchFamily="34" charset="0"/>
-              </a:rPr>
-              <a:t>Acknowledgment</a:t>
-            </a:r>
-            <a:endParaRPr lang="en-US" sz="2800" b="1" dirty="0">
-              <a:latin typeface="Avenir Next Heavy" panose="020B0503020202020204" pitchFamily="34" charset="0"/>
-            </a:endParaRPr>
-          </a:p>
-        </p:txBody>
-      </p:sp>
-      <p:sp>
-        <p:nvSpPr>
-          <p:cNvPr id="12" name="Title 1">
-            <a:extLst>
-              <a:ext uri="{FF2B5EF4-FFF2-40B4-BE49-F238E27FC236}">
-                <a16:creationId xmlns:a16="http://schemas.microsoft.com/office/drawing/2014/main" id="{7950666D-2F1D-CE9B-758C-110729A50CF0}"/>
-              </a:ext>
-            </a:extLst>
-          </p:cNvPr>
-          <p:cNvSpPr txBox="1">
-            <a:spLocks/>
-          </p:cNvSpPr>
-          <p:nvPr/>
-        </p:nvSpPr>
-        <p:spPr>
-          <a:xfrm>
-            <a:off x="6408301" y="3957953"/>
-            <a:ext cx="4537789" cy="1325563"/>
-          </a:xfrm>
-          <a:prstGeom prst="rect">
-            <a:avLst/>
-          </a:prstGeom>
-        </p:spPr>
-        <p:txBody>
-          <a:bodyPr vert="horz" lIns="91440" tIns="45720" rIns="91440" bIns="45720" rtlCol="0" anchor="ctr">
-            <a:normAutofit/>
-          </a:bodyPr>
-          <a:lstStyle>
-            <a:lvl1pPr algn="l" defTabSz="914400" rtl="0" eaLnBrk="1" latinLnBrk="0" hangingPunct="1">
-              <a:lnSpc>
-                <a:spcPct val="90000"/>
-              </a:lnSpc>
-              <a:spcBef>
-                <a:spcPct val="0"/>
-              </a:spcBef>
-              <a:buNone/>
-              <a:defRPr sz="4400" kern="1200">
-                <a:solidFill>
-                  <a:schemeClr val="tx1"/>
-                </a:solidFill>
-                <a:latin typeface="+mj-lt"/>
-                <a:ea typeface="+mj-ea"/>
-                <a:cs typeface="+mj-cs"/>
-              </a:defRPr>
-            </a:lvl1pPr>
-          </a:lstStyle>
-          <a:p>
-            <a:pPr>
-              <a:lnSpc>
-                <a:spcPct val="100000"/>
-              </a:lnSpc>
-            </a:pPr>
-            <a:r>
-              <a:rPr lang="en-US" sz="2000" dirty="0">
-                <a:latin typeface="Avenir Next" panose="020B0503020202020204" pitchFamily="34" charset="0"/>
-              </a:rPr>
-              <a:t>Collaborators: </a:t>
-            </a:r>
-            <a:r>
-              <a:rPr lang="en-US" sz="2000" dirty="0" err="1">
-                <a:latin typeface="Avenir Next" panose="020B0503020202020204" pitchFamily="34" charset="0"/>
-              </a:rPr>
-              <a:t>Yanghui</a:t>
-            </a:r>
-            <a:r>
-              <a:rPr lang="en-US" sz="2000" dirty="0">
-                <a:latin typeface="Avenir Next" panose="020B0503020202020204" pitchFamily="34" charset="0"/>
-              </a:rPr>
-              <a:t> Kang</a:t>
-            </a:r>
-          </a:p>
-          <a:p>
-            <a:pPr>
-              <a:lnSpc>
-                <a:spcPct val="100000"/>
-              </a:lnSpc>
-            </a:pPr>
-            <a:r>
-              <a:rPr lang="en-US" sz="2000" dirty="0">
-                <a:latin typeface="Avenir Next" panose="020B0503020202020204" pitchFamily="34" charset="0"/>
-              </a:rPr>
-              <a:t>Thanks to: Aaron </a:t>
-            </a:r>
-            <a:r>
-              <a:rPr lang="en-US" sz="2000" dirty="0" err="1">
-                <a:latin typeface="Avenir Next" panose="020B0503020202020204" pitchFamily="34" charset="0"/>
-              </a:rPr>
-              <a:t>Weiskittel</a:t>
-            </a:r>
-            <a:endParaRPr lang="en-US" sz="2800" dirty="0">
-              <a:latin typeface="Avenir Next" panose="020B0503020202020204" pitchFamily="34" charset="0"/>
-            </a:endParaRPr>
-          </a:p>
-        </p:txBody>
-      </p:sp>
-      <p:pic>
-        <p:nvPicPr>
-          <p:cNvPr id="2" name="Picture 8" descr="logo">
-            <a:extLst>
-              <a:ext uri="{FF2B5EF4-FFF2-40B4-BE49-F238E27FC236}">
-                <a16:creationId xmlns:a16="http://schemas.microsoft.com/office/drawing/2014/main" id="{92937418-F7FD-4C2B-CF90-D523D87C0D45}"/>
-              </a:ext>
-            </a:extLst>
-          </p:cNvPr>
-          <p:cNvPicPr>
-            <a:picLocks noChangeAspect="1" noChangeArrowheads="1"/>
-          </p:cNvPicPr>
-          <p:nvPr/>
-        </p:nvPicPr>
-        <p:blipFill>
-          <a:blip r:embed="rId2">
-            <a:extLst>
-              <a:ext uri="{28A0092B-C50C-407E-A947-70E740481C1C}">
-                <a14:useLocalDpi xmlns:a14="http://schemas.microsoft.com/office/drawing/2010/main" val="0"/>
-              </a:ext>
-            </a:extLst>
-          </a:blip>
-          <a:srcRect/>
-          <a:stretch>
-            <a:fillRect/>
-          </a:stretch>
-        </p:blipFill>
-        <p:spPr bwMode="auto">
-          <a:xfrm>
-            <a:off x="6483763" y="2511127"/>
-            <a:ext cx="1374048" cy="1461754"/>
-          </a:xfrm>
-          <a:prstGeom prst="rect">
-            <a:avLst/>
-          </a:prstGeom>
-          <a:noFill/>
-          <a:extLst>
-            <a:ext uri="{909E8E84-426E-40DD-AFC4-6F175D3DCCD1}">
-              <a14:hiddenFill xmlns:a14="http://schemas.microsoft.com/office/drawing/2010/main">
-                <a:solidFill>
-                  <a:srgbClr val="FFFFFF"/>
-                </a:solidFill>
-              </a14:hiddenFill>
-            </a:ext>
-          </a:extLst>
-        </p:spPr>
-      </p:pic>
-      <p:pic>
-        <p:nvPicPr>
-          <p:cNvPr id="8194" name="Picture 2" descr="National Science Foundation - Wikipedia">
-            <a:extLst>
-              <a:ext uri="{FF2B5EF4-FFF2-40B4-BE49-F238E27FC236}">
-                <a16:creationId xmlns:a16="http://schemas.microsoft.com/office/drawing/2014/main" id="{915E0307-9A42-7FAF-607B-819EBB12E040}"/>
-              </a:ext>
-            </a:extLst>
-          </p:cNvPr>
-          <p:cNvPicPr>
-            <a:picLocks noChangeAspect="1" noChangeArrowheads="1"/>
-          </p:cNvPicPr>
-          <p:nvPr/>
-        </p:nvPicPr>
-        <p:blipFill>
-          <a:blip r:embed="rId3">
-            <a:extLst>
-              <a:ext uri="{28A0092B-C50C-407E-A947-70E740481C1C}">
-                <a14:useLocalDpi xmlns:a14="http://schemas.microsoft.com/office/drawing/2010/main" val="0"/>
-              </a:ext>
-            </a:extLst>
-          </a:blip>
-          <a:srcRect/>
-          <a:stretch>
-            <a:fillRect/>
-          </a:stretch>
-        </p:blipFill>
-        <p:spPr bwMode="auto">
-          <a:xfrm>
-            <a:off x="7933273" y="2511128"/>
-            <a:ext cx="1457017" cy="1461754"/>
-          </a:xfrm>
-          <a:prstGeom prst="rect">
-            <a:avLst/>
-          </a:prstGeom>
-          <a:noFill/>
-          <a:extLst>
-            <a:ext uri="{909E8E84-426E-40DD-AFC4-6F175D3DCCD1}">
-              <a14:hiddenFill xmlns:a14="http://schemas.microsoft.com/office/drawing/2010/main">
-                <a:solidFill>
-                  <a:srgbClr val="FFFFFF"/>
-                </a:solidFill>
-              </a14:hiddenFill>
-            </a:ext>
-          </a:extLst>
-        </p:spPr>
-      </p:pic>
-      <p:pic>
-        <p:nvPicPr>
-          <p:cNvPr id="8196" name="Picture 4" descr="Stream NASA | Listen to podcast episodes online for free on SoundCloud">
-            <a:extLst>
-              <a:ext uri="{FF2B5EF4-FFF2-40B4-BE49-F238E27FC236}">
-                <a16:creationId xmlns:a16="http://schemas.microsoft.com/office/drawing/2014/main" id="{46BC9EB1-620D-3C59-26BC-31038F623598}"/>
-              </a:ext>
-            </a:extLst>
-          </p:cNvPr>
-          <p:cNvPicPr>
-            <a:picLocks noChangeAspect="1" noChangeArrowheads="1"/>
-          </p:cNvPicPr>
-          <p:nvPr/>
-        </p:nvPicPr>
-        <p:blipFill>
-          <a:blip r:embed="rId4">
-            <a:extLst>
-              <a:ext uri="{28A0092B-C50C-407E-A947-70E740481C1C}">
-                <a14:useLocalDpi xmlns:a14="http://schemas.microsoft.com/office/drawing/2010/main" val="0"/>
-              </a:ext>
-            </a:extLst>
-          </a:blip>
-          <a:srcRect/>
-          <a:stretch>
-            <a:fillRect/>
-          </a:stretch>
-        </p:blipFill>
-        <p:spPr bwMode="auto">
-          <a:xfrm>
-            <a:off x="9459821" y="2511127"/>
-            <a:ext cx="1446826" cy="1446826"/>
-          </a:xfrm>
-          <a:prstGeom prst="rect">
-            <a:avLst/>
-          </a:prstGeom>
-          <a:noFill/>
-          <a:extLst>
-            <a:ext uri="{909E8E84-426E-40DD-AFC4-6F175D3DCCD1}">
-              <a14:hiddenFill xmlns:a14="http://schemas.microsoft.com/office/drawing/2010/main">
-                <a:solidFill>
-                  <a:srgbClr val="FFFFFF"/>
-                </a:solidFill>
-              </a14:hiddenFill>
-            </a:ext>
-          </a:extLst>
-        </p:spPr>
-      </p:pic>
-    </p:spTree>
-    <p:extLst>
-      <p:ext uri="{BB962C8B-B14F-4D97-AF65-F5344CB8AC3E}">
-        <p14:creationId xmlns:p14="http://schemas.microsoft.com/office/powerpoint/2010/main" val="1084214139"/>
-      </p:ext>
-    </p:extLst>
-  </p:cSld>
-  <p:clrMapOvr>
-    <a:masterClrMapping/>
-  </p:clrMapOvr>
-  <mc:AlternateContent xmlns:mc="http://schemas.openxmlformats.org/markup-compatibility/2006" xmlns:p14="http://schemas.microsoft.com/office/powerpoint/2010/main">
-    <mc:Choice Requires="p14">
-      <p:transition spd="slow" p14:dur="2000" advTm="16377"/>
-    </mc:Choice>
-    <mc:Fallback xmlns="">
-      <p:transition spd="slow" advTm="16377"/>
     </mc:Fallback>
   </mc:AlternateContent>
 </p:sld>
@@ -5870,7 +5319,7 @@
           <a:p>
             <a:r>
               <a:rPr lang="en-US" dirty="0"/>
-              <a:t>Environmental Drivers</a:t>
+              <a:t>Process Model for Ecosystem Modelling</a:t>
             </a:r>
           </a:p>
         </p:txBody>
@@ -5891,10 +5340,15 @@
             <p:ph idx="1"/>
           </p:nvPr>
         </p:nvSpPr>
-        <p:spPr/>
+        <p:spPr>
+          <a:xfrm>
+            <a:off x="6252677" y="1825625"/>
+            <a:ext cx="5101123" cy="4351338"/>
+          </a:xfrm>
+        </p:spPr>
         <p:txBody>
           <a:bodyPr>
-            <a:normAutofit fontScale="92500" lnSpcReduction="20000"/>
+            <a:normAutofit/>
           </a:bodyPr>
           <a:lstStyle/>
           <a:p>
@@ -5908,34 +5362,11 @@
             </a:pPr>
             <a:r>
               <a:rPr lang="en-US" b="1" dirty="0"/>
-              <a:t>Temperature (proxied by air temperature T</a:t>
-            </a:r>
-            <a:r>
-              <a:rPr lang="en-US" b="1" baseline="-25000" dirty="0"/>
-              <a:t>A</a:t>
-            </a:r>
-            <a:r>
-              <a:rPr lang="en-US" b="1" dirty="0"/>
-              <a:t>)</a:t>
-            </a:r>
-          </a:p>
-          <a:p>
-            <a:pPr marL="457200" lvl="1" indent="0">
-              <a:buNone/>
-            </a:pPr>
-            <a:r>
-              <a:rPr lang="en-US" dirty="0"/>
-              <a:t>RECO generally increases exponentially with temperature because enzymatic activity in plants and microbes accelerates as conditions warm. </a:t>
-            </a:r>
-          </a:p>
-          <a:p>
-            <a:pPr marL="457200" lvl="1" indent="0">
-              <a:buNone/>
-            </a:pPr>
-            <a:endParaRPr lang="en-US" dirty="0"/>
-          </a:p>
-          <a:p>
-            <a:pPr>
+              <a:t>Environmental variables</a:t>
+            </a:r>
+          </a:p>
+          <a:p>
+            <a:pPr lvl="1">
               <a:spcBef>
                 <a:spcPts val="0"/>
               </a:spcBef>
@@ -5944,24 +5375,20 @@
               </a:spcAft>
             </a:pPr>
             <a:r>
-              <a:rPr lang="en-US" b="1" dirty="0"/>
-              <a:t>Soil moisture (proxied by precipitation P and VPD)</a:t>
-            </a:r>
-          </a:p>
-          <a:p>
-            <a:pPr marL="457200" lvl="1" indent="0">
-              <a:buNone/>
-            </a:pPr>
-            <a:r>
               <a:rPr lang="en-US" dirty="0"/>
-              <a:t>RECO responds non-linearly to soil moisture availability. Moderate moisture promotes microbial activity and root respiration, while very dry conditions suppress respiration and waterlogged (anoxic) soils limit aerobic decomposition. Precipitation and vapor pressure deficit (VPD) are used as proxies for soil water availability.</a:t>
-            </a:r>
-          </a:p>
-          <a:p>
-            <a:endParaRPr lang="en-US" dirty="0"/>
-          </a:p>
-          <a:p>
-            <a:pPr>
+              <a:t>Temperature (proxied by air temperature T</a:t>
+            </a:r>
+            <a:r>
+              <a:rPr lang="en-US" baseline="-25000" dirty="0"/>
+              <a:t>A</a:t>
+            </a:r>
+            <a:r>
+              <a:rPr lang="en-US" dirty="0"/>
+              <a:t>)</a:t>
+            </a:r>
+          </a:p>
+          <a:p>
+            <a:pPr lvl="1">
               <a:spcBef>
                 <a:spcPts val="0"/>
               </a:spcBef>
@@ -5970,17 +5397,22 @@
               </a:spcAft>
             </a:pPr>
             <a:r>
-              <a:rPr lang="en-US" b="1" dirty="0"/>
+              <a:rPr lang="en-US" dirty="0"/>
+              <a:t>Soil water availability (proxied by precipitation P and VPD)</a:t>
+            </a:r>
+          </a:p>
+          <a:p>
+            <a:pPr lvl="1">
+              <a:spcBef>
+                <a:spcPts val="0"/>
+              </a:spcBef>
+              <a:spcAft>
+                <a:spcPts val="1000"/>
+              </a:spcAft>
+            </a:pPr>
+            <a:r>
+              <a:rPr lang="en-US" dirty="0"/>
               <a:t>Vegetation and productivity (proxied by GPP)</a:t>
-            </a:r>
-          </a:p>
-          <a:p>
-            <a:pPr marL="457200" lvl="1" indent="0">
-              <a:buNone/>
-            </a:pPr>
-            <a:r>
-              <a:rPr lang="en-US" dirty="0"/>
-              <a:t>Ecosystems with greater biomass, leaf area, and gross primary productivity (GPP) tend to exhibit higher autotrophic respiration, linking RECO closely to photosynthetic activity over seasonal timescales.</a:t>
             </a:r>
           </a:p>
         </p:txBody>
@@ -6014,2437 +5446,14 @@
           </a:p>
         </p:txBody>
       </p:sp>
-    </p:spTree>
-    <p:extLst>
-      <p:ext uri="{BB962C8B-B14F-4D97-AF65-F5344CB8AC3E}">
-        <p14:creationId xmlns:p14="http://schemas.microsoft.com/office/powerpoint/2010/main" val="550431981"/>
-      </p:ext>
-    </p:extLst>
-  </p:cSld>
-  <p:clrMapOvr>
-    <a:masterClrMapping/>
-  </p:clrMapOvr>
-</p:sld>
-</file>
-
-<file path=ppt/slides/slide4.xml><?xml version="1.0" encoding="utf-8"?>
-<p:sld xmlns:a="http://schemas.openxmlformats.org/drawingml/2006/main" xmlns:r="http://schemas.openxmlformats.org/officeDocument/2006/relationships" xmlns:p="http://schemas.openxmlformats.org/presentationml/2006/main">
-  <p:cSld>
-    <p:spTree>
-      <p:nvGrpSpPr>
-        <p:cNvPr id="1" name=""/>
-        <p:cNvGrpSpPr/>
-        <p:nvPr/>
-      </p:nvGrpSpPr>
-      <p:grpSpPr>
-        <a:xfrm>
-          <a:off x="0" y="0"/>
-          <a:ext cx="0" cy="0"/>
-          <a:chOff x="0" y="0"/>
-          <a:chExt cx="0" cy="0"/>
-        </a:xfrm>
-      </p:grpSpPr>
-      <p:sp>
-        <p:nvSpPr>
-          <p:cNvPr id="2" name="Title 1">
-            <a:extLst>
-              <a:ext uri="{FF2B5EF4-FFF2-40B4-BE49-F238E27FC236}">
-                <a16:creationId xmlns:a16="http://schemas.microsoft.com/office/drawing/2014/main" id="{AC7C54D2-D77E-2018-E666-E55B0E37ADC4}"/>
-              </a:ext>
-            </a:extLst>
-          </p:cNvPr>
-          <p:cNvSpPr>
-            <a:spLocks noGrp="1"/>
-          </p:cNvSpPr>
-          <p:nvPr>
-            <p:ph type="title"/>
-          </p:nvPr>
-        </p:nvSpPr>
-        <p:spPr/>
-        <p:txBody>
-          <a:bodyPr/>
-          <a:lstStyle/>
-          <a:p>
-            <a:r>
-              <a:rPr lang="en-US" dirty="0"/>
-              <a:t>Physical Process Model</a:t>
-            </a:r>
-          </a:p>
-        </p:txBody>
-      </p:sp>
-      <p:sp>
-        <p:nvSpPr>
-          <p:cNvPr id="4" name="Slide Number Placeholder 3">
-            <a:extLst>
-              <a:ext uri="{FF2B5EF4-FFF2-40B4-BE49-F238E27FC236}">
-                <a16:creationId xmlns:a16="http://schemas.microsoft.com/office/drawing/2014/main" id="{81185EF6-1F3D-B520-C50A-2239A737D64A}"/>
-              </a:ext>
-            </a:extLst>
-          </p:cNvPr>
-          <p:cNvSpPr>
-            <a:spLocks noGrp="1"/>
-          </p:cNvSpPr>
-          <p:nvPr>
-            <p:ph type="sldNum" sz="quarter" idx="12"/>
-          </p:nvPr>
-        </p:nvSpPr>
-        <p:spPr/>
-        <p:txBody>
-          <a:bodyPr/>
-          <a:lstStyle/>
-          <a:p>
-            <a:fld id="{F02AFB4B-EED2-CD4B-9AB0-9DB25B714611}" type="slidenum">
-              <a:rPr lang="en-US" smtClean="0"/>
-              <a:t>4</a:t>
-            </a:fld>
-            <a:endParaRPr lang="en-US"/>
-          </a:p>
-        </p:txBody>
-      </p:sp>
-      <p:sp>
-        <p:nvSpPr>
-          <p:cNvPr id="6" name="矩形: 圆角 1033">
-            <a:extLst>
-              <a:ext uri="{FF2B5EF4-FFF2-40B4-BE49-F238E27FC236}">
-                <a16:creationId xmlns:a16="http://schemas.microsoft.com/office/drawing/2014/main" id="{92A4D85E-A064-CF42-ECD3-2A3B72043214}"/>
-              </a:ext>
-            </a:extLst>
-          </p:cNvPr>
-          <p:cNvSpPr/>
-          <p:nvPr/>
-        </p:nvSpPr>
-        <p:spPr>
-          <a:xfrm>
-            <a:off x="5884695" y="3909864"/>
-            <a:ext cx="5224943" cy="2212116"/>
-          </a:xfrm>
-          <a:prstGeom prst="roundRect">
-            <a:avLst>
-              <a:gd name="adj" fmla="val 9187"/>
-            </a:avLst>
-          </a:prstGeom>
-          <a:solidFill>
-            <a:schemeClr val="accent2">
-              <a:lumMod val="20000"/>
-              <a:lumOff val="80000"/>
-            </a:schemeClr>
-          </a:solidFill>
-          <a:ln w="19050">
-            <a:noFill/>
-            <a:prstDash val="dash"/>
-          </a:ln>
-        </p:spPr>
-        <p:style>
-          <a:lnRef idx="2">
-            <a:schemeClr val="accent1">
-              <a:shade val="15000"/>
-            </a:schemeClr>
-          </a:lnRef>
-          <a:fillRef idx="1">
-            <a:schemeClr val="accent1"/>
-          </a:fillRef>
-          <a:effectRef idx="0">
-            <a:schemeClr val="accent1"/>
-          </a:effectRef>
-          <a:fontRef idx="minor">
-            <a:schemeClr val="lt1"/>
-          </a:fontRef>
-        </p:style>
-        <p:txBody>
-          <a:bodyPr rtlCol="0" anchor="ctr"/>
-          <a:lstStyle>
-            <a:defPPr>
-              <a:defRPr lang="zh-CN"/>
-            </a:defPPr>
-            <a:lvl1pPr marL="0" algn="l" defTabSz="914400" rtl="0" eaLnBrk="1" latinLnBrk="0" hangingPunct="1">
-              <a:defRPr sz="1800" kern="1200">
-                <a:solidFill>
-                  <a:schemeClr val="lt1"/>
-                </a:solidFill>
-                <a:latin typeface="+mn-lt"/>
-                <a:ea typeface="+mn-ea"/>
-                <a:cs typeface="+mn-cs"/>
-              </a:defRPr>
-            </a:lvl1pPr>
-            <a:lvl2pPr marL="457200" algn="l" defTabSz="914400" rtl="0" eaLnBrk="1" latinLnBrk="0" hangingPunct="1">
-              <a:defRPr sz="1800" kern="1200">
-                <a:solidFill>
-                  <a:schemeClr val="lt1"/>
-                </a:solidFill>
-                <a:latin typeface="+mn-lt"/>
-                <a:ea typeface="+mn-ea"/>
-                <a:cs typeface="+mn-cs"/>
-              </a:defRPr>
-            </a:lvl2pPr>
-            <a:lvl3pPr marL="914400" algn="l" defTabSz="914400" rtl="0" eaLnBrk="1" latinLnBrk="0" hangingPunct="1">
-              <a:defRPr sz="1800" kern="1200">
-                <a:solidFill>
-                  <a:schemeClr val="lt1"/>
-                </a:solidFill>
-                <a:latin typeface="+mn-lt"/>
-                <a:ea typeface="+mn-ea"/>
-                <a:cs typeface="+mn-cs"/>
-              </a:defRPr>
-            </a:lvl3pPr>
-            <a:lvl4pPr marL="1371600" algn="l" defTabSz="914400" rtl="0" eaLnBrk="1" latinLnBrk="0" hangingPunct="1">
-              <a:defRPr sz="1800" kern="1200">
-                <a:solidFill>
-                  <a:schemeClr val="lt1"/>
-                </a:solidFill>
-                <a:latin typeface="+mn-lt"/>
-                <a:ea typeface="+mn-ea"/>
-                <a:cs typeface="+mn-cs"/>
-              </a:defRPr>
-            </a:lvl4pPr>
-            <a:lvl5pPr marL="1828800" algn="l" defTabSz="914400" rtl="0" eaLnBrk="1" latinLnBrk="0" hangingPunct="1">
-              <a:defRPr sz="1800" kern="1200">
-                <a:solidFill>
-                  <a:schemeClr val="lt1"/>
-                </a:solidFill>
-                <a:latin typeface="+mn-lt"/>
-                <a:ea typeface="+mn-ea"/>
-                <a:cs typeface="+mn-cs"/>
-              </a:defRPr>
-            </a:lvl5pPr>
-            <a:lvl6pPr marL="2286000" algn="l" defTabSz="914400" rtl="0" eaLnBrk="1" latinLnBrk="0" hangingPunct="1">
-              <a:defRPr sz="1800" kern="1200">
-                <a:solidFill>
-                  <a:schemeClr val="lt1"/>
-                </a:solidFill>
-                <a:latin typeface="+mn-lt"/>
-                <a:ea typeface="+mn-ea"/>
-                <a:cs typeface="+mn-cs"/>
-              </a:defRPr>
-            </a:lvl6pPr>
-            <a:lvl7pPr marL="2743200" algn="l" defTabSz="914400" rtl="0" eaLnBrk="1" latinLnBrk="0" hangingPunct="1">
-              <a:defRPr sz="1800" kern="1200">
-                <a:solidFill>
-                  <a:schemeClr val="lt1"/>
-                </a:solidFill>
-                <a:latin typeface="+mn-lt"/>
-                <a:ea typeface="+mn-ea"/>
-                <a:cs typeface="+mn-cs"/>
-              </a:defRPr>
-            </a:lvl7pPr>
-            <a:lvl8pPr marL="3200400" algn="l" defTabSz="914400" rtl="0" eaLnBrk="1" latinLnBrk="0" hangingPunct="1">
-              <a:defRPr sz="1800" kern="1200">
-                <a:solidFill>
-                  <a:schemeClr val="lt1"/>
-                </a:solidFill>
-                <a:latin typeface="+mn-lt"/>
-                <a:ea typeface="+mn-ea"/>
-                <a:cs typeface="+mn-cs"/>
-              </a:defRPr>
-            </a:lvl8pPr>
-            <a:lvl9pPr marL="3657600" algn="l" defTabSz="914400" rtl="0" eaLnBrk="1" latinLnBrk="0" hangingPunct="1">
-              <a:defRPr sz="1800" kern="1200">
-                <a:solidFill>
-                  <a:schemeClr val="lt1"/>
-                </a:solidFill>
-                <a:latin typeface="+mn-lt"/>
-                <a:ea typeface="+mn-ea"/>
-                <a:cs typeface="+mn-cs"/>
-              </a:defRPr>
-            </a:lvl9pPr>
-          </a:lstStyle>
-          <a:p>
-            <a:pPr algn="ctr"/>
-            <a:endParaRPr lang="zh-CN" altLang="en-US"/>
-          </a:p>
-        </p:txBody>
-      </p:sp>
-      <p:sp>
-        <p:nvSpPr>
-          <p:cNvPr id="7" name="文本框 1031">
-            <a:extLst>
-              <a:ext uri="{FF2B5EF4-FFF2-40B4-BE49-F238E27FC236}">
-                <a16:creationId xmlns:a16="http://schemas.microsoft.com/office/drawing/2014/main" id="{7B1CB625-4675-2AE0-D1DA-8BB4ABC8CF30}"/>
-              </a:ext>
-            </a:extLst>
-          </p:cNvPr>
-          <p:cNvSpPr txBox="1"/>
-          <p:nvPr/>
-        </p:nvSpPr>
-        <p:spPr>
-          <a:xfrm>
-            <a:off x="7297012" y="2676275"/>
-            <a:ext cx="1936528" cy="681038"/>
-          </a:xfrm>
-          <a:prstGeom prst="roundRect">
-            <a:avLst/>
-          </a:prstGeom>
-          <a:solidFill>
-            <a:schemeClr val="bg1">
-              <a:lumMod val="95000"/>
-            </a:schemeClr>
-          </a:solidFill>
-          <a:ln w="19050">
-            <a:solidFill>
-              <a:schemeClr val="tx1"/>
-            </a:solidFill>
-            <a:prstDash val="dash"/>
-          </a:ln>
-        </p:spPr>
-        <p:txBody>
-          <a:bodyPr wrap="square" rtlCol="0">
-            <a:spAutoFit/>
-          </a:bodyPr>
-          <a:lstStyle>
-            <a:defPPr>
-              <a:defRPr lang="zh-CN"/>
-            </a:defPPr>
-            <a:lvl1pPr marL="0" algn="l" defTabSz="914400" rtl="0" eaLnBrk="1" latinLnBrk="0" hangingPunct="1">
-              <a:defRPr sz="1800" kern="1200">
-                <a:solidFill>
-                  <a:schemeClr val="tx1"/>
-                </a:solidFill>
-                <a:latin typeface="+mn-lt"/>
-                <a:ea typeface="+mn-ea"/>
-                <a:cs typeface="+mn-cs"/>
-              </a:defRPr>
-            </a:lvl1pPr>
-            <a:lvl2pPr marL="457200" algn="l" defTabSz="914400" rtl="0" eaLnBrk="1" latinLnBrk="0" hangingPunct="1">
-              <a:defRPr sz="1800" kern="1200">
-                <a:solidFill>
-                  <a:schemeClr val="tx1"/>
-                </a:solidFill>
-                <a:latin typeface="+mn-lt"/>
-                <a:ea typeface="+mn-ea"/>
-                <a:cs typeface="+mn-cs"/>
-              </a:defRPr>
-            </a:lvl2pPr>
-            <a:lvl3pPr marL="914400" algn="l" defTabSz="914400" rtl="0" eaLnBrk="1" latinLnBrk="0" hangingPunct="1">
-              <a:defRPr sz="1800" kern="1200">
-                <a:solidFill>
-                  <a:schemeClr val="tx1"/>
-                </a:solidFill>
-                <a:latin typeface="+mn-lt"/>
-                <a:ea typeface="+mn-ea"/>
-                <a:cs typeface="+mn-cs"/>
-              </a:defRPr>
-            </a:lvl3pPr>
-            <a:lvl4pPr marL="1371600" algn="l" defTabSz="914400" rtl="0" eaLnBrk="1" latinLnBrk="0" hangingPunct="1">
-              <a:defRPr sz="1800" kern="1200">
-                <a:solidFill>
-                  <a:schemeClr val="tx1"/>
-                </a:solidFill>
-                <a:latin typeface="+mn-lt"/>
-                <a:ea typeface="+mn-ea"/>
-                <a:cs typeface="+mn-cs"/>
-              </a:defRPr>
-            </a:lvl4pPr>
-            <a:lvl5pPr marL="1828800" algn="l" defTabSz="914400" rtl="0" eaLnBrk="1" latinLnBrk="0" hangingPunct="1">
-              <a:defRPr sz="1800" kern="1200">
-                <a:solidFill>
-                  <a:schemeClr val="tx1"/>
-                </a:solidFill>
-                <a:latin typeface="+mn-lt"/>
-                <a:ea typeface="+mn-ea"/>
-                <a:cs typeface="+mn-cs"/>
-              </a:defRPr>
-            </a:lvl5pPr>
-            <a:lvl6pPr marL="2286000" algn="l" defTabSz="914400" rtl="0" eaLnBrk="1" latinLnBrk="0" hangingPunct="1">
-              <a:defRPr sz="1800" kern="1200">
-                <a:solidFill>
-                  <a:schemeClr val="tx1"/>
-                </a:solidFill>
-                <a:latin typeface="+mn-lt"/>
-                <a:ea typeface="+mn-ea"/>
-                <a:cs typeface="+mn-cs"/>
-              </a:defRPr>
-            </a:lvl6pPr>
-            <a:lvl7pPr marL="2743200" algn="l" defTabSz="914400" rtl="0" eaLnBrk="1" latinLnBrk="0" hangingPunct="1">
-              <a:defRPr sz="1800" kern="1200">
-                <a:solidFill>
-                  <a:schemeClr val="tx1"/>
-                </a:solidFill>
-                <a:latin typeface="+mn-lt"/>
-                <a:ea typeface="+mn-ea"/>
-                <a:cs typeface="+mn-cs"/>
-              </a:defRPr>
-            </a:lvl7pPr>
-            <a:lvl8pPr marL="3200400" algn="l" defTabSz="914400" rtl="0" eaLnBrk="1" latinLnBrk="0" hangingPunct="1">
-              <a:defRPr sz="1800" kern="1200">
-                <a:solidFill>
-                  <a:schemeClr val="tx1"/>
-                </a:solidFill>
-                <a:latin typeface="+mn-lt"/>
-                <a:ea typeface="+mn-ea"/>
-                <a:cs typeface="+mn-cs"/>
-              </a:defRPr>
-            </a:lvl8pPr>
-            <a:lvl9pPr marL="3657600" algn="l" defTabSz="914400" rtl="0" eaLnBrk="1" latinLnBrk="0" hangingPunct="1">
-              <a:defRPr sz="1800" kern="1200">
-                <a:solidFill>
-                  <a:schemeClr val="tx1"/>
-                </a:solidFill>
-                <a:latin typeface="+mn-lt"/>
-                <a:ea typeface="+mn-ea"/>
-                <a:cs typeface="+mn-cs"/>
-              </a:defRPr>
-            </a:lvl9pPr>
-          </a:lstStyle>
-          <a:p>
-            <a:endParaRPr lang="en-US" altLang="zh-CN" sz="1700" dirty="0"/>
-          </a:p>
-          <a:p>
-            <a:endParaRPr lang="zh-CN" altLang="en-US" sz="1700" dirty="0"/>
-          </a:p>
-        </p:txBody>
-      </p:sp>
-      <p:sp>
-        <p:nvSpPr>
-          <p:cNvPr id="9" name="矩形 1">
-            <a:extLst>
-              <a:ext uri="{FF2B5EF4-FFF2-40B4-BE49-F238E27FC236}">
-                <a16:creationId xmlns:a16="http://schemas.microsoft.com/office/drawing/2014/main" id="{8BF0E47B-D205-D3AA-5425-78A6B30C9873}"/>
-              </a:ext>
-            </a:extLst>
-          </p:cNvPr>
-          <p:cNvSpPr/>
-          <p:nvPr/>
-        </p:nvSpPr>
-        <p:spPr>
-          <a:xfrm>
-            <a:off x="5354568" y="2726479"/>
-            <a:ext cx="1298027" cy="499241"/>
-          </a:xfrm>
-          <a:prstGeom prst="rect">
-            <a:avLst/>
-          </a:prstGeom>
-          <a:solidFill>
-            <a:schemeClr val="accent6">
-              <a:lumMod val="40000"/>
-              <a:lumOff val="60000"/>
-            </a:schemeClr>
-          </a:solidFill>
-        </p:spPr>
-        <p:style>
-          <a:lnRef idx="2">
-            <a:schemeClr val="accent1">
-              <a:shade val="15000"/>
-            </a:schemeClr>
-          </a:lnRef>
-          <a:fillRef idx="1">
-            <a:schemeClr val="accent1"/>
-          </a:fillRef>
-          <a:effectRef idx="0">
-            <a:schemeClr val="accent1"/>
-          </a:effectRef>
-          <a:fontRef idx="minor">
-            <a:schemeClr val="lt1"/>
-          </a:fontRef>
-        </p:style>
-        <p:txBody>
-          <a:bodyPr rtlCol="0" anchor="ctr"/>
-          <a:lstStyle>
-            <a:defPPr>
-              <a:defRPr lang="zh-CN"/>
-            </a:defPPr>
-            <a:lvl1pPr marL="0" algn="l" defTabSz="914400" rtl="0" eaLnBrk="1" latinLnBrk="0" hangingPunct="1">
-              <a:defRPr sz="1800" kern="1200">
-                <a:solidFill>
-                  <a:schemeClr val="lt1"/>
-                </a:solidFill>
-                <a:latin typeface="+mn-lt"/>
-                <a:ea typeface="+mn-ea"/>
-                <a:cs typeface="+mn-cs"/>
-              </a:defRPr>
-            </a:lvl1pPr>
-            <a:lvl2pPr marL="457200" algn="l" defTabSz="914400" rtl="0" eaLnBrk="1" latinLnBrk="0" hangingPunct="1">
-              <a:defRPr sz="1800" kern="1200">
-                <a:solidFill>
-                  <a:schemeClr val="lt1"/>
-                </a:solidFill>
-                <a:latin typeface="+mn-lt"/>
-                <a:ea typeface="+mn-ea"/>
-                <a:cs typeface="+mn-cs"/>
-              </a:defRPr>
-            </a:lvl2pPr>
-            <a:lvl3pPr marL="914400" algn="l" defTabSz="914400" rtl="0" eaLnBrk="1" latinLnBrk="0" hangingPunct="1">
-              <a:defRPr sz="1800" kern="1200">
-                <a:solidFill>
-                  <a:schemeClr val="lt1"/>
-                </a:solidFill>
-                <a:latin typeface="+mn-lt"/>
-                <a:ea typeface="+mn-ea"/>
-                <a:cs typeface="+mn-cs"/>
-              </a:defRPr>
-            </a:lvl3pPr>
-            <a:lvl4pPr marL="1371600" algn="l" defTabSz="914400" rtl="0" eaLnBrk="1" latinLnBrk="0" hangingPunct="1">
-              <a:defRPr sz="1800" kern="1200">
-                <a:solidFill>
-                  <a:schemeClr val="lt1"/>
-                </a:solidFill>
-                <a:latin typeface="+mn-lt"/>
-                <a:ea typeface="+mn-ea"/>
-                <a:cs typeface="+mn-cs"/>
-              </a:defRPr>
-            </a:lvl4pPr>
-            <a:lvl5pPr marL="1828800" algn="l" defTabSz="914400" rtl="0" eaLnBrk="1" latinLnBrk="0" hangingPunct="1">
-              <a:defRPr sz="1800" kern="1200">
-                <a:solidFill>
-                  <a:schemeClr val="lt1"/>
-                </a:solidFill>
-                <a:latin typeface="+mn-lt"/>
-                <a:ea typeface="+mn-ea"/>
-                <a:cs typeface="+mn-cs"/>
-              </a:defRPr>
-            </a:lvl5pPr>
-            <a:lvl6pPr marL="2286000" algn="l" defTabSz="914400" rtl="0" eaLnBrk="1" latinLnBrk="0" hangingPunct="1">
-              <a:defRPr sz="1800" kern="1200">
-                <a:solidFill>
-                  <a:schemeClr val="lt1"/>
-                </a:solidFill>
-                <a:latin typeface="+mn-lt"/>
-                <a:ea typeface="+mn-ea"/>
-                <a:cs typeface="+mn-cs"/>
-              </a:defRPr>
-            </a:lvl6pPr>
-            <a:lvl7pPr marL="2743200" algn="l" defTabSz="914400" rtl="0" eaLnBrk="1" latinLnBrk="0" hangingPunct="1">
-              <a:defRPr sz="1800" kern="1200">
-                <a:solidFill>
-                  <a:schemeClr val="lt1"/>
-                </a:solidFill>
-                <a:latin typeface="+mn-lt"/>
-                <a:ea typeface="+mn-ea"/>
-                <a:cs typeface="+mn-cs"/>
-              </a:defRPr>
-            </a:lvl7pPr>
-            <a:lvl8pPr marL="3200400" algn="l" defTabSz="914400" rtl="0" eaLnBrk="1" latinLnBrk="0" hangingPunct="1">
-              <a:defRPr sz="1800" kern="1200">
-                <a:solidFill>
-                  <a:schemeClr val="lt1"/>
-                </a:solidFill>
-                <a:latin typeface="+mn-lt"/>
-                <a:ea typeface="+mn-ea"/>
-                <a:cs typeface="+mn-cs"/>
-              </a:defRPr>
-            </a:lvl8pPr>
-            <a:lvl9pPr marL="3657600" algn="l" defTabSz="914400" rtl="0" eaLnBrk="1" latinLnBrk="0" hangingPunct="1">
-              <a:defRPr sz="1800" kern="1200">
-                <a:solidFill>
-                  <a:schemeClr val="lt1"/>
-                </a:solidFill>
-                <a:latin typeface="+mn-lt"/>
-                <a:ea typeface="+mn-ea"/>
-                <a:cs typeface="+mn-cs"/>
-              </a:defRPr>
-            </a:lvl9pPr>
-          </a:lstStyle>
-          <a:p>
-            <a:pPr algn="ctr"/>
-            <a:r>
-              <a:rPr lang="en-US" altLang="zh-CN" dirty="0">
-                <a:solidFill>
-                  <a:schemeClr val="tx1"/>
-                </a:solidFill>
-              </a:rPr>
-              <a:t>NN </a:t>
-            </a:r>
-            <a:endParaRPr lang="zh-CN" altLang="en-US" dirty="0">
-              <a:solidFill>
-                <a:schemeClr val="tx1"/>
-              </a:solidFill>
-            </a:endParaRPr>
-          </a:p>
-        </p:txBody>
-      </p:sp>
-      <mc:AlternateContent xmlns:mc="http://schemas.openxmlformats.org/markup-compatibility/2006" xmlns:a14="http://schemas.microsoft.com/office/drawing/2010/main">
-        <mc:Choice Requires="a14">
-          <p:sp>
-            <p:nvSpPr>
-              <p:cNvPr id="10" name="文本框 4">
-                <a:extLst>
-                  <a:ext uri="{FF2B5EF4-FFF2-40B4-BE49-F238E27FC236}">
-                    <a16:creationId xmlns:a16="http://schemas.microsoft.com/office/drawing/2014/main" id="{5B1CCF74-C0CA-66DF-E772-C7D2980E0979}"/>
-                  </a:ext>
-                </a:extLst>
-              </p:cNvPr>
-              <p:cNvSpPr txBox="1"/>
-              <p:nvPr/>
-            </p:nvSpPr>
-            <p:spPr>
-              <a:xfrm>
-                <a:off x="7228693" y="2791434"/>
-                <a:ext cx="509752" cy="369332"/>
-              </a:xfrm>
-              <a:prstGeom prst="rect">
-                <a:avLst/>
-              </a:prstGeom>
-              <a:noFill/>
-            </p:spPr>
-            <p:txBody>
-              <a:bodyPr wrap="square">
-                <a:spAutoFit/>
-              </a:bodyPr>
-              <a:lstStyle>
-                <a:defPPr>
-                  <a:defRPr lang="zh-CN"/>
-                </a:defPPr>
-                <a:lvl1pPr marL="0" algn="l" defTabSz="914400" rtl="0" eaLnBrk="1" latinLnBrk="0" hangingPunct="1">
-                  <a:defRPr sz="1800" kern="1200">
-                    <a:solidFill>
-                      <a:schemeClr val="tx1"/>
-                    </a:solidFill>
-                    <a:latin typeface="+mn-lt"/>
-                    <a:ea typeface="+mn-ea"/>
-                    <a:cs typeface="+mn-cs"/>
-                  </a:defRPr>
-                </a:lvl1pPr>
-                <a:lvl2pPr marL="457200" algn="l" defTabSz="914400" rtl="0" eaLnBrk="1" latinLnBrk="0" hangingPunct="1">
-                  <a:defRPr sz="1800" kern="1200">
-                    <a:solidFill>
-                      <a:schemeClr val="tx1"/>
-                    </a:solidFill>
-                    <a:latin typeface="+mn-lt"/>
-                    <a:ea typeface="+mn-ea"/>
-                    <a:cs typeface="+mn-cs"/>
-                  </a:defRPr>
-                </a:lvl2pPr>
-                <a:lvl3pPr marL="914400" algn="l" defTabSz="914400" rtl="0" eaLnBrk="1" latinLnBrk="0" hangingPunct="1">
-                  <a:defRPr sz="1800" kern="1200">
-                    <a:solidFill>
-                      <a:schemeClr val="tx1"/>
-                    </a:solidFill>
-                    <a:latin typeface="+mn-lt"/>
-                    <a:ea typeface="+mn-ea"/>
-                    <a:cs typeface="+mn-cs"/>
-                  </a:defRPr>
-                </a:lvl3pPr>
-                <a:lvl4pPr marL="1371600" algn="l" defTabSz="914400" rtl="0" eaLnBrk="1" latinLnBrk="0" hangingPunct="1">
-                  <a:defRPr sz="1800" kern="1200">
-                    <a:solidFill>
-                      <a:schemeClr val="tx1"/>
-                    </a:solidFill>
-                    <a:latin typeface="+mn-lt"/>
-                    <a:ea typeface="+mn-ea"/>
-                    <a:cs typeface="+mn-cs"/>
-                  </a:defRPr>
-                </a:lvl4pPr>
-                <a:lvl5pPr marL="1828800" algn="l" defTabSz="914400" rtl="0" eaLnBrk="1" latinLnBrk="0" hangingPunct="1">
-                  <a:defRPr sz="1800" kern="1200">
-                    <a:solidFill>
-                      <a:schemeClr val="tx1"/>
-                    </a:solidFill>
-                    <a:latin typeface="+mn-lt"/>
-                    <a:ea typeface="+mn-ea"/>
-                    <a:cs typeface="+mn-cs"/>
-                  </a:defRPr>
-                </a:lvl5pPr>
-                <a:lvl6pPr marL="2286000" algn="l" defTabSz="914400" rtl="0" eaLnBrk="1" latinLnBrk="0" hangingPunct="1">
-                  <a:defRPr sz="1800" kern="1200">
-                    <a:solidFill>
-                      <a:schemeClr val="tx1"/>
-                    </a:solidFill>
-                    <a:latin typeface="+mn-lt"/>
-                    <a:ea typeface="+mn-ea"/>
-                    <a:cs typeface="+mn-cs"/>
-                  </a:defRPr>
-                </a:lvl6pPr>
-                <a:lvl7pPr marL="2743200" algn="l" defTabSz="914400" rtl="0" eaLnBrk="1" latinLnBrk="0" hangingPunct="1">
-                  <a:defRPr sz="1800" kern="1200">
-                    <a:solidFill>
-                      <a:schemeClr val="tx1"/>
-                    </a:solidFill>
-                    <a:latin typeface="+mn-lt"/>
-                    <a:ea typeface="+mn-ea"/>
-                    <a:cs typeface="+mn-cs"/>
-                  </a:defRPr>
-                </a:lvl7pPr>
-                <a:lvl8pPr marL="3200400" algn="l" defTabSz="914400" rtl="0" eaLnBrk="1" latinLnBrk="0" hangingPunct="1">
-                  <a:defRPr sz="1800" kern="1200">
-                    <a:solidFill>
-                      <a:schemeClr val="tx1"/>
-                    </a:solidFill>
-                    <a:latin typeface="+mn-lt"/>
-                    <a:ea typeface="+mn-ea"/>
-                    <a:cs typeface="+mn-cs"/>
-                  </a:defRPr>
-                </a:lvl8pPr>
-                <a:lvl9pPr marL="3657600" algn="l" defTabSz="914400" rtl="0" eaLnBrk="1" latinLnBrk="0" hangingPunct="1">
-                  <a:defRPr sz="1800" kern="1200">
-                    <a:solidFill>
-                      <a:schemeClr val="tx1"/>
-                    </a:solidFill>
-                    <a:latin typeface="+mn-lt"/>
-                    <a:ea typeface="+mn-ea"/>
-                    <a:cs typeface="+mn-cs"/>
-                  </a:defRPr>
-                </a:lvl9pPr>
-              </a:lstStyle>
-              <a:p>
-                <a:pPr/>
-                <a14:m>
-                  <m:oMathPara xmlns:m="http://schemas.openxmlformats.org/officeDocument/2006/math">
-                    <m:oMathParaPr>
-                      <m:jc m:val="centerGroup"/>
-                    </m:oMathParaPr>
-                    <m:oMath xmlns:m="http://schemas.openxmlformats.org/officeDocument/2006/math">
-                      <m:r>
-                        <a:rPr lang="zh-CN" altLang="en-US" i="1" smtClean="0">
-                          <a:latin typeface="Cambria Math" panose="02040503050406030204" pitchFamily="18" charset="0"/>
-                          <a:cs typeface="Arial" panose="020B0604020202020204" pitchFamily="34" charset="0"/>
-                        </a:rPr>
-                        <m:t>𝜒</m:t>
-                      </m:r>
-                    </m:oMath>
-                  </m:oMathPara>
-                </a14:m>
-                <a:endParaRPr lang="zh-CN" altLang="en-US" dirty="0">
-                  <a:latin typeface="Arial" panose="020B0604020202020204" pitchFamily="34" charset="0"/>
-                  <a:cs typeface="Arial" panose="020B0604020202020204" pitchFamily="34" charset="0"/>
-                </a:endParaRPr>
-              </a:p>
-            </p:txBody>
-          </p:sp>
-        </mc:Choice>
-        <mc:Fallback xmlns="">
-          <p:sp>
-            <p:nvSpPr>
-              <p:cNvPr id="10" name="文本框 4">
-                <a:extLst>
-                  <a:ext uri="{FF2B5EF4-FFF2-40B4-BE49-F238E27FC236}">
-                    <a16:creationId xmlns:a16="http://schemas.microsoft.com/office/drawing/2014/main" id="{5B1CCF74-C0CA-66DF-E772-C7D2980E0979}"/>
-                  </a:ext>
-                </a:extLst>
-              </p:cNvPr>
-              <p:cNvSpPr txBox="1">
-                <a:spLocks noRot="1" noChangeAspect="1" noMove="1" noResize="1" noEditPoints="1" noAdjustHandles="1" noChangeArrowheads="1" noChangeShapeType="1" noTextEdit="1"/>
-              </p:cNvSpPr>
-              <p:nvPr/>
-            </p:nvSpPr>
-            <p:spPr>
-              <a:xfrm>
-                <a:off x="7228693" y="2791434"/>
-                <a:ext cx="509752" cy="369332"/>
-              </a:xfrm>
-              <a:prstGeom prst="rect">
-                <a:avLst/>
-              </a:prstGeom>
-              <a:blipFill>
-                <a:blip r:embed="rId3"/>
-                <a:stretch>
-                  <a:fillRect b="-6667"/>
-                </a:stretch>
-              </a:blipFill>
-            </p:spPr>
-            <p:txBody>
-              <a:bodyPr/>
-              <a:lstStyle/>
-              <a:p>
-                <a:r>
-                  <a:rPr lang="en-US">
-                    <a:noFill/>
-                  </a:rPr>
-                  <a:t> </a:t>
-                </a:r>
-              </a:p>
-            </p:txBody>
-          </p:sp>
-        </mc:Fallback>
-      </mc:AlternateContent>
-      <p:sp>
-        <p:nvSpPr>
-          <p:cNvPr id="11" name="文本框 5">
-            <a:extLst>
-              <a:ext uri="{FF2B5EF4-FFF2-40B4-BE49-F238E27FC236}">
-                <a16:creationId xmlns:a16="http://schemas.microsoft.com/office/drawing/2014/main" id="{7FDF8059-53E4-176C-DEA7-A8F19CAE9AFE}"/>
-              </a:ext>
-            </a:extLst>
-          </p:cNvPr>
-          <p:cNvSpPr txBox="1"/>
-          <p:nvPr/>
-        </p:nvSpPr>
-        <p:spPr>
-          <a:xfrm>
-            <a:off x="7483569" y="2839824"/>
-            <a:ext cx="1778875" cy="353943"/>
-          </a:xfrm>
-          <a:prstGeom prst="rect">
-            <a:avLst/>
-          </a:prstGeom>
-          <a:noFill/>
-        </p:spPr>
-        <p:txBody>
-          <a:bodyPr wrap="square" rtlCol="0">
-            <a:spAutoFit/>
-          </a:bodyPr>
-          <a:lstStyle>
-            <a:defPPr>
-              <a:defRPr lang="zh-CN"/>
-            </a:defPPr>
-            <a:lvl1pPr marL="0" algn="l" defTabSz="914400" rtl="0" eaLnBrk="1" latinLnBrk="0" hangingPunct="1">
-              <a:defRPr sz="1800" kern="1200">
-                <a:solidFill>
-                  <a:schemeClr val="tx1"/>
-                </a:solidFill>
-                <a:latin typeface="+mn-lt"/>
-                <a:ea typeface="+mn-ea"/>
-                <a:cs typeface="+mn-cs"/>
-              </a:defRPr>
-            </a:lvl1pPr>
-            <a:lvl2pPr marL="457200" algn="l" defTabSz="914400" rtl="0" eaLnBrk="1" latinLnBrk="0" hangingPunct="1">
-              <a:defRPr sz="1800" kern="1200">
-                <a:solidFill>
-                  <a:schemeClr val="tx1"/>
-                </a:solidFill>
-                <a:latin typeface="+mn-lt"/>
-                <a:ea typeface="+mn-ea"/>
-                <a:cs typeface="+mn-cs"/>
-              </a:defRPr>
-            </a:lvl2pPr>
-            <a:lvl3pPr marL="914400" algn="l" defTabSz="914400" rtl="0" eaLnBrk="1" latinLnBrk="0" hangingPunct="1">
-              <a:defRPr sz="1800" kern="1200">
-                <a:solidFill>
-                  <a:schemeClr val="tx1"/>
-                </a:solidFill>
-                <a:latin typeface="+mn-lt"/>
-                <a:ea typeface="+mn-ea"/>
-                <a:cs typeface="+mn-cs"/>
-              </a:defRPr>
-            </a:lvl3pPr>
-            <a:lvl4pPr marL="1371600" algn="l" defTabSz="914400" rtl="0" eaLnBrk="1" latinLnBrk="0" hangingPunct="1">
-              <a:defRPr sz="1800" kern="1200">
-                <a:solidFill>
-                  <a:schemeClr val="tx1"/>
-                </a:solidFill>
-                <a:latin typeface="+mn-lt"/>
-                <a:ea typeface="+mn-ea"/>
-                <a:cs typeface="+mn-cs"/>
-              </a:defRPr>
-            </a:lvl4pPr>
-            <a:lvl5pPr marL="1828800" algn="l" defTabSz="914400" rtl="0" eaLnBrk="1" latinLnBrk="0" hangingPunct="1">
-              <a:defRPr sz="1800" kern="1200">
-                <a:solidFill>
-                  <a:schemeClr val="tx1"/>
-                </a:solidFill>
-                <a:latin typeface="+mn-lt"/>
-                <a:ea typeface="+mn-ea"/>
-                <a:cs typeface="+mn-cs"/>
-              </a:defRPr>
-            </a:lvl5pPr>
-            <a:lvl6pPr marL="2286000" algn="l" defTabSz="914400" rtl="0" eaLnBrk="1" latinLnBrk="0" hangingPunct="1">
-              <a:defRPr sz="1800" kern="1200">
-                <a:solidFill>
-                  <a:schemeClr val="tx1"/>
-                </a:solidFill>
-                <a:latin typeface="+mn-lt"/>
-                <a:ea typeface="+mn-ea"/>
-                <a:cs typeface="+mn-cs"/>
-              </a:defRPr>
-            </a:lvl6pPr>
-            <a:lvl7pPr marL="2743200" algn="l" defTabSz="914400" rtl="0" eaLnBrk="1" latinLnBrk="0" hangingPunct="1">
-              <a:defRPr sz="1800" kern="1200">
-                <a:solidFill>
-                  <a:schemeClr val="tx1"/>
-                </a:solidFill>
-                <a:latin typeface="+mn-lt"/>
-                <a:ea typeface="+mn-ea"/>
-                <a:cs typeface="+mn-cs"/>
-              </a:defRPr>
-            </a:lvl7pPr>
-            <a:lvl8pPr marL="3200400" algn="l" defTabSz="914400" rtl="0" eaLnBrk="1" latinLnBrk="0" hangingPunct="1">
-              <a:defRPr sz="1800" kern="1200">
-                <a:solidFill>
-                  <a:schemeClr val="tx1"/>
-                </a:solidFill>
-                <a:latin typeface="+mn-lt"/>
-                <a:ea typeface="+mn-ea"/>
-                <a:cs typeface="+mn-cs"/>
-              </a:defRPr>
-            </a:lvl8pPr>
-            <a:lvl9pPr marL="3657600" algn="l" defTabSz="914400" rtl="0" eaLnBrk="1" latinLnBrk="0" hangingPunct="1">
-              <a:defRPr sz="1800" kern="1200">
-                <a:solidFill>
-                  <a:schemeClr val="tx1"/>
-                </a:solidFill>
-                <a:latin typeface="+mn-lt"/>
-                <a:ea typeface="+mn-ea"/>
-                <a:cs typeface="+mn-cs"/>
-              </a:defRPr>
-            </a:lvl9pPr>
-          </a:lstStyle>
-          <a:p>
-            <a:r>
-              <a:rPr lang="en-US" altLang="zh-CN" sz="1700" dirty="0"/>
-              <a:t>, water constraint</a:t>
-            </a:r>
-            <a:endParaRPr lang="zh-CN" altLang="en-US" sz="1700" dirty="0"/>
-          </a:p>
-        </p:txBody>
-      </p:sp>
-      <p:cxnSp>
-        <p:nvCxnSpPr>
-          <p:cNvPr id="12" name="直接箭头连接符 7">
-            <a:extLst>
-              <a:ext uri="{FF2B5EF4-FFF2-40B4-BE49-F238E27FC236}">
-                <a16:creationId xmlns:a16="http://schemas.microsoft.com/office/drawing/2014/main" id="{46091092-40A2-C3C1-588D-9B2F98314973}"/>
-              </a:ext>
-            </a:extLst>
-          </p:cNvPr>
-          <p:cNvCxnSpPr>
-            <a:cxnSpLocks/>
-            <a:stCxn id="9" idx="3"/>
-            <a:endCxn id="10" idx="1"/>
-          </p:cNvCxnSpPr>
-          <p:nvPr/>
-        </p:nvCxnSpPr>
-        <p:spPr>
-          <a:xfrm>
-            <a:off x="6652595" y="2976100"/>
-            <a:ext cx="576098" cy="0"/>
-          </a:xfrm>
-          <a:prstGeom prst="straightConnector1">
-            <a:avLst/>
-          </a:prstGeom>
-          <a:ln w="12700">
-            <a:solidFill>
-              <a:schemeClr val="tx1"/>
-            </a:solidFill>
-            <a:headEnd type="none" w="med" len="med"/>
-            <a:tailEnd type="triangle" w="med" len="med"/>
-          </a:ln>
-        </p:spPr>
-        <p:style>
-          <a:lnRef idx="1">
-            <a:schemeClr val="accent1"/>
-          </a:lnRef>
-          <a:fillRef idx="0">
-            <a:schemeClr val="accent1"/>
-          </a:fillRef>
-          <a:effectRef idx="0">
-            <a:schemeClr val="accent1"/>
-          </a:effectRef>
-          <a:fontRef idx="minor">
-            <a:schemeClr val="tx1"/>
-          </a:fontRef>
-        </p:style>
-      </p:cxnSp>
-      <p:sp>
-        <p:nvSpPr>
-          <p:cNvPr id="13" name="矩形 10">
-            <a:extLst>
-              <a:ext uri="{FF2B5EF4-FFF2-40B4-BE49-F238E27FC236}">
-                <a16:creationId xmlns:a16="http://schemas.microsoft.com/office/drawing/2014/main" id="{3EBBF04D-CD28-E4E5-08C0-9694993D1339}"/>
-              </a:ext>
-            </a:extLst>
-          </p:cNvPr>
-          <p:cNvSpPr/>
-          <p:nvPr/>
-        </p:nvSpPr>
-        <p:spPr>
-          <a:xfrm>
-            <a:off x="9811611" y="2767174"/>
-            <a:ext cx="1298027" cy="499241"/>
-          </a:xfrm>
-          <a:prstGeom prst="rect">
-            <a:avLst/>
-          </a:prstGeom>
-          <a:solidFill>
-            <a:schemeClr val="accent6">
-              <a:lumMod val="40000"/>
-              <a:lumOff val="60000"/>
-            </a:schemeClr>
-          </a:solidFill>
-        </p:spPr>
-        <p:style>
-          <a:lnRef idx="2">
-            <a:schemeClr val="accent1">
-              <a:shade val="15000"/>
-            </a:schemeClr>
-          </a:lnRef>
-          <a:fillRef idx="1">
-            <a:schemeClr val="accent1"/>
-          </a:fillRef>
-          <a:effectRef idx="0">
-            <a:schemeClr val="accent1"/>
-          </a:effectRef>
-          <a:fontRef idx="minor">
-            <a:schemeClr val="lt1"/>
-          </a:fontRef>
-        </p:style>
-        <p:txBody>
-          <a:bodyPr rtlCol="0" anchor="ctr"/>
-          <a:lstStyle>
-            <a:defPPr>
-              <a:defRPr lang="zh-CN"/>
-            </a:defPPr>
-            <a:lvl1pPr marL="0" algn="l" defTabSz="914400" rtl="0" eaLnBrk="1" latinLnBrk="0" hangingPunct="1">
-              <a:defRPr sz="1800" kern="1200">
-                <a:solidFill>
-                  <a:schemeClr val="lt1"/>
-                </a:solidFill>
-                <a:latin typeface="+mn-lt"/>
-                <a:ea typeface="+mn-ea"/>
-                <a:cs typeface="+mn-cs"/>
-              </a:defRPr>
-            </a:lvl1pPr>
-            <a:lvl2pPr marL="457200" algn="l" defTabSz="914400" rtl="0" eaLnBrk="1" latinLnBrk="0" hangingPunct="1">
-              <a:defRPr sz="1800" kern="1200">
-                <a:solidFill>
-                  <a:schemeClr val="lt1"/>
-                </a:solidFill>
-                <a:latin typeface="+mn-lt"/>
-                <a:ea typeface="+mn-ea"/>
-                <a:cs typeface="+mn-cs"/>
-              </a:defRPr>
-            </a:lvl2pPr>
-            <a:lvl3pPr marL="914400" algn="l" defTabSz="914400" rtl="0" eaLnBrk="1" latinLnBrk="0" hangingPunct="1">
-              <a:defRPr sz="1800" kern="1200">
-                <a:solidFill>
-                  <a:schemeClr val="lt1"/>
-                </a:solidFill>
-                <a:latin typeface="+mn-lt"/>
-                <a:ea typeface="+mn-ea"/>
-                <a:cs typeface="+mn-cs"/>
-              </a:defRPr>
-            </a:lvl3pPr>
-            <a:lvl4pPr marL="1371600" algn="l" defTabSz="914400" rtl="0" eaLnBrk="1" latinLnBrk="0" hangingPunct="1">
-              <a:defRPr sz="1800" kern="1200">
-                <a:solidFill>
-                  <a:schemeClr val="lt1"/>
-                </a:solidFill>
-                <a:latin typeface="+mn-lt"/>
-                <a:ea typeface="+mn-ea"/>
-                <a:cs typeface="+mn-cs"/>
-              </a:defRPr>
-            </a:lvl4pPr>
-            <a:lvl5pPr marL="1828800" algn="l" defTabSz="914400" rtl="0" eaLnBrk="1" latinLnBrk="0" hangingPunct="1">
-              <a:defRPr sz="1800" kern="1200">
-                <a:solidFill>
-                  <a:schemeClr val="lt1"/>
-                </a:solidFill>
-                <a:latin typeface="+mn-lt"/>
-                <a:ea typeface="+mn-ea"/>
-                <a:cs typeface="+mn-cs"/>
-              </a:defRPr>
-            </a:lvl5pPr>
-            <a:lvl6pPr marL="2286000" algn="l" defTabSz="914400" rtl="0" eaLnBrk="1" latinLnBrk="0" hangingPunct="1">
-              <a:defRPr sz="1800" kern="1200">
-                <a:solidFill>
-                  <a:schemeClr val="lt1"/>
-                </a:solidFill>
-                <a:latin typeface="+mn-lt"/>
-                <a:ea typeface="+mn-ea"/>
-                <a:cs typeface="+mn-cs"/>
-              </a:defRPr>
-            </a:lvl6pPr>
-            <a:lvl7pPr marL="2743200" algn="l" defTabSz="914400" rtl="0" eaLnBrk="1" latinLnBrk="0" hangingPunct="1">
-              <a:defRPr sz="1800" kern="1200">
-                <a:solidFill>
-                  <a:schemeClr val="lt1"/>
-                </a:solidFill>
-                <a:latin typeface="+mn-lt"/>
-                <a:ea typeface="+mn-ea"/>
-                <a:cs typeface="+mn-cs"/>
-              </a:defRPr>
-            </a:lvl7pPr>
-            <a:lvl8pPr marL="3200400" algn="l" defTabSz="914400" rtl="0" eaLnBrk="1" latinLnBrk="0" hangingPunct="1">
-              <a:defRPr sz="1800" kern="1200">
-                <a:solidFill>
-                  <a:schemeClr val="lt1"/>
-                </a:solidFill>
-                <a:latin typeface="+mn-lt"/>
-                <a:ea typeface="+mn-ea"/>
-                <a:cs typeface="+mn-cs"/>
-              </a:defRPr>
-            </a:lvl8pPr>
-            <a:lvl9pPr marL="3657600" algn="l" defTabSz="914400" rtl="0" eaLnBrk="1" latinLnBrk="0" hangingPunct="1">
-              <a:defRPr sz="1800" kern="1200">
-                <a:solidFill>
-                  <a:schemeClr val="lt1"/>
-                </a:solidFill>
-                <a:latin typeface="+mn-lt"/>
-                <a:ea typeface="+mn-ea"/>
-                <a:cs typeface="+mn-cs"/>
-              </a:defRPr>
-            </a:lvl9pPr>
-          </a:lstStyle>
-          <a:p>
-            <a:pPr algn="ctr"/>
-            <a:r>
-              <a:rPr lang="en-US" altLang="zh-CN" dirty="0">
-                <a:solidFill>
-                  <a:schemeClr val="tx1"/>
-                </a:solidFill>
-              </a:rPr>
-              <a:t>p-model</a:t>
-            </a:r>
-            <a:endParaRPr lang="zh-CN" altLang="en-US" dirty="0">
-              <a:solidFill>
-                <a:schemeClr val="tx1"/>
-              </a:solidFill>
-            </a:endParaRPr>
-          </a:p>
-        </p:txBody>
-      </p:sp>
-      <p:cxnSp>
-        <p:nvCxnSpPr>
-          <p:cNvPr id="14" name="直接箭头连接符 11">
-            <a:extLst>
-              <a:ext uri="{FF2B5EF4-FFF2-40B4-BE49-F238E27FC236}">
-                <a16:creationId xmlns:a16="http://schemas.microsoft.com/office/drawing/2014/main" id="{5FBCD3FE-C9E6-88DB-F8A7-51C640752F61}"/>
-              </a:ext>
-            </a:extLst>
-          </p:cNvPr>
-          <p:cNvCxnSpPr>
-            <a:cxnSpLocks/>
-            <a:stCxn id="11" idx="3"/>
-            <a:endCxn id="13" idx="1"/>
-          </p:cNvCxnSpPr>
-          <p:nvPr/>
-        </p:nvCxnSpPr>
-        <p:spPr>
-          <a:xfrm flipV="1">
-            <a:off x="9262444" y="3016795"/>
-            <a:ext cx="549167" cy="1"/>
-          </a:xfrm>
-          <a:prstGeom prst="straightConnector1">
-            <a:avLst/>
-          </a:prstGeom>
-          <a:ln w="12700">
-            <a:solidFill>
-              <a:schemeClr val="tx1"/>
-            </a:solidFill>
-            <a:headEnd type="none" w="med" len="med"/>
-            <a:tailEnd type="triangle" w="med" len="med"/>
-          </a:ln>
-        </p:spPr>
-        <p:style>
-          <a:lnRef idx="1">
-            <a:schemeClr val="accent1"/>
-          </a:lnRef>
-          <a:fillRef idx="0">
-            <a:schemeClr val="accent1"/>
-          </a:fillRef>
-          <a:effectRef idx="0">
-            <a:schemeClr val="accent1"/>
-          </a:effectRef>
-          <a:fontRef idx="minor">
-            <a:schemeClr val="tx1"/>
-          </a:fontRef>
-        </p:style>
-      </p:cxnSp>
-      <p:sp>
-        <p:nvSpPr>
-          <p:cNvPr id="15" name="文本框 17">
-            <a:extLst>
-              <a:ext uri="{FF2B5EF4-FFF2-40B4-BE49-F238E27FC236}">
-                <a16:creationId xmlns:a16="http://schemas.microsoft.com/office/drawing/2014/main" id="{1FBF00C7-A06C-5116-34DD-454F7EFF0716}"/>
-              </a:ext>
-            </a:extLst>
-          </p:cNvPr>
-          <p:cNvSpPr txBox="1"/>
-          <p:nvPr/>
-        </p:nvSpPr>
-        <p:spPr>
-          <a:xfrm>
-            <a:off x="9571187" y="2004252"/>
-            <a:ext cx="1778875" cy="391597"/>
-          </a:xfrm>
-          <a:prstGeom prst="roundRect">
-            <a:avLst/>
-          </a:prstGeom>
-          <a:solidFill>
-            <a:schemeClr val="bg1">
-              <a:lumMod val="95000"/>
-            </a:schemeClr>
-          </a:solidFill>
-          <a:ln w="19050">
-            <a:solidFill>
-              <a:schemeClr val="tx1"/>
-            </a:solidFill>
-            <a:prstDash val="dash"/>
-          </a:ln>
-        </p:spPr>
-        <p:txBody>
-          <a:bodyPr wrap="square" rtlCol="0">
-            <a:spAutoFit/>
-          </a:bodyPr>
-          <a:lstStyle>
-            <a:defPPr>
-              <a:defRPr lang="zh-CN"/>
-            </a:defPPr>
-            <a:lvl1pPr marL="0" algn="l" defTabSz="914400" rtl="0" eaLnBrk="1" latinLnBrk="0" hangingPunct="1">
-              <a:defRPr sz="1800" kern="1200">
-                <a:solidFill>
-                  <a:schemeClr val="tx1"/>
-                </a:solidFill>
-                <a:latin typeface="+mn-lt"/>
-                <a:ea typeface="+mn-ea"/>
-                <a:cs typeface="+mn-cs"/>
-              </a:defRPr>
-            </a:lvl1pPr>
-            <a:lvl2pPr marL="457200" algn="l" defTabSz="914400" rtl="0" eaLnBrk="1" latinLnBrk="0" hangingPunct="1">
-              <a:defRPr sz="1800" kern="1200">
-                <a:solidFill>
-                  <a:schemeClr val="tx1"/>
-                </a:solidFill>
-                <a:latin typeface="+mn-lt"/>
-                <a:ea typeface="+mn-ea"/>
-                <a:cs typeface="+mn-cs"/>
-              </a:defRPr>
-            </a:lvl2pPr>
-            <a:lvl3pPr marL="914400" algn="l" defTabSz="914400" rtl="0" eaLnBrk="1" latinLnBrk="0" hangingPunct="1">
-              <a:defRPr sz="1800" kern="1200">
-                <a:solidFill>
-                  <a:schemeClr val="tx1"/>
-                </a:solidFill>
-                <a:latin typeface="+mn-lt"/>
-                <a:ea typeface="+mn-ea"/>
-                <a:cs typeface="+mn-cs"/>
-              </a:defRPr>
-            </a:lvl3pPr>
-            <a:lvl4pPr marL="1371600" algn="l" defTabSz="914400" rtl="0" eaLnBrk="1" latinLnBrk="0" hangingPunct="1">
-              <a:defRPr sz="1800" kern="1200">
-                <a:solidFill>
-                  <a:schemeClr val="tx1"/>
-                </a:solidFill>
-                <a:latin typeface="+mn-lt"/>
-                <a:ea typeface="+mn-ea"/>
-                <a:cs typeface="+mn-cs"/>
-              </a:defRPr>
-            </a:lvl4pPr>
-            <a:lvl5pPr marL="1828800" algn="l" defTabSz="914400" rtl="0" eaLnBrk="1" latinLnBrk="0" hangingPunct="1">
-              <a:defRPr sz="1800" kern="1200">
-                <a:solidFill>
-                  <a:schemeClr val="tx1"/>
-                </a:solidFill>
-                <a:latin typeface="+mn-lt"/>
-                <a:ea typeface="+mn-ea"/>
-                <a:cs typeface="+mn-cs"/>
-              </a:defRPr>
-            </a:lvl5pPr>
-            <a:lvl6pPr marL="2286000" algn="l" defTabSz="914400" rtl="0" eaLnBrk="1" latinLnBrk="0" hangingPunct="1">
-              <a:defRPr sz="1800" kern="1200">
-                <a:solidFill>
-                  <a:schemeClr val="tx1"/>
-                </a:solidFill>
-                <a:latin typeface="+mn-lt"/>
-                <a:ea typeface="+mn-ea"/>
-                <a:cs typeface="+mn-cs"/>
-              </a:defRPr>
-            </a:lvl6pPr>
-            <a:lvl7pPr marL="2743200" algn="l" defTabSz="914400" rtl="0" eaLnBrk="1" latinLnBrk="0" hangingPunct="1">
-              <a:defRPr sz="1800" kern="1200">
-                <a:solidFill>
-                  <a:schemeClr val="tx1"/>
-                </a:solidFill>
-                <a:latin typeface="+mn-lt"/>
-                <a:ea typeface="+mn-ea"/>
-                <a:cs typeface="+mn-cs"/>
-              </a:defRPr>
-            </a:lvl7pPr>
-            <a:lvl8pPr marL="3200400" algn="l" defTabSz="914400" rtl="0" eaLnBrk="1" latinLnBrk="0" hangingPunct="1">
-              <a:defRPr sz="1800" kern="1200">
-                <a:solidFill>
-                  <a:schemeClr val="tx1"/>
-                </a:solidFill>
-                <a:latin typeface="+mn-lt"/>
-                <a:ea typeface="+mn-ea"/>
-                <a:cs typeface="+mn-cs"/>
-              </a:defRPr>
-            </a:lvl8pPr>
-            <a:lvl9pPr marL="3657600" algn="l" defTabSz="914400" rtl="0" eaLnBrk="1" latinLnBrk="0" hangingPunct="1">
-              <a:defRPr sz="1800" kern="1200">
-                <a:solidFill>
-                  <a:schemeClr val="tx1"/>
-                </a:solidFill>
-                <a:latin typeface="+mn-lt"/>
-                <a:ea typeface="+mn-ea"/>
-                <a:cs typeface="+mn-cs"/>
-              </a:defRPr>
-            </a:lvl9pPr>
-          </a:lstStyle>
-          <a:p>
-            <a:r>
-              <a:rPr lang="en-US" altLang="zh-CN" sz="1700" dirty="0" err="1"/>
-              <a:t>fapar</a:t>
-            </a:r>
-            <a:r>
-              <a:rPr lang="en-US" altLang="zh-CN" sz="1700" dirty="0"/>
-              <a:t>, </a:t>
-            </a:r>
-            <a:r>
-              <a:rPr lang="en-US" altLang="zh-CN" sz="1700" dirty="0" err="1"/>
-              <a:t>vpd</a:t>
-            </a:r>
-            <a:r>
-              <a:rPr lang="en-US" altLang="zh-CN" sz="1700" dirty="0"/>
-              <a:t>, t, etc.</a:t>
-            </a:r>
-            <a:endParaRPr lang="zh-CN" altLang="en-US" sz="1700" dirty="0"/>
-          </a:p>
-        </p:txBody>
-      </p:sp>
-      <p:cxnSp>
-        <p:nvCxnSpPr>
-          <p:cNvPr id="16" name="直接箭头连接符 18">
-            <a:extLst>
-              <a:ext uri="{FF2B5EF4-FFF2-40B4-BE49-F238E27FC236}">
-                <a16:creationId xmlns:a16="http://schemas.microsoft.com/office/drawing/2014/main" id="{7FAABABA-0DAB-ABBD-38F9-751495997D60}"/>
-              </a:ext>
-            </a:extLst>
-          </p:cNvPr>
-          <p:cNvCxnSpPr>
-            <a:cxnSpLocks/>
-            <a:endCxn id="13" idx="0"/>
-          </p:cNvCxnSpPr>
-          <p:nvPr/>
-        </p:nvCxnSpPr>
-        <p:spPr>
-          <a:xfrm>
-            <a:off x="10460625" y="2395849"/>
-            <a:ext cx="0" cy="371325"/>
-          </a:xfrm>
-          <a:prstGeom prst="straightConnector1">
-            <a:avLst/>
-          </a:prstGeom>
-          <a:ln w="12700">
-            <a:solidFill>
-              <a:schemeClr val="tx1"/>
-            </a:solidFill>
-            <a:headEnd type="none" w="med" len="med"/>
-            <a:tailEnd type="triangle" w="med" len="med"/>
-          </a:ln>
-        </p:spPr>
-        <p:style>
-          <a:lnRef idx="1">
-            <a:schemeClr val="accent1"/>
-          </a:lnRef>
-          <a:fillRef idx="0">
-            <a:schemeClr val="accent1"/>
-          </a:fillRef>
-          <a:effectRef idx="0">
-            <a:schemeClr val="accent1"/>
-          </a:effectRef>
-          <a:fontRef idx="minor">
-            <a:schemeClr val="tx1"/>
-          </a:fontRef>
-        </p:style>
-      </p:cxnSp>
-      <p:sp>
-        <p:nvSpPr>
-          <p:cNvPr id="18" name="文本框 25">
-            <a:extLst>
-              <a:ext uri="{FF2B5EF4-FFF2-40B4-BE49-F238E27FC236}">
-                <a16:creationId xmlns:a16="http://schemas.microsoft.com/office/drawing/2014/main" id="{C9AFD7FC-4575-7043-FF67-17F827CB6DD7}"/>
-              </a:ext>
-            </a:extLst>
-          </p:cNvPr>
-          <p:cNvSpPr txBox="1"/>
-          <p:nvPr/>
-        </p:nvSpPr>
-        <p:spPr>
-          <a:xfrm>
-            <a:off x="6270948" y="4276612"/>
-            <a:ext cx="1006365" cy="391597"/>
-          </a:xfrm>
-          <a:prstGeom prst="roundRect">
-            <a:avLst/>
-          </a:prstGeom>
-          <a:solidFill>
-            <a:schemeClr val="bg1">
-              <a:lumMod val="95000"/>
-            </a:schemeClr>
-          </a:solidFill>
-          <a:ln w="19050">
-            <a:solidFill>
-              <a:schemeClr val="tx1"/>
-            </a:solidFill>
-            <a:prstDash val="dash"/>
-          </a:ln>
-        </p:spPr>
-        <p:txBody>
-          <a:bodyPr wrap="square" rtlCol="0">
-            <a:spAutoFit/>
-          </a:bodyPr>
-          <a:lstStyle>
-            <a:defPPr>
-              <a:defRPr lang="zh-CN"/>
-            </a:defPPr>
-            <a:lvl1pPr marL="0" algn="l" defTabSz="914400" rtl="0" eaLnBrk="1" latinLnBrk="0" hangingPunct="1">
-              <a:defRPr sz="1800" kern="1200">
-                <a:solidFill>
-                  <a:schemeClr val="tx1"/>
-                </a:solidFill>
-                <a:latin typeface="+mn-lt"/>
-                <a:ea typeface="+mn-ea"/>
-                <a:cs typeface="+mn-cs"/>
-              </a:defRPr>
-            </a:lvl1pPr>
-            <a:lvl2pPr marL="457200" algn="l" defTabSz="914400" rtl="0" eaLnBrk="1" latinLnBrk="0" hangingPunct="1">
-              <a:defRPr sz="1800" kern="1200">
-                <a:solidFill>
-                  <a:schemeClr val="tx1"/>
-                </a:solidFill>
-                <a:latin typeface="+mn-lt"/>
-                <a:ea typeface="+mn-ea"/>
-                <a:cs typeface="+mn-cs"/>
-              </a:defRPr>
-            </a:lvl2pPr>
-            <a:lvl3pPr marL="914400" algn="l" defTabSz="914400" rtl="0" eaLnBrk="1" latinLnBrk="0" hangingPunct="1">
-              <a:defRPr sz="1800" kern="1200">
-                <a:solidFill>
-                  <a:schemeClr val="tx1"/>
-                </a:solidFill>
-                <a:latin typeface="+mn-lt"/>
-                <a:ea typeface="+mn-ea"/>
-                <a:cs typeface="+mn-cs"/>
-              </a:defRPr>
-            </a:lvl3pPr>
-            <a:lvl4pPr marL="1371600" algn="l" defTabSz="914400" rtl="0" eaLnBrk="1" latinLnBrk="0" hangingPunct="1">
-              <a:defRPr sz="1800" kern="1200">
-                <a:solidFill>
-                  <a:schemeClr val="tx1"/>
-                </a:solidFill>
-                <a:latin typeface="+mn-lt"/>
-                <a:ea typeface="+mn-ea"/>
-                <a:cs typeface="+mn-cs"/>
-              </a:defRPr>
-            </a:lvl4pPr>
-            <a:lvl5pPr marL="1828800" algn="l" defTabSz="914400" rtl="0" eaLnBrk="1" latinLnBrk="0" hangingPunct="1">
-              <a:defRPr sz="1800" kern="1200">
-                <a:solidFill>
-                  <a:schemeClr val="tx1"/>
-                </a:solidFill>
-                <a:latin typeface="+mn-lt"/>
-                <a:ea typeface="+mn-ea"/>
-                <a:cs typeface="+mn-cs"/>
-              </a:defRPr>
-            </a:lvl5pPr>
-            <a:lvl6pPr marL="2286000" algn="l" defTabSz="914400" rtl="0" eaLnBrk="1" latinLnBrk="0" hangingPunct="1">
-              <a:defRPr sz="1800" kern="1200">
-                <a:solidFill>
-                  <a:schemeClr val="tx1"/>
-                </a:solidFill>
-                <a:latin typeface="+mn-lt"/>
-                <a:ea typeface="+mn-ea"/>
-                <a:cs typeface="+mn-cs"/>
-              </a:defRPr>
-            </a:lvl6pPr>
-            <a:lvl7pPr marL="2743200" algn="l" defTabSz="914400" rtl="0" eaLnBrk="1" latinLnBrk="0" hangingPunct="1">
-              <a:defRPr sz="1800" kern="1200">
-                <a:solidFill>
-                  <a:schemeClr val="tx1"/>
-                </a:solidFill>
-                <a:latin typeface="+mn-lt"/>
-                <a:ea typeface="+mn-ea"/>
-                <a:cs typeface="+mn-cs"/>
-              </a:defRPr>
-            </a:lvl7pPr>
-            <a:lvl8pPr marL="3200400" algn="l" defTabSz="914400" rtl="0" eaLnBrk="1" latinLnBrk="0" hangingPunct="1">
-              <a:defRPr sz="1800" kern="1200">
-                <a:solidFill>
-                  <a:schemeClr val="tx1"/>
-                </a:solidFill>
-                <a:latin typeface="+mn-lt"/>
-                <a:ea typeface="+mn-ea"/>
-                <a:cs typeface="+mn-cs"/>
-              </a:defRPr>
-            </a:lvl8pPr>
-            <a:lvl9pPr marL="3657600" algn="l" defTabSz="914400" rtl="0" eaLnBrk="1" latinLnBrk="0" hangingPunct="1">
-              <a:defRPr sz="1800" kern="1200">
-                <a:solidFill>
-                  <a:schemeClr val="tx1"/>
-                </a:solidFill>
-                <a:latin typeface="+mn-lt"/>
-                <a:ea typeface="+mn-ea"/>
-                <a:cs typeface="+mn-cs"/>
-              </a:defRPr>
-            </a:lvl9pPr>
-          </a:lstStyle>
-          <a:p>
-            <a:pPr algn="ctr"/>
-            <a:r>
-              <a:rPr lang="en-US" altLang="zh-CN" sz="1700" dirty="0"/>
-              <a:t>GPP</a:t>
-            </a:r>
-            <a:endParaRPr lang="zh-CN" altLang="en-US" sz="1700" dirty="0"/>
-          </a:p>
-        </p:txBody>
-      </p:sp>
-      <p:sp>
-        <p:nvSpPr>
-          <p:cNvPr id="19" name="矩形 27">
-            <a:extLst>
-              <a:ext uri="{FF2B5EF4-FFF2-40B4-BE49-F238E27FC236}">
-                <a16:creationId xmlns:a16="http://schemas.microsoft.com/office/drawing/2014/main" id="{83F77CE9-FC3A-5F9B-432C-3C0868EBE718}"/>
-              </a:ext>
-            </a:extLst>
-          </p:cNvPr>
-          <p:cNvSpPr/>
-          <p:nvPr/>
-        </p:nvSpPr>
-        <p:spPr>
-          <a:xfrm>
-            <a:off x="7902678" y="4148588"/>
-            <a:ext cx="1298027" cy="647643"/>
-          </a:xfrm>
-          <a:prstGeom prst="rect">
-            <a:avLst/>
-          </a:prstGeom>
-          <a:solidFill>
-            <a:schemeClr val="accent6">
-              <a:lumMod val="40000"/>
-              <a:lumOff val="60000"/>
-            </a:schemeClr>
-          </a:solidFill>
-        </p:spPr>
-        <p:style>
-          <a:lnRef idx="2">
-            <a:schemeClr val="accent1">
-              <a:shade val="15000"/>
-            </a:schemeClr>
-          </a:lnRef>
-          <a:fillRef idx="1">
-            <a:schemeClr val="accent1"/>
-          </a:fillRef>
-          <a:effectRef idx="0">
-            <a:schemeClr val="accent1"/>
-          </a:effectRef>
-          <a:fontRef idx="minor">
-            <a:schemeClr val="lt1"/>
-          </a:fontRef>
-        </p:style>
-        <p:txBody>
-          <a:bodyPr rtlCol="0" anchor="ctr"/>
-          <a:lstStyle>
-            <a:defPPr>
-              <a:defRPr lang="zh-CN"/>
-            </a:defPPr>
-            <a:lvl1pPr marL="0" algn="l" defTabSz="914400" rtl="0" eaLnBrk="1" latinLnBrk="0" hangingPunct="1">
-              <a:defRPr sz="1800" kern="1200">
-                <a:solidFill>
-                  <a:schemeClr val="lt1"/>
-                </a:solidFill>
-                <a:latin typeface="+mn-lt"/>
-                <a:ea typeface="+mn-ea"/>
-                <a:cs typeface="+mn-cs"/>
-              </a:defRPr>
-            </a:lvl1pPr>
-            <a:lvl2pPr marL="457200" algn="l" defTabSz="914400" rtl="0" eaLnBrk="1" latinLnBrk="0" hangingPunct="1">
-              <a:defRPr sz="1800" kern="1200">
-                <a:solidFill>
-                  <a:schemeClr val="lt1"/>
-                </a:solidFill>
-                <a:latin typeface="+mn-lt"/>
-                <a:ea typeface="+mn-ea"/>
-                <a:cs typeface="+mn-cs"/>
-              </a:defRPr>
-            </a:lvl2pPr>
-            <a:lvl3pPr marL="914400" algn="l" defTabSz="914400" rtl="0" eaLnBrk="1" latinLnBrk="0" hangingPunct="1">
-              <a:defRPr sz="1800" kern="1200">
-                <a:solidFill>
-                  <a:schemeClr val="lt1"/>
-                </a:solidFill>
-                <a:latin typeface="+mn-lt"/>
-                <a:ea typeface="+mn-ea"/>
-                <a:cs typeface="+mn-cs"/>
-              </a:defRPr>
-            </a:lvl3pPr>
-            <a:lvl4pPr marL="1371600" algn="l" defTabSz="914400" rtl="0" eaLnBrk="1" latinLnBrk="0" hangingPunct="1">
-              <a:defRPr sz="1800" kern="1200">
-                <a:solidFill>
-                  <a:schemeClr val="lt1"/>
-                </a:solidFill>
-                <a:latin typeface="+mn-lt"/>
-                <a:ea typeface="+mn-ea"/>
-                <a:cs typeface="+mn-cs"/>
-              </a:defRPr>
-            </a:lvl4pPr>
-            <a:lvl5pPr marL="1828800" algn="l" defTabSz="914400" rtl="0" eaLnBrk="1" latinLnBrk="0" hangingPunct="1">
-              <a:defRPr sz="1800" kern="1200">
-                <a:solidFill>
-                  <a:schemeClr val="lt1"/>
-                </a:solidFill>
-                <a:latin typeface="+mn-lt"/>
-                <a:ea typeface="+mn-ea"/>
-                <a:cs typeface="+mn-cs"/>
-              </a:defRPr>
-            </a:lvl5pPr>
-            <a:lvl6pPr marL="2286000" algn="l" defTabSz="914400" rtl="0" eaLnBrk="1" latinLnBrk="0" hangingPunct="1">
-              <a:defRPr sz="1800" kern="1200">
-                <a:solidFill>
-                  <a:schemeClr val="lt1"/>
-                </a:solidFill>
-                <a:latin typeface="+mn-lt"/>
-                <a:ea typeface="+mn-ea"/>
-                <a:cs typeface="+mn-cs"/>
-              </a:defRPr>
-            </a:lvl6pPr>
-            <a:lvl7pPr marL="2743200" algn="l" defTabSz="914400" rtl="0" eaLnBrk="1" latinLnBrk="0" hangingPunct="1">
-              <a:defRPr sz="1800" kern="1200">
-                <a:solidFill>
-                  <a:schemeClr val="lt1"/>
-                </a:solidFill>
-                <a:latin typeface="+mn-lt"/>
-                <a:ea typeface="+mn-ea"/>
-                <a:cs typeface="+mn-cs"/>
-              </a:defRPr>
-            </a:lvl7pPr>
-            <a:lvl8pPr marL="3200400" algn="l" defTabSz="914400" rtl="0" eaLnBrk="1" latinLnBrk="0" hangingPunct="1">
-              <a:defRPr sz="1800" kern="1200">
-                <a:solidFill>
-                  <a:schemeClr val="lt1"/>
-                </a:solidFill>
-                <a:latin typeface="+mn-lt"/>
-                <a:ea typeface="+mn-ea"/>
-                <a:cs typeface="+mn-cs"/>
-              </a:defRPr>
-            </a:lvl8pPr>
-            <a:lvl9pPr marL="3657600" algn="l" defTabSz="914400" rtl="0" eaLnBrk="1" latinLnBrk="0" hangingPunct="1">
-              <a:defRPr sz="1800" kern="1200">
-                <a:solidFill>
-                  <a:schemeClr val="lt1"/>
-                </a:solidFill>
-                <a:latin typeface="+mn-lt"/>
-                <a:ea typeface="+mn-ea"/>
-                <a:cs typeface="+mn-cs"/>
-              </a:defRPr>
-            </a:lvl9pPr>
-          </a:lstStyle>
-          <a:p>
-            <a:pPr algn="ctr"/>
-            <a:r>
-              <a:rPr lang="en-US" altLang="zh-CN" dirty="0">
-                <a:solidFill>
-                  <a:schemeClr val="tx1"/>
-                </a:solidFill>
-              </a:rPr>
-              <a:t>Arrhenius function</a:t>
-            </a:r>
-            <a:endParaRPr lang="zh-CN" altLang="en-US" dirty="0">
-              <a:solidFill>
-                <a:schemeClr val="tx1"/>
-              </a:solidFill>
-            </a:endParaRPr>
-          </a:p>
-        </p:txBody>
-      </p:sp>
-      <p:cxnSp>
-        <p:nvCxnSpPr>
-          <p:cNvPr id="20" name="直接箭头连接符 28">
-            <a:extLst>
-              <a:ext uri="{FF2B5EF4-FFF2-40B4-BE49-F238E27FC236}">
-                <a16:creationId xmlns:a16="http://schemas.microsoft.com/office/drawing/2014/main" id="{E0800DD0-FA9B-9EA0-EE1D-D8586FDB6E48}"/>
-              </a:ext>
-            </a:extLst>
-          </p:cNvPr>
-          <p:cNvCxnSpPr>
-            <a:cxnSpLocks/>
-            <a:stCxn id="18" idx="3"/>
-            <a:endCxn id="19" idx="1"/>
-          </p:cNvCxnSpPr>
-          <p:nvPr/>
-        </p:nvCxnSpPr>
-        <p:spPr>
-          <a:xfrm flipV="1">
-            <a:off x="7277313" y="4472410"/>
-            <a:ext cx="625365" cy="1"/>
-          </a:xfrm>
-          <a:prstGeom prst="straightConnector1">
-            <a:avLst/>
-          </a:prstGeom>
-          <a:ln w="12700">
-            <a:solidFill>
-              <a:schemeClr val="tx1"/>
-            </a:solidFill>
-            <a:headEnd type="none" w="med" len="med"/>
-            <a:tailEnd type="triangle" w="med" len="med"/>
-          </a:ln>
-        </p:spPr>
-        <p:style>
-          <a:lnRef idx="1">
-            <a:schemeClr val="accent1"/>
-          </a:lnRef>
-          <a:fillRef idx="0">
-            <a:schemeClr val="accent1"/>
-          </a:fillRef>
-          <a:effectRef idx="0">
-            <a:schemeClr val="accent1"/>
-          </a:effectRef>
-          <a:fontRef idx="minor">
-            <a:schemeClr val="tx1"/>
-          </a:fontRef>
-        </p:style>
-      </p:cxnSp>
-      <p:cxnSp>
-        <p:nvCxnSpPr>
-          <p:cNvPr id="21" name="直接箭头连接符 32">
-            <a:extLst>
-              <a:ext uri="{FF2B5EF4-FFF2-40B4-BE49-F238E27FC236}">
-                <a16:creationId xmlns:a16="http://schemas.microsoft.com/office/drawing/2014/main" id="{82C4B579-F934-7AA7-3A5C-215386F6C372}"/>
-              </a:ext>
-            </a:extLst>
-          </p:cNvPr>
-          <p:cNvCxnSpPr>
-            <a:cxnSpLocks/>
-            <a:stCxn id="22" idx="0"/>
-            <a:endCxn id="19" idx="2"/>
-          </p:cNvCxnSpPr>
-          <p:nvPr/>
-        </p:nvCxnSpPr>
-        <p:spPr>
-          <a:xfrm flipV="1">
-            <a:off x="8551692" y="4796231"/>
-            <a:ext cx="0" cy="411285"/>
-          </a:xfrm>
-          <a:prstGeom prst="straightConnector1">
-            <a:avLst/>
-          </a:prstGeom>
-          <a:ln w="12700">
-            <a:solidFill>
-              <a:schemeClr val="tx1"/>
-            </a:solidFill>
-            <a:headEnd type="none" w="med" len="med"/>
-            <a:tailEnd type="triangle" w="med" len="med"/>
-          </a:ln>
-        </p:spPr>
-        <p:style>
-          <a:lnRef idx="1">
-            <a:schemeClr val="accent1"/>
-          </a:lnRef>
-          <a:fillRef idx="0">
-            <a:schemeClr val="accent1"/>
-          </a:fillRef>
-          <a:effectRef idx="0">
-            <a:schemeClr val="accent1"/>
-          </a:effectRef>
-          <a:fontRef idx="minor">
-            <a:schemeClr val="tx1"/>
-          </a:fontRef>
-        </p:style>
-      </p:cxnSp>
       <mc:AlternateContent xmlns:mc="http://schemas.openxmlformats.org/markup-compatibility/2006">
         <mc:Choice xmlns:a14="http://schemas.microsoft.com/office/drawing/2010/main" Requires="a14">
           <p:sp>
             <p:nvSpPr>
-              <p:cNvPr id="22" name="文本框 35">
+              <p:cNvPr id="5" name="TextBox 4">
                 <a:extLst>
                   <a:ext uri="{FF2B5EF4-FFF2-40B4-BE49-F238E27FC236}">
-                    <a16:creationId xmlns:a16="http://schemas.microsoft.com/office/drawing/2014/main" id="{72BD17C5-2D17-40EA-4A15-6090D275725C}"/>
-                  </a:ext>
-                </a:extLst>
-              </p:cNvPr>
-              <p:cNvSpPr txBox="1"/>
-              <p:nvPr/>
-            </p:nvSpPr>
-            <p:spPr>
-              <a:xfrm>
-                <a:off x="7972968" y="5207516"/>
-                <a:ext cx="1157447" cy="404508"/>
-              </a:xfrm>
-              <a:prstGeom prst="roundRect">
-                <a:avLst/>
-              </a:prstGeom>
-              <a:solidFill>
-                <a:schemeClr val="bg1">
-                  <a:lumMod val="95000"/>
-                </a:schemeClr>
-              </a:solidFill>
-              <a:ln w="19050">
-                <a:solidFill>
-                  <a:schemeClr val="tx1"/>
-                </a:solidFill>
-                <a:prstDash val="dash"/>
-              </a:ln>
-            </p:spPr>
-            <p:txBody>
-              <a:bodyPr wrap="square" rtlCol="0">
-                <a:spAutoFit/>
-              </a:bodyPr>
-              <a:lstStyle>
-                <a:defPPr>
-                  <a:defRPr lang="zh-CN"/>
-                </a:defPPr>
-                <a:lvl1pPr marL="0" algn="l" defTabSz="914400" rtl="0" eaLnBrk="1" latinLnBrk="0" hangingPunct="1">
-                  <a:defRPr sz="1800" kern="1200">
-                    <a:solidFill>
-                      <a:schemeClr val="tx1"/>
-                    </a:solidFill>
-                    <a:latin typeface="+mn-lt"/>
-                    <a:ea typeface="+mn-ea"/>
-                    <a:cs typeface="+mn-cs"/>
-                  </a:defRPr>
-                </a:lvl1pPr>
-                <a:lvl2pPr marL="457200" algn="l" defTabSz="914400" rtl="0" eaLnBrk="1" latinLnBrk="0" hangingPunct="1">
-                  <a:defRPr sz="1800" kern="1200">
-                    <a:solidFill>
-                      <a:schemeClr val="tx1"/>
-                    </a:solidFill>
-                    <a:latin typeface="+mn-lt"/>
-                    <a:ea typeface="+mn-ea"/>
-                    <a:cs typeface="+mn-cs"/>
-                  </a:defRPr>
-                </a:lvl2pPr>
-                <a:lvl3pPr marL="914400" algn="l" defTabSz="914400" rtl="0" eaLnBrk="1" latinLnBrk="0" hangingPunct="1">
-                  <a:defRPr sz="1800" kern="1200">
-                    <a:solidFill>
-                      <a:schemeClr val="tx1"/>
-                    </a:solidFill>
-                    <a:latin typeface="+mn-lt"/>
-                    <a:ea typeface="+mn-ea"/>
-                    <a:cs typeface="+mn-cs"/>
-                  </a:defRPr>
-                </a:lvl3pPr>
-                <a:lvl4pPr marL="1371600" algn="l" defTabSz="914400" rtl="0" eaLnBrk="1" latinLnBrk="0" hangingPunct="1">
-                  <a:defRPr sz="1800" kern="1200">
-                    <a:solidFill>
-                      <a:schemeClr val="tx1"/>
-                    </a:solidFill>
-                    <a:latin typeface="+mn-lt"/>
-                    <a:ea typeface="+mn-ea"/>
-                    <a:cs typeface="+mn-cs"/>
-                  </a:defRPr>
-                </a:lvl4pPr>
-                <a:lvl5pPr marL="1828800" algn="l" defTabSz="914400" rtl="0" eaLnBrk="1" latinLnBrk="0" hangingPunct="1">
-                  <a:defRPr sz="1800" kern="1200">
-                    <a:solidFill>
-                      <a:schemeClr val="tx1"/>
-                    </a:solidFill>
-                    <a:latin typeface="+mn-lt"/>
-                    <a:ea typeface="+mn-ea"/>
-                    <a:cs typeface="+mn-cs"/>
-                  </a:defRPr>
-                </a:lvl5pPr>
-                <a:lvl6pPr marL="2286000" algn="l" defTabSz="914400" rtl="0" eaLnBrk="1" latinLnBrk="0" hangingPunct="1">
-                  <a:defRPr sz="1800" kern="1200">
-                    <a:solidFill>
-                      <a:schemeClr val="tx1"/>
-                    </a:solidFill>
-                    <a:latin typeface="+mn-lt"/>
-                    <a:ea typeface="+mn-ea"/>
-                    <a:cs typeface="+mn-cs"/>
-                  </a:defRPr>
-                </a:lvl6pPr>
-                <a:lvl7pPr marL="2743200" algn="l" defTabSz="914400" rtl="0" eaLnBrk="1" latinLnBrk="0" hangingPunct="1">
-                  <a:defRPr sz="1800" kern="1200">
-                    <a:solidFill>
-                      <a:schemeClr val="tx1"/>
-                    </a:solidFill>
-                    <a:latin typeface="+mn-lt"/>
-                    <a:ea typeface="+mn-ea"/>
-                    <a:cs typeface="+mn-cs"/>
-                  </a:defRPr>
-                </a:lvl7pPr>
-                <a:lvl8pPr marL="3200400" algn="l" defTabSz="914400" rtl="0" eaLnBrk="1" latinLnBrk="0" hangingPunct="1">
-                  <a:defRPr sz="1800" kern="1200">
-                    <a:solidFill>
-                      <a:schemeClr val="tx1"/>
-                    </a:solidFill>
-                    <a:latin typeface="+mn-lt"/>
-                    <a:ea typeface="+mn-ea"/>
-                    <a:cs typeface="+mn-cs"/>
-                  </a:defRPr>
-                </a:lvl8pPr>
-                <a:lvl9pPr marL="3657600" algn="l" defTabSz="914400" rtl="0" eaLnBrk="1" latinLnBrk="0" hangingPunct="1">
-                  <a:defRPr sz="1800" kern="1200">
-                    <a:solidFill>
-                      <a:schemeClr val="tx1"/>
-                    </a:solidFill>
-                    <a:latin typeface="+mn-lt"/>
-                    <a:ea typeface="+mn-ea"/>
-                    <a:cs typeface="+mn-cs"/>
-                  </a:defRPr>
-                </a:lvl9pPr>
-              </a:lstStyle>
-              <a:p>
-                <a:pPr algn="ctr"/>
-                <a:r>
-                  <a:rPr lang="en-US" altLang="zh-CN" sz="1700" dirty="0"/>
-                  <a:t>SOC, </a:t>
-                </a:r>
-                <a14:m>
-                  <m:oMath xmlns:m="http://schemas.openxmlformats.org/officeDocument/2006/math">
-                    <m:sSub>
-                      <m:sSubPr>
-                        <m:ctrlPr>
-                          <a:rPr lang="en-US" altLang="zh-CN" sz="1700" i="1" dirty="0" smtClean="0">
-                            <a:latin typeface="Cambria Math" panose="02040503050406030204" pitchFamily="18" charset="0"/>
-                          </a:rPr>
-                        </m:ctrlPr>
-                      </m:sSubPr>
-                      <m:e>
-                        <m:r>
-                          <a:rPr lang="en-US" altLang="zh-CN" sz="1700" b="0" i="1" dirty="0" smtClean="0">
-                            <a:latin typeface="Cambria Math" panose="02040503050406030204" pitchFamily="18" charset="0"/>
-                          </a:rPr>
-                          <m:t>𝑇</m:t>
-                        </m:r>
-                      </m:e>
-                      <m:sub>
-                        <m:r>
-                          <m:rPr>
-                            <m:nor/>
-                          </m:rPr>
-                          <a:rPr lang="en-US" altLang="zh-CN" sz="1700" b="0" i="0" dirty="0" smtClean="0">
-                            <a:latin typeface="Cambria Math" panose="02040503050406030204" pitchFamily="18" charset="0"/>
-                          </a:rPr>
-                          <m:t>A</m:t>
-                        </m:r>
-                      </m:sub>
-                    </m:sSub>
-                  </m:oMath>
-                </a14:m>
-                <a:endParaRPr lang="zh-CN" altLang="en-US" sz="1700" dirty="0"/>
-              </a:p>
-            </p:txBody>
-          </p:sp>
-        </mc:Choice>
-        <mc:Fallback>
-          <p:sp>
-            <p:nvSpPr>
-              <p:cNvPr id="22" name="文本框 35">
-                <a:extLst>
-                  <a:ext uri="{FF2B5EF4-FFF2-40B4-BE49-F238E27FC236}">
-                    <a16:creationId xmlns:a16="http://schemas.microsoft.com/office/drawing/2014/main" id="{72BD17C5-2D17-40EA-4A15-6090D275725C}"/>
-                  </a:ext>
-                </a:extLst>
-              </p:cNvPr>
-              <p:cNvSpPr txBox="1">
-                <a:spLocks noRot="1" noChangeAspect="1" noMove="1" noResize="1" noEditPoints="1" noAdjustHandles="1" noChangeArrowheads="1" noChangeShapeType="1" noTextEdit="1"/>
-              </p:cNvSpPr>
-              <p:nvPr/>
-            </p:nvSpPr>
-            <p:spPr>
-              <a:xfrm>
-                <a:off x="7972968" y="5207516"/>
-                <a:ext cx="1157447" cy="404508"/>
-              </a:xfrm>
-              <a:prstGeom prst="roundRect">
-                <a:avLst/>
-              </a:prstGeom>
-              <a:blipFill>
-                <a:blip r:embed="rId4"/>
-                <a:stretch>
-                  <a:fillRect b="-5714"/>
-                </a:stretch>
-              </a:blipFill>
-              <a:ln w="19050">
-                <a:solidFill>
-                  <a:schemeClr val="tx1"/>
-                </a:solidFill>
-                <a:prstDash val="dash"/>
-              </a:ln>
-            </p:spPr>
-            <p:txBody>
-              <a:bodyPr/>
-              <a:lstStyle/>
-              <a:p>
-                <a:r>
-                  <a:rPr lang="en-US">
-                    <a:noFill/>
-                  </a:rPr>
-                  <a:t> </a:t>
-                </a:r>
-              </a:p>
-            </p:txBody>
-          </p:sp>
-        </mc:Fallback>
-      </mc:AlternateContent>
-      <p:cxnSp>
-        <p:nvCxnSpPr>
-          <p:cNvPr id="23" name="直接箭头连接符 39">
-            <a:extLst>
-              <a:ext uri="{FF2B5EF4-FFF2-40B4-BE49-F238E27FC236}">
-                <a16:creationId xmlns:a16="http://schemas.microsoft.com/office/drawing/2014/main" id="{DB3E763E-A112-B43E-8B25-776BF7C80D7D}"/>
-              </a:ext>
-            </a:extLst>
-          </p:cNvPr>
-          <p:cNvCxnSpPr>
-            <a:cxnSpLocks/>
-            <a:stCxn id="19" idx="3"/>
-            <a:endCxn id="24" idx="1"/>
-          </p:cNvCxnSpPr>
-          <p:nvPr/>
-        </p:nvCxnSpPr>
-        <p:spPr>
-          <a:xfrm>
-            <a:off x="9200705" y="4472410"/>
-            <a:ext cx="625365" cy="1"/>
-          </a:xfrm>
-          <a:prstGeom prst="straightConnector1">
-            <a:avLst/>
-          </a:prstGeom>
-          <a:ln w="12700">
-            <a:solidFill>
-              <a:schemeClr val="tx1"/>
-            </a:solidFill>
-            <a:headEnd type="none" w="med" len="med"/>
-            <a:tailEnd type="triangle" w="med" len="med"/>
-          </a:ln>
-        </p:spPr>
-        <p:style>
-          <a:lnRef idx="1">
-            <a:schemeClr val="accent1"/>
-          </a:lnRef>
-          <a:fillRef idx="0">
-            <a:schemeClr val="accent1"/>
-          </a:fillRef>
-          <a:effectRef idx="0">
-            <a:schemeClr val="accent1"/>
-          </a:effectRef>
-          <a:fontRef idx="minor">
-            <a:schemeClr val="tx1"/>
-          </a:fontRef>
-        </p:style>
-      </p:cxnSp>
-      <p:sp>
-        <p:nvSpPr>
-          <p:cNvPr id="24" name="文本框 58">
-            <a:extLst>
-              <a:ext uri="{FF2B5EF4-FFF2-40B4-BE49-F238E27FC236}">
-                <a16:creationId xmlns:a16="http://schemas.microsoft.com/office/drawing/2014/main" id="{FE838FF4-2759-08C3-CF11-F9EB8928D09B}"/>
-              </a:ext>
-            </a:extLst>
-          </p:cNvPr>
-          <p:cNvSpPr txBox="1"/>
-          <p:nvPr/>
-        </p:nvSpPr>
-        <p:spPr>
-          <a:xfrm>
-            <a:off x="9826070" y="4276612"/>
-            <a:ext cx="994544" cy="391597"/>
-          </a:xfrm>
-          <a:prstGeom prst="roundRect">
-            <a:avLst/>
-          </a:prstGeom>
-          <a:solidFill>
-            <a:schemeClr val="bg1">
-              <a:lumMod val="95000"/>
-            </a:schemeClr>
-          </a:solidFill>
-          <a:ln w="19050">
-            <a:solidFill>
-              <a:schemeClr val="tx1"/>
-            </a:solidFill>
-            <a:prstDash val="dash"/>
-          </a:ln>
-        </p:spPr>
-        <p:txBody>
-          <a:bodyPr wrap="square" rtlCol="0">
-            <a:spAutoFit/>
-          </a:bodyPr>
-          <a:lstStyle>
-            <a:defPPr>
-              <a:defRPr lang="zh-CN"/>
-            </a:defPPr>
-            <a:lvl1pPr marL="0" algn="l" defTabSz="914400" rtl="0" eaLnBrk="1" latinLnBrk="0" hangingPunct="1">
-              <a:defRPr sz="1800" kern="1200">
-                <a:solidFill>
-                  <a:schemeClr val="tx1"/>
-                </a:solidFill>
-                <a:latin typeface="+mn-lt"/>
-                <a:ea typeface="+mn-ea"/>
-                <a:cs typeface="+mn-cs"/>
-              </a:defRPr>
-            </a:lvl1pPr>
-            <a:lvl2pPr marL="457200" algn="l" defTabSz="914400" rtl="0" eaLnBrk="1" latinLnBrk="0" hangingPunct="1">
-              <a:defRPr sz="1800" kern="1200">
-                <a:solidFill>
-                  <a:schemeClr val="tx1"/>
-                </a:solidFill>
-                <a:latin typeface="+mn-lt"/>
-                <a:ea typeface="+mn-ea"/>
-                <a:cs typeface="+mn-cs"/>
-              </a:defRPr>
-            </a:lvl2pPr>
-            <a:lvl3pPr marL="914400" algn="l" defTabSz="914400" rtl="0" eaLnBrk="1" latinLnBrk="0" hangingPunct="1">
-              <a:defRPr sz="1800" kern="1200">
-                <a:solidFill>
-                  <a:schemeClr val="tx1"/>
-                </a:solidFill>
-                <a:latin typeface="+mn-lt"/>
-                <a:ea typeface="+mn-ea"/>
-                <a:cs typeface="+mn-cs"/>
-              </a:defRPr>
-            </a:lvl3pPr>
-            <a:lvl4pPr marL="1371600" algn="l" defTabSz="914400" rtl="0" eaLnBrk="1" latinLnBrk="0" hangingPunct="1">
-              <a:defRPr sz="1800" kern="1200">
-                <a:solidFill>
-                  <a:schemeClr val="tx1"/>
-                </a:solidFill>
-                <a:latin typeface="+mn-lt"/>
-                <a:ea typeface="+mn-ea"/>
-                <a:cs typeface="+mn-cs"/>
-              </a:defRPr>
-            </a:lvl4pPr>
-            <a:lvl5pPr marL="1828800" algn="l" defTabSz="914400" rtl="0" eaLnBrk="1" latinLnBrk="0" hangingPunct="1">
-              <a:defRPr sz="1800" kern="1200">
-                <a:solidFill>
-                  <a:schemeClr val="tx1"/>
-                </a:solidFill>
-                <a:latin typeface="+mn-lt"/>
-                <a:ea typeface="+mn-ea"/>
-                <a:cs typeface="+mn-cs"/>
-              </a:defRPr>
-            </a:lvl5pPr>
-            <a:lvl6pPr marL="2286000" algn="l" defTabSz="914400" rtl="0" eaLnBrk="1" latinLnBrk="0" hangingPunct="1">
-              <a:defRPr sz="1800" kern="1200">
-                <a:solidFill>
-                  <a:schemeClr val="tx1"/>
-                </a:solidFill>
-                <a:latin typeface="+mn-lt"/>
-                <a:ea typeface="+mn-ea"/>
-                <a:cs typeface="+mn-cs"/>
-              </a:defRPr>
-            </a:lvl6pPr>
-            <a:lvl7pPr marL="2743200" algn="l" defTabSz="914400" rtl="0" eaLnBrk="1" latinLnBrk="0" hangingPunct="1">
-              <a:defRPr sz="1800" kern="1200">
-                <a:solidFill>
-                  <a:schemeClr val="tx1"/>
-                </a:solidFill>
-                <a:latin typeface="+mn-lt"/>
-                <a:ea typeface="+mn-ea"/>
-                <a:cs typeface="+mn-cs"/>
-              </a:defRPr>
-            </a:lvl7pPr>
-            <a:lvl8pPr marL="3200400" algn="l" defTabSz="914400" rtl="0" eaLnBrk="1" latinLnBrk="0" hangingPunct="1">
-              <a:defRPr sz="1800" kern="1200">
-                <a:solidFill>
-                  <a:schemeClr val="tx1"/>
-                </a:solidFill>
-                <a:latin typeface="+mn-lt"/>
-                <a:ea typeface="+mn-ea"/>
-                <a:cs typeface="+mn-cs"/>
-              </a:defRPr>
-            </a:lvl8pPr>
-            <a:lvl9pPr marL="3657600" algn="l" defTabSz="914400" rtl="0" eaLnBrk="1" latinLnBrk="0" hangingPunct="1">
-              <a:defRPr sz="1800" kern="1200">
-                <a:solidFill>
-                  <a:schemeClr val="tx1"/>
-                </a:solidFill>
-                <a:latin typeface="+mn-lt"/>
-                <a:ea typeface="+mn-ea"/>
-                <a:cs typeface="+mn-cs"/>
-              </a:defRPr>
-            </a:lvl9pPr>
-          </a:lstStyle>
-          <a:p>
-            <a:pPr algn="ctr"/>
-            <a:r>
-              <a:rPr lang="en-US" altLang="zh-CN" sz="1700" dirty="0"/>
-              <a:t>NEE</a:t>
-            </a:r>
-            <a:endParaRPr lang="zh-CN" altLang="en-US" sz="1700" dirty="0"/>
-          </a:p>
-        </p:txBody>
-      </p:sp>
-      <mc:AlternateContent xmlns:mc="http://schemas.openxmlformats.org/markup-compatibility/2006">
-        <mc:Choice xmlns:a14="http://schemas.microsoft.com/office/drawing/2010/main" Requires="a14">
-          <p:sp>
-            <p:nvSpPr>
-              <p:cNvPr id="26" name="文本框 1055">
-                <a:extLst>
-                  <a:ext uri="{FF2B5EF4-FFF2-40B4-BE49-F238E27FC236}">
-                    <a16:creationId xmlns:a16="http://schemas.microsoft.com/office/drawing/2014/main" id="{6E92FB70-FE8E-4ABD-C26F-564543C9EDFA}"/>
-                  </a:ext>
-                </a:extLst>
-              </p:cNvPr>
-              <p:cNvSpPr txBox="1"/>
-              <p:nvPr/>
-            </p:nvSpPr>
-            <p:spPr>
-              <a:xfrm>
-                <a:off x="9154059" y="4056094"/>
-                <a:ext cx="667408" cy="379848"/>
-              </a:xfrm>
-              <a:prstGeom prst="rect">
-                <a:avLst/>
-              </a:prstGeom>
-              <a:noFill/>
-            </p:spPr>
-            <p:txBody>
-              <a:bodyPr wrap="square">
-                <a:spAutoFit/>
-              </a:bodyPr>
-              <a:lstStyle>
-                <a:defPPr>
-                  <a:defRPr lang="zh-CN"/>
-                </a:defPPr>
-                <a:lvl1pPr marL="0" algn="l" defTabSz="914400" rtl="0" eaLnBrk="1" latinLnBrk="0" hangingPunct="1">
-                  <a:defRPr sz="1800" kern="1200">
-                    <a:solidFill>
-                      <a:schemeClr val="tx1"/>
-                    </a:solidFill>
-                    <a:latin typeface="+mn-lt"/>
-                    <a:ea typeface="+mn-ea"/>
-                    <a:cs typeface="+mn-cs"/>
-                  </a:defRPr>
-                </a:lvl1pPr>
-                <a:lvl2pPr marL="457200" algn="l" defTabSz="914400" rtl="0" eaLnBrk="1" latinLnBrk="0" hangingPunct="1">
-                  <a:defRPr sz="1800" kern="1200">
-                    <a:solidFill>
-                      <a:schemeClr val="tx1"/>
-                    </a:solidFill>
-                    <a:latin typeface="+mn-lt"/>
-                    <a:ea typeface="+mn-ea"/>
-                    <a:cs typeface="+mn-cs"/>
-                  </a:defRPr>
-                </a:lvl2pPr>
-                <a:lvl3pPr marL="914400" algn="l" defTabSz="914400" rtl="0" eaLnBrk="1" latinLnBrk="0" hangingPunct="1">
-                  <a:defRPr sz="1800" kern="1200">
-                    <a:solidFill>
-                      <a:schemeClr val="tx1"/>
-                    </a:solidFill>
-                    <a:latin typeface="+mn-lt"/>
-                    <a:ea typeface="+mn-ea"/>
-                    <a:cs typeface="+mn-cs"/>
-                  </a:defRPr>
-                </a:lvl3pPr>
-                <a:lvl4pPr marL="1371600" algn="l" defTabSz="914400" rtl="0" eaLnBrk="1" latinLnBrk="0" hangingPunct="1">
-                  <a:defRPr sz="1800" kern="1200">
-                    <a:solidFill>
-                      <a:schemeClr val="tx1"/>
-                    </a:solidFill>
-                    <a:latin typeface="+mn-lt"/>
-                    <a:ea typeface="+mn-ea"/>
-                    <a:cs typeface="+mn-cs"/>
-                  </a:defRPr>
-                </a:lvl4pPr>
-                <a:lvl5pPr marL="1828800" algn="l" defTabSz="914400" rtl="0" eaLnBrk="1" latinLnBrk="0" hangingPunct="1">
-                  <a:defRPr sz="1800" kern="1200">
-                    <a:solidFill>
-                      <a:schemeClr val="tx1"/>
-                    </a:solidFill>
-                    <a:latin typeface="+mn-lt"/>
-                    <a:ea typeface="+mn-ea"/>
-                    <a:cs typeface="+mn-cs"/>
-                  </a:defRPr>
-                </a:lvl5pPr>
-                <a:lvl6pPr marL="2286000" algn="l" defTabSz="914400" rtl="0" eaLnBrk="1" latinLnBrk="0" hangingPunct="1">
-                  <a:defRPr sz="1800" kern="1200">
-                    <a:solidFill>
-                      <a:schemeClr val="tx1"/>
-                    </a:solidFill>
-                    <a:latin typeface="+mn-lt"/>
-                    <a:ea typeface="+mn-ea"/>
-                    <a:cs typeface="+mn-cs"/>
-                  </a:defRPr>
-                </a:lvl6pPr>
-                <a:lvl7pPr marL="2743200" algn="l" defTabSz="914400" rtl="0" eaLnBrk="1" latinLnBrk="0" hangingPunct="1">
-                  <a:defRPr sz="1800" kern="1200">
-                    <a:solidFill>
-                      <a:schemeClr val="tx1"/>
-                    </a:solidFill>
-                    <a:latin typeface="+mn-lt"/>
-                    <a:ea typeface="+mn-ea"/>
-                    <a:cs typeface="+mn-cs"/>
-                  </a:defRPr>
-                </a:lvl7pPr>
-                <a:lvl8pPr marL="3200400" algn="l" defTabSz="914400" rtl="0" eaLnBrk="1" latinLnBrk="0" hangingPunct="1">
-                  <a:defRPr sz="1800" kern="1200">
-                    <a:solidFill>
-                      <a:schemeClr val="tx1"/>
-                    </a:solidFill>
-                    <a:latin typeface="+mn-lt"/>
-                    <a:ea typeface="+mn-ea"/>
-                    <a:cs typeface="+mn-cs"/>
-                  </a:defRPr>
-                </a:lvl8pPr>
-                <a:lvl9pPr marL="3657600" algn="l" defTabSz="914400" rtl="0" eaLnBrk="1" latinLnBrk="0" hangingPunct="1">
-                  <a:defRPr sz="1800" kern="1200">
-                    <a:solidFill>
-                      <a:schemeClr val="tx1"/>
-                    </a:solidFill>
-                    <a:latin typeface="+mn-lt"/>
-                    <a:ea typeface="+mn-ea"/>
-                    <a:cs typeface="+mn-cs"/>
-                  </a:defRPr>
-                </a:lvl9pPr>
-              </a:lstStyle>
-              <a:p>
-                <a14:m>
-                  <m:oMathPara xmlns:m="http://schemas.openxmlformats.org/officeDocument/2006/math">
-                    <m:oMathParaPr>
-                      <m:jc m:val="centerGroup"/>
-                    </m:oMathParaPr>
-                    <m:oMath xmlns:m="http://schemas.openxmlformats.org/officeDocument/2006/math">
-                      <m:sSub>
-                        <m:sSubPr>
-                          <m:ctrlPr>
-                            <a:rPr lang="en-US" altLang="zh-CN" i="1" smtClean="0">
-                              <a:latin typeface="Cambria Math" panose="02040503050406030204" pitchFamily="18" charset="0"/>
-                            </a:rPr>
-                          </m:ctrlPr>
-                        </m:sSubPr>
-                        <m:e>
-                          <m:r>
-                            <a:rPr lang="en-US" altLang="zh-CN" b="0" i="1" smtClean="0">
-                              <a:latin typeface="Cambria Math" panose="02040503050406030204" pitchFamily="18" charset="0"/>
-                            </a:rPr>
-                            <m:t>𝑅</m:t>
-                          </m:r>
-                        </m:e>
-                        <m:sub>
-                          <m:r>
-                            <m:rPr>
-                              <m:nor/>
-                            </m:rPr>
-                            <a:rPr lang="en-US" altLang="zh-CN" b="0" i="0" smtClean="0">
-                              <a:latin typeface="Cambria Math" panose="02040503050406030204" pitchFamily="18" charset="0"/>
-                            </a:rPr>
-                            <m:t>ECO</m:t>
-                          </m:r>
-                        </m:sub>
-                      </m:sSub>
-                    </m:oMath>
-                  </m:oMathPara>
-                </a14:m>
-                <a:endParaRPr lang="zh-CN" altLang="en-US" dirty="0"/>
-              </a:p>
-            </p:txBody>
-          </p:sp>
-        </mc:Choice>
-        <mc:Fallback>
-          <p:sp>
-            <p:nvSpPr>
-              <p:cNvPr id="26" name="文本框 1055">
-                <a:extLst>
-                  <a:ext uri="{FF2B5EF4-FFF2-40B4-BE49-F238E27FC236}">
-                    <a16:creationId xmlns:a16="http://schemas.microsoft.com/office/drawing/2014/main" id="{6E92FB70-FE8E-4ABD-C26F-564543C9EDFA}"/>
-                  </a:ext>
-                </a:extLst>
-              </p:cNvPr>
-              <p:cNvSpPr txBox="1">
-                <a:spLocks noRot="1" noChangeAspect="1" noMove="1" noResize="1" noEditPoints="1" noAdjustHandles="1" noChangeArrowheads="1" noChangeShapeType="1" noTextEdit="1"/>
-              </p:cNvSpPr>
-              <p:nvPr/>
-            </p:nvSpPr>
-            <p:spPr>
-              <a:xfrm>
-                <a:off x="9154059" y="4056094"/>
-                <a:ext cx="667408" cy="379848"/>
-              </a:xfrm>
-              <a:prstGeom prst="rect">
-                <a:avLst/>
-              </a:prstGeom>
-              <a:blipFill>
-                <a:blip r:embed="rId5"/>
-                <a:stretch>
-                  <a:fillRect r="-9259" b="-9677"/>
-                </a:stretch>
-              </a:blipFill>
-            </p:spPr>
-            <p:txBody>
-              <a:bodyPr/>
-              <a:lstStyle/>
-              <a:p>
-                <a:r>
-                  <a:rPr lang="en-US">
-                    <a:noFill/>
-                  </a:rPr>
-                  <a:t> </a:t>
-                </a:r>
-              </a:p>
-            </p:txBody>
-          </p:sp>
-        </mc:Fallback>
-      </mc:AlternateContent>
-      <p:sp>
-        <p:nvSpPr>
-          <p:cNvPr id="37" name="Content Placeholder 2">
-            <a:extLst>
-              <a:ext uri="{FF2B5EF4-FFF2-40B4-BE49-F238E27FC236}">
-                <a16:creationId xmlns:a16="http://schemas.microsoft.com/office/drawing/2014/main" id="{E38CEAA5-7184-0611-BCD9-486C8DF9DDB7}"/>
-              </a:ext>
-            </a:extLst>
-          </p:cNvPr>
-          <p:cNvSpPr>
-            <a:spLocks noGrp="1"/>
-          </p:cNvSpPr>
-          <p:nvPr>
-            <p:ph idx="1"/>
-          </p:nvPr>
-        </p:nvSpPr>
-        <p:spPr>
-          <a:xfrm>
-            <a:off x="838200" y="1825625"/>
-            <a:ext cx="10515600" cy="489569"/>
-          </a:xfrm>
-        </p:spPr>
-        <p:txBody>
-          <a:bodyPr>
-            <a:normAutofit/>
-          </a:bodyPr>
-          <a:lstStyle/>
-          <a:p>
-            <a:pPr marL="285750" indent="-285750"/>
-            <a:r>
-              <a:rPr lang="en-US" altLang="zh-CN" sz="2000" b="1" dirty="0" err="1">
-                <a:latin typeface="Arial" panose="020B0604020202020204" pitchFamily="34" charset="0"/>
-                <a:cs typeface="Arial" panose="020B0604020202020204" pitchFamily="34" charset="0"/>
-              </a:rPr>
-              <a:t>Migliavacca</a:t>
-            </a:r>
-            <a:r>
-              <a:rPr lang="en-US" altLang="zh-CN" sz="2000" b="1" dirty="0">
-                <a:latin typeface="Arial" panose="020B0604020202020204" pitchFamily="34" charset="0"/>
-                <a:cs typeface="Arial" panose="020B0604020202020204" pitchFamily="34" charset="0"/>
-              </a:rPr>
-              <a:t> et al, 2011</a:t>
-            </a:r>
-            <a:endParaRPr lang="zh-CN" altLang="en-US" sz="2000" b="1" dirty="0">
-              <a:latin typeface="Arial" panose="020B0604020202020204" pitchFamily="34" charset="0"/>
-              <a:cs typeface="Arial" panose="020B0604020202020204" pitchFamily="34" charset="0"/>
-            </a:endParaRPr>
-          </a:p>
-        </p:txBody>
-      </p:sp>
-      <p:cxnSp>
-        <p:nvCxnSpPr>
-          <p:cNvPr id="40" name="Connector: Elbow 39">
-            <a:extLst>
-              <a:ext uri="{FF2B5EF4-FFF2-40B4-BE49-F238E27FC236}">
-                <a16:creationId xmlns:a16="http://schemas.microsoft.com/office/drawing/2014/main" id="{2C83ED70-F5C8-597A-5BB3-7E115ADFE03F}"/>
-              </a:ext>
-            </a:extLst>
-          </p:cNvPr>
-          <p:cNvCxnSpPr>
-            <a:stCxn id="13" idx="2"/>
-            <a:endCxn id="18" idx="0"/>
-          </p:cNvCxnSpPr>
-          <p:nvPr/>
-        </p:nvCxnSpPr>
-        <p:spPr>
-          <a:xfrm rot="5400000">
-            <a:off x="8112280" y="1928266"/>
-            <a:ext cx="1010197" cy="3686494"/>
-          </a:xfrm>
-          <a:prstGeom prst="bentConnector3">
-            <a:avLst>
-              <a:gd name="adj1" fmla="val 37278"/>
-            </a:avLst>
-          </a:prstGeom>
-          <a:ln w="12700">
-            <a:tailEnd type="triangle"/>
-          </a:ln>
-        </p:spPr>
-        <p:style>
-          <a:lnRef idx="1">
-            <a:schemeClr val="dk1"/>
-          </a:lnRef>
-          <a:fillRef idx="0">
-            <a:schemeClr val="dk1"/>
-          </a:fillRef>
-          <a:effectRef idx="0">
-            <a:schemeClr val="dk1"/>
-          </a:effectRef>
-          <a:fontRef idx="minor">
-            <a:schemeClr val="tx1"/>
-          </a:fontRef>
-        </p:style>
-      </p:cxnSp>
-      <mc:AlternateContent xmlns:mc="http://schemas.openxmlformats.org/markup-compatibility/2006">
-        <mc:Choice xmlns:a14="http://schemas.microsoft.com/office/drawing/2010/main" Requires="a14">
-          <p:sp>
-            <p:nvSpPr>
-              <p:cNvPr id="31" name="TextBox 30">
-                <a:extLst>
-                  <a:ext uri="{FF2B5EF4-FFF2-40B4-BE49-F238E27FC236}">
-                    <a16:creationId xmlns:a16="http://schemas.microsoft.com/office/drawing/2014/main" id="{895DD9D0-6848-B45A-FDE7-837906565DF8}"/>
+                    <a16:creationId xmlns:a16="http://schemas.microsoft.com/office/drawing/2014/main" id="{5A9330D5-0DE8-4343-3414-6D82C71958C8}"/>
                   </a:ext>
                 </a:extLst>
               </p:cNvPr>
@@ -8657,10 +5666,10 @@
         <mc:Fallback>
           <p:sp>
             <p:nvSpPr>
-              <p:cNvPr id="31" name="TextBox 30">
+              <p:cNvPr id="5" name="TextBox 4">
                 <a:extLst>
                   <a:ext uri="{FF2B5EF4-FFF2-40B4-BE49-F238E27FC236}">
-                    <a16:creationId xmlns:a16="http://schemas.microsoft.com/office/drawing/2014/main" id="{895DD9D0-6848-B45A-FDE7-837906565DF8}"/>
+                    <a16:creationId xmlns:a16="http://schemas.microsoft.com/office/drawing/2014/main" id="{5A9330D5-0DE8-4343-3414-6D82C71958C8}"/>
                   </a:ext>
                 </a:extLst>
               </p:cNvPr>
@@ -8678,7 +5687,7 @@
                 <a:avLst/>
               </a:prstGeom>
               <a:blipFill>
-                <a:blip r:embed="rId6"/>
+                <a:blip r:embed="rId2"/>
                 <a:stretch>
                   <a:fillRect l="-2448" t="-7407" b="-29630"/>
                 </a:stretch>
@@ -8703,10 +5712,10 @@
         <mc:Choice xmlns:a14="http://schemas.microsoft.com/office/drawing/2010/main" Requires="a14">
           <p:sp>
             <p:nvSpPr>
-              <p:cNvPr id="32" name="TextBox 31">
+              <p:cNvPr id="6" name="TextBox 5">
                 <a:extLst>
                   <a:ext uri="{FF2B5EF4-FFF2-40B4-BE49-F238E27FC236}">
-                    <a16:creationId xmlns:a16="http://schemas.microsoft.com/office/drawing/2014/main" id="{AF224A73-828E-1676-2BD7-D507A1EB375B}"/>
+                    <a16:creationId xmlns:a16="http://schemas.microsoft.com/office/drawing/2014/main" id="{CA689F51-4DF8-8C26-0D47-FD62BBD60BB4}"/>
                   </a:ext>
                 </a:extLst>
               </p:cNvPr>
@@ -9022,10 +6031,10 @@
         <mc:Fallback>
           <p:sp>
             <p:nvSpPr>
-              <p:cNvPr id="32" name="TextBox 31">
+              <p:cNvPr id="6" name="TextBox 5">
                 <a:extLst>
                   <a:ext uri="{FF2B5EF4-FFF2-40B4-BE49-F238E27FC236}">
-                    <a16:creationId xmlns:a16="http://schemas.microsoft.com/office/drawing/2014/main" id="{AF224A73-828E-1676-2BD7-D507A1EB375B}"/>
+                    <a16:creationId xmlns:a16="http://schemas.microsoft.com/office/drawing/2014/main" id="{CA689F51-4DF8-8C26-0D47-FD62BBD60BB4}"/>
                   </a:ext>
                 </a:extLst>
               </p:cNvPr>
@@ -9043,7 +6052,7 @@
                 <a:avLst/>
               </a:prstGeom>
               <a:blipFill>
-                <a:blip r:embed="rId7"/>
+                <a:blip r:embed="rId3"/>
                 <a:stretch>
                   <a:fillRect l="-2624" b="-12963"/>
                 </a:stretch>
@@ -9068,10 +6077,10 @@
         <mc:Choice xmlns:a14="http://schemas.microsoft.com/office/drawing/2010/main" Requires="a14">
           <p:sp>
             <p:nvSpPr>
-              <p:cNvPr id="33" name="TextBox 32">
+              <p:cNvPr id="7" name="TextBox 6">
                 <a:extLst>
                   <a:ext uri="{FF2B5EF4-FFF2-40B4-BE49-F238E27FC236}">
-                    <a16:creationId xmlns:a16="http://schemas.microsoft.com/office/drawing/2014/main" id="{D77810DC-E14B-1C7F-FE50-ECE54A06A0CA}"/>
+                    <a16:creationId xmlns:a16="http://schemas.microsoft.com/office/drawing/2014/main" id="{EC7622FD-70A8-2C8C-D4F1-61CFB7F3A6F2}"/>
                   </a:ext>
                 </a:extLst>
               </p:cNvPr>
@@ -9240,10 +6249,10 @@
         <mc:Fallback>
           <p:sp>
             <p:nvSpPr>
-              <p:cNvPr id="33" name="TextBox 32">
+              <p:cNvPr id="7" name="TextBox 6">
                 <a:extLst>
                   <a:ext uri="{FF2B5EF4-FFF2-40B4-BE49-F238E27FC236}">
-                    <a16:creationId xmlns:a16="http://schemas.microsoft.com/office/drawing/2014/main" id="{D77810DC-E14B-1C7F-FE50-ECE54A06A0CA}"/>
+                    <a16:creationId xmlns:a16="http://schemas.microsoft.com/office/drawing/2014/main" id="{EC7622FD-70A8-2C8C-D4F1-61CFB7F3A6F2}"/>
                   </a:ext>
                 </a:extLst>
               </p:cNvPr>
@@ -9261,7 +6270,7 @@
                 <a:avLst/>
               </a:prstGeom>
               <a:blipFill>
-                <a:blip r:embed="rId8"/>
+                <a:blip r:embed="rId4"/>
                 <a:stretch>
                   <a:fillRect l="-3500" t="-3922" r="-1500" b="-15686"/>
                 </a:stretch>
@@ -9284,10 +6293,10 @@
       </mc:AlternateContent>
       <p:sp>
         <p:nvSpPr>
-          <p:cNvPr id="36" name="Left Brace 35">
-            <a:extLst>
-              <a:ext uri="{FF2B5EF4-FFF2-40B4-BE49-F238E27FC236}">
-                <a16:creationId xmlns:a16="http://schemas.microsoft.com/office/drawing/2014/main" id="{E8D2D063-3667-CDAD-8748-7861E96EF1B8}"/>
+          <p:cNvPr id="8" name="Left Brace 7">
+            <a:extLst>
+              <a:ext uri="{FF2B5EF4-FFF2-40B4-BE49-F238E27FC236}">
+                <a16:creationId xmlns:a16="http://schemas.microsoft.com/office/drawing/2014/main" id="{3A9DC3AF-400D-0BBE-9DED-35A3DF52FA61}"/>
               </a:ext>
             </a:extLst>
           </p:cNvPr>
@@ -9329,10 +6338,10 @@
       </p:sp>
       <p:sp>
         <p:nvSpPr>
-          <p:cNvPr id="41" name="Arrow: Down 43">
-            <a:extLst>
-              <a:ext uri="{FF2B5EF4-FFF2-40B4-BE49-F238E27FC236}">
-                <a16:creationId xmlns:a16="http://schemas.microsoft.com/office/drawing/2014/main" id="{6F3BA50C-CA10-C853-F387-7E791137A2BA}"/>
+          <p:cNvPr id="9" name="Arrow: Down 43">
+            <a:extLst>
+              <a:ext uri="{FF2B5EF4-FFF2-40B4-BE49-F238E27FC236}">
+                <a16:creationId xmlns:a16="http://schemas.microsoft.com/office/drawing/2014/main" id="{ED7A7F36-BA71-15B7-67DA-B493F95F6B4E}"/>
               </a:ext>
             </a:extLst>
           </p:cNvPr>
@@ -9383,10 +6392,10 @@
         <mc:Choice xmlns:a14="http://schemas.microsoft.com/office/drawing/2010/main" Requires="a14">
           <p:sp>
             <p:nvSpPr>
-              <p:cNvPr id="42" name="TextBox 41">
+              <p:cNvPr id="10" name="TextBox 9">
                 <a:extLst>
                   <a:ext uri="{FF2B5EF4-FFF2-40B4-BE49-F238E27FC236}">
-                    <a16:creationId xmlns:a16="http://schemas.microsoft.com/office/drawing/2014/main" id="{407E8433-BB65-08E6-F757-D8C20C273271}"/>
+                    <a16:creationId xmlns:a16="http://schemas.microsoft.com/office/drawing/2014/main" id="{2ACCD326-C12A-024D-2EC3-5568BC9D8A62}"/>
                   </a:ext>
                 </a:extLst>
               </p:cNvPr>
@@ -9581,10 +6590,10 @@
         <mc:Fallback>
           <p:sp>
             <p:nvSpPr>
-              <p:cNvPr id="42" name="TextBox 41">
+              <p:cNvPr id="10" name="TextBox 9">
                 <a:extLst>
                   <a:ext uri="{FF2B5EF4-FFF2-40B4-BE49-F238E27FC236}">
-                    <a16:creationId xmlns:a16="http://schemas.microsoft.com/office/drawing/2014/main" id="{407E8433-BB65-08E6-F757-D8C20C273271}"/>
+                    <a16:creationId xmlns:a16="http://schemas.microsoft.com/office/drawing/2014/main" id="{2ACCD326-C12A-024D-2EC3-5568BC9D8A62}"/>
                   </a:ext>
                 </a:extLst>
               </p:cNvPr>
@@ -9602,7 +6611,7 @@
                 <a:avLst/>
               </a:prstGeom>
               <a:blipFill>
-                <a:blip r:embed="rId9"/>
+                <a:blip r:embed="rId5"/>
                 <a:stretch>
                   <a:fillRect l="-1145" t="-7407" r="-1908" b="-29630"/>
                 </a:stretch>
@@ -9623,10 +6632,217 @@
           </p:sp>
         </mc:Fallback>
       </mc:AlternateContent>
+      <p:sp>
+        <p:nvSpPr>
+          <p:cNvPr id="11" name="Content Placeholder 2">
+            <a:extLst>
+              <a:ext uri="{FF2B5EF4-FFF2-40B4-BE49-F238E27FC236}">
+                <a16:creationId xmlns:a16="http://schemas.microsoft.com/office/drawing/2014/main" id="{0B595D82-94F9-AE28-3B85-8F83E0990B5C}"/>
+              </a:ext>
+            </a:extLst>
+          </p:cNvPr>
+          <p:cNvSpPr txBox="1">
+            <a:spLocks/>
+          </p:cNvSpPr>
+          <p:nvPr/>
+        </p:nvSpPr>
+        <p:spPr>
+          <a:xfrm>
+            <a:off x="838200" y="1825625"/>
+            <a:ext cx="10515600" cy="489569"/>
+          </a:xfrm>
+          <a:prstGeom prst="rect">
+            <a:avLst/>
+          </a:prstGeom>
+        </p:spPr>
+        <p:txBody>
+          <a:bodyPr vert="horz" lIns="91440" tIns="45720" rIns="91440" bIns="45720" rtlCol="0">
+            <a:normAutofit/>
+          </a:bodyPr>
+          <a:lstStyle>
+            <a:lvl1pPr marL="228600" indent="-228600" algn="l" defTabSz="914400" rtl="0" eaLnBrk="1" latinLnBrk="0" hangingPunct="1">
+              <a:lnSpc>
+                <a:spcPct val="90000"/>
+              </a:lnSpc>
+              <a:spcBef>
+                <a:spcPts val="1000"/>
+              </a:spcBef>
+              <a:buFont typeface="Arial" panose="020B0604020202020204" pitchFamily="34" charset="0"/>
+              <a:buChar char="•"/>
+              <a:defRPr sz="2800" kern="1200">
+                <a:solidFill>
+                  <a:schemeClr val="tx1"/>
+                </a:solidFill>
+                <a:latin typeface="+mn-lt"/>
+                <a:ea typeface="+mn-ea"/>
+                <a:cs typeface="+mn-cs"/>
+              </a:defRPr>
+            </a:lvl1pPr>
+            <a:lvl2pPr marL="685800" indent="-228600" algn="l" defTabSz="914400" rtl="0" eaLnBrk="1" latinLnBrk="0" hangingPunct="1">
+              <a:lnSpc>
+                <a:spcPct val="90000"/>
+              </a:lnSpc>
+              <a:spcBef>
+                <a:spcPts val="500"/>
+              </a:spcBef>
+              <a:buFont typeface="Arial" panose="020B0604020202020204" pitchFamily="34" charset="0"/>
+              <a:buChar char="•"/>
+              <a:defRPr sz="2400" kern="1200">
+                <a:solidFill>
+                  <a:schemeClr val="tx1"/>
+                </a:solidFill>
+                <a:latin typeface="+mn-lt"/>
+                <a:ea typeface="+mn-ea"/>
+                <a:cs typeface="+mn-cs"/>
+              </a:defRPr>
+            </a:lvl2pPr>
+            <a:lvl3pPr marL="1143000" indent="-228600" algn="l" defTabSz="914400" rtl="0" eaLnBrk="1" latinLnBrk="0" hangingPunct="1">
+              <a:lnSpc>
+                <a:spcPct val="90000"/>
+              </a:lnSpc>
+              <a:spcBef>
+                <a:spcPts val="500"/>
+              </a:spcBef>
+              <a:buFont typeface="Arial" panose="020B0604020202020204" pitchFamily="34" charset="0"/>
+              <a:buChar char="•"/>
+              <a:defRPr sz="2000" kern="1200">
+                <a:solidFill>
+                  <a:schemeClr val="tx1"/>
+                </a:solidFill>
+                <a:latin typeface="+mn-lt"/>
+                <a:ea typeface="+mn-ea"/>
+                <a:cs typeface="+mn-cs"/>
+              </a:defRPr>
+            </a:lvl3pPr>
+            <a:lvl4pPr marL="1600200" indent="-228600" algn="l" defTabSz="914400" rtl="0" eaLnBrk="1" latinLnBrk="0" hangingPunct="1">
+              <a:lnSpc>
+                <a:spcPct val="90000"/>
+              </a:lnSpc>
+              <a:spcBef>
+                <a:spcPts val="500"/>
+              </a:spcBef>
+              <a:buFont typeface="Arial" panose="020B0604020202020204" pitchFamily="34" charset="0"/>
+              <a:buChar char="•"/>
+              <a:defRPr sz="1800" kern="1200">
+                <a:solidFill>
+                  <a:schemeClr val="tx1"/>
+                </a:solidFill>
+                <a:latin typeface="+mn-lt"/>
+                <a:ea typeface="+mn-ea"/>
+                <a:cs typeface="+mn-cs"/>
+              </a:defRPr>
+            </a:lvl4pPr>
+            <a:lvl5pPr marL="2057400" indent="-228600" algn="l" defTabSz="914400" rtl="0" eaLnBrk="1" latinLnBrk="0" hangingPunct="1">
+              <a:lnSpc>
+                <a:spcPct val="90000"/>
+              </a:lnSpc>
+              <a:spcBef>
+                <a:spcPts val="500"/>
+              </a:spcBef>
+              <a:buFont typeface="Arial" panose="020B0604020202020204" pitchFamily="34" charset="0"/>
+              <a:buChar char="•"/>
+              <a:defRPr sz="1800" kern="1200">
+                <a:solidFill>
+                  <a:schemeClr val="tx1"/>
+                </a:solidFill>
+                <a:latin typeface="+mn-lt"/>
+                <a:ea typeface="+mn-ea"/>
+                <a:cs typeface="+mn-cs"/>
+              </a:defRPr>
+            </a:lvl5pPr>
+            <a:lvl6pPr marL="2514600" indent="-228600" algn="l" defTabSz="914400" rtl="0" eaLnBrk="1" latinLnBrk="0" hangingPunct="1">
+              <a:lnSpc>
+                <a:spcPct val="90000"/>
+              </a:lnSpc>
+              <a:spcBef>
+                <a:spcPts val="500"/>
+              </a:spcBef>
+              <a:buFont typeface="Arial" panose="020B0604020202020204" pitchFamily="34" charset="0"/>
+              <a:buChar char="•"/>
+              <a:defRPr sz="1800" kern="1200">
+                <a:solidFill>
+                  <a:schemeClr val="tx1"/>
+                </a:solidFill>
+                <a:latin typeface="+mn-lt"/>
+                <a:ea typeface="+mn-ea"/>
+                <a:cs typeface="+mn-cs"/>
+              </a:defRPr>
+            </a:lvl6pPr>
+            <a:lvl7pPr marL="2971800" indent="-228600" algn="l" defTabSz="914400" rtl="0" eaLnBrk="1" latinLnBrk="0" hangingPunct="1">
+              <a:lnSpc>
+                <a:spcPct val="90000"/>
+              </a:lnSpc>
+              <a:spcBef>
+                <a:spcPts val="500"/>
+              </a:spcBef>
+              <a:buFont typeface="Arial" panose="020B0604020202020204" pitchFamily="34" charset="0"/>
+              <a:buChar char="•"/>
+              <a:defRPr sz="1800" kern="1200">
+                <a:solidFill>
+                  <a:schemeClr val="tx1"/>
+                </a:solidFill>
+                <a:latin typeface="+mn-lt"/>
+                <a:ea typeface="+mn-ea"/>
+                <a:cs typeface="+mn-cs"/>
+              </a:defRPr>
+            </a:lvl7pPr>
+            <a:lvl8pPr marL="3429000" indent="-228600" algn="l" defTabSz="914400" rtl="0" eaLnBrk="1" latinLnBrk="0" hangingPunct="1">
+              <a:lnSpc>
+                <a:spcPct val="90000"/>
+              </a:lnSpc>
+              <a:spcBef>
+                <a:spcPts val="500"/>
+              </a:spcBef>
+              <a:buFont typeface="Arial" panose="020B0604020202020204" pitchFamily="34" charset="0"/>
+              <a:buChar char="•"/>
+              <a:defRPr sz="1800" kern="1200">
+                <a:solidFill>
+                  <a:schemeClr val="tx1"/>
+                </a:solidFill>
+                <a:latin typeface="+mn-lt"/>
+                <a:ea typeface="+mn-ea"/>
+                <a:cs typeface="+mn-cs"/>
+              </a:defRPr>
+            </a:lvl8pPr>
+            <a:lvl9pPr marL="3886200" indent="-228600" algn="l" defTabSz="914400" rtl="0" eaLnBrk="1" latinLnBrk="0" hangingPunct="1">
+              <a:lnSpc>
+                <a:spcPct val="90000"/>
+              </a:lnSpc>
+              <a:spcBef>
+                <a:spcPts val="500"/>
+              </a:spcBef>
+              <a:buFont typeface="Arial" panose="020B0604020202020204" pitchFamily="34" charset="0"/>
+              <a:buChar char="•"/>
+              <a:defRPr sz="1800" kern="1200">
+                <a:solidFill>
+                  <a:schemeClr val="tx1"/>
+                </a:solidFill>
+                <a:latin typeface="+mn-lt"/>
+                <a:ea typeface="+mn-ea"/>
+                <a:cs typeface="+mn-cs"/>
+              </a:defRPr>
+            </a:lvl9pPr>
+          </a:lstStyle>
+          <a:p>
+            <a:pPr marL="285750" indent="-285750"/>
+            <a:r>
+              <a:rPr lang="en-US" altLang="zh-CN" b="1">
+                <a:latin typeface="Arial" panose="020B0604020202020204" pitchFamily="34" charset="0"/>
+                <a:cs typeface="Arial" panose="020B0604020202020204" pitchFamily="34" charset="0"/>
+              </a:rPr>
+              <a:t>Migliavacca et al, 2011</a:t>
+            </a:r>
+            <a:endParaRPr lang="zh-CN" altLang="en-US" b="1" dirty="0">
+              <a:latin typeface="Arial" panose="020B0604020202020204" pitchFamily="34" charset="0"/>
+              <a:cs typeface="Arial" panose="020B0604020202020204" pitchFamily="34" charset="0"/>
+            </a:endParaRPr>
+          </a:p>
+        </p:txBody>
+      </p:sp>
     </p:spTree>
     <p:extLst>
       <p:ext uri="{BB962C8B-B14F-4D97-AF65-F5344CB8AC3E}">
-        <p14:creationId xmlns:p14="http://schemas.microsoft.com/office/powerpoint/2010/main" val="2103210030"/>
+        <p14:creationId xmlns:p14="http://schemas.microsoft.com/office/powerpoint/2010/main" val="550431981"/>
       </p:ext>
     </p:extLst>
   </p:cSld>
@@ -9636,7 +6852,7 @@
 </p:sld>
 </file>
 
-<file path=ppt/slides/slide5.xml><?xml version="1.0" encoding="utf-8"?>
+<file path=ppt/slides/slide4.xml><?xml version="1.0" encoding="utf-8"?>
 <p:sld xmlns:a="http://schemas.openxmlformats.org/drawingml/2006/main" xmlns:r="http://schemas.openxmlformats.org/officeDocument/2006/relationships" xmlns:p="http://schemas.openxmlformats.org/presentationml/2006/main">
   <p:cSld>
     <p:spTree>
@@ -9824,7 +7040,7 @@
           <a:p>
             <a:fld id="{F02AFB4B-EED2-CD4B-9AB0-9DB25B714611}" type="slidenum">
               <a:rPr lang="en-US" smtClean="0"/>
-              <a:t>5</a:t>
+              <a:t>4</a:t>
             </a:fld>
             <a:endParaRPr lang="en-US"/>
           </a:p>
@@ -9953,8 +7169,8 @@
             </p:nvSpPr>
             <p:spPr>
               <a:xfrm>
-                <a:off x="1717449" y="2695680"/>
-                <a:ext cx="3315203" cy="330411"/>
+                <a:off x="1515659" y="2695680"/>
+                <a:ext cx="4012380" cy="330411"/>
               </a:xfrm>
               <a:prstGeom prst="rect">
                 <a:avLst/>
@@ -10039,14 +7255,19 @@
                         <a:rPr lang="en-US" sz="2000" b="0" i="1" smtClean="0">
                           <a:latin typeface="Cambria Math" panose="02040503050406030204" pitchFamily="18" charset="0"/>
                         </a:rPr>
-                        <m:t> </m:t>
+                        <m:t>(</m:t>
                       </m:r>
                       <m:r>
                         <a:rPr lang="en-US" sz="2000" b="0" i="1" smtClean="0">
                           <a:latin typeface="Cambria Math" panose="02040503050406030204" pitchFamily="18" charset="0"/>
-                          <a:ea typeface="Cambria Math" panose="02040503050406030204" pitchFamily="18" charset="0"/>
                         </a:rPr>
-                        <m:t>× </m:t>
+                        <m:t>𝐺𝑃𝑃</m:t>
+                      </m:r>
+                      <m:r>
+                        <a:rPr lang="en-US" sz="2000" b="0" i="1" smtClean="0">
+                          <a:latin typeface="Cambria Math" panose="02040503050406030204" pitchFamily="18" charset="0"/>
+                        </a:rPr>
+                        <m:t>) × </m:t>
                       </m:r>
                       <m:r>
                         <a:rPr lang="en-US" sz="2000" b="0" i="1" smtClean="0">
@@ -10153,8 +7374,8 @@
             </p:nvSpPr>
             <p:spPr>
               <a:xfrm>
-                <a:off x="1717449" y="2695680"/>
-                <a:ext cx="3315203" cy="330411"/>
+                <a:off x="1515659" y="2695680"/>
+                <a:ext cx="4012380" cy="330411"/>
               </a:xfrm>
               <a:prstGeom prst="rect">
                 <a:avLst/>
@@ -10162,7 +7383,7 @@
               <a:blipFill>
                 <a:blip r:embed="rId3"/>
                 <a:stretch>
-                  <a:fillRect l="-1145" t="-7407" r="-1908" b="-29630"/>
+                  <a:fillRect l="-946" t="-7407" r="-1577" b="-29630"/>
                 </a:stretch>
               </a:blipFill>
             </p:spPr>
@@ -10198,7 +7419,7 @@
             <p:spPr>
               <a:xfrm>
                 <a:off x="1566696" y="3845980"/>
-                <a:ext cx="3628942" cy="330411"/>
+                <a:ext cx="4326121" cy="330411"/>
               </a:xfrm>
               <a:prstGeom prst="rect">
                 <a:avLst/>
@@ -10250,7 +7471,19 @@
                         <a:rPr lang="en-US" sz="2000" b="0" i="1" smtClean="0">
                           <a:latin typeface="Cambria Math" panose="02040503050406030204" pitchFamily="18" charset="0"/>
                         </a:rPr>
-                        <m:t>=</m:t>
+                        <m:t>(</m:t>
+                      </m:r>
+                      <m:r>
+                        <a:rPr lang="en-US" sz="2000" b="0" i="1" smtClean="0">
+                          <a:latin typeface="Cambria Math" panose="02040503050406030204" pitchFamily="18" charset="0"/>
+                        </a:rPr>
+                        <m:t>𝐺𝑃𝑃</m:t>
+                      </m:r>
+                      <m:r>
+                        <a:rPr lang="en-US" sz="2000" b="0" i="1" smtClean="0">
+                          <a:latin typeface="Cambria Math" panose="02040503050406030204" pitchFamily="18" charset="0"/>
+                        </a:rPr>
+                        <m:t>)=</m:t>
                       </m:r>
                       <m:sSub>
                         <m:sSubPr>
@@ -10416,7 +7649,7 @@
             <p:spPr>
               <a:xfrm>
                 <a:off x="1566696" y="3845980"/>
-                <a:ext cx="3628942" cy="330411"/>
+                <a:ext cx="4326121" cy="330411"/>
               </a:xfrm>
               <a:prstGeom prst="rect">
                 <a:avLst/>
@@ -10424,7 +7657,7 @@
               <a:blipFill>
                 <a:blip r:embed="rId4"/>
                 <a:stretch>
-                  <a:fillRect l="-2448" t="-7407" b="-29630"/>
+                  <a:fillRect l="-2047" t="-7407" b="-29630"/>
                 </a:stretch>
               </a:blipFill>
             </p:spPr>
@@ -11087,8 +8320,8 @@
             </p:nvSpPr>
             <p:spPr>
               <a:xfrm>
-                <a:off x="7273714" y="2667454"/>
-                <a:ext cx="3535135" cy="330411"/>
+                <a:off x="7011989" y="2698337"/>
+                <a:ext cx="4232312" cy="330411"/>
               </a:xfrm>
               <a:prstGeom prst="rect">
                 <a:avLst/>
@@ -11173,14 +8406,19 @@
                         <a:rPr lang="en-US" sz="2000" b="0" i="1" smtClean="0">
                           <a:latin typeface="Cambria Math" panose="02040503050406030204" pitchFamily="18" charset="0"/>
                         </a:rPr>
-                        <m:t> </m:t>
+                        <m:t>(</m:t>
                       </m:r>
                       <m:r>
                         <a:rPr lang="en-US" sz="2000" b="0" i="1" smtClean="0">
                           <a:latin typeface="Cambria Math" panose="02040503050406030204" pitchFamily="18" charset="0"/>
-                          <a:ea typeface="Cambria Math" panose="02040503050406030204" pitchFamily="18" charset="0"/>
                         </a:rPr>
-                        <m:t>× </m:t>
+                        <m:t>𝐺𝑃𝑃</m:t>
+                      </m:r>
+                      <m:r>
+                        <a:rPr lang="en-US" sz="2000" b="0" i="1" smtClean="0">
+                          <a:latin typeface="Cambria Math" panose="02040503050406030204" pitchFamily="18" charset="0"/>
+                        </a:rPr>
+                        <m:t>) × </m:t>
                       </m:r>
                       <m:r>
                         <a:rPr lang="en-US" sz="2000" b="0" i="1" smtClean="0">
@@ -11287,8 +8525,8 @@
             </p:nvSpPr>
             <p:spPr>
               <a:xfrm>
-                <a:off x="7273714" y="2667454"/>
-                <a:ext cx="3535135" cy="330411"/>
+                <a:off x="7011989" y="2698337"/>
+                <a:ext cx="4232312" cy="330411"/>
               </a:xfrm>
               <a:prstGeom prst="rect">
                 <a:avLst/>
@@ -11296,7 +8534,7 @@
               <a:blipFill>
                 <a:blip r:embed="rId7"/>
                 <a:stretch>
-                  <a:fillRect l="-1071" t="-7407" r="-1786" b="-29630"/>
+                  <a:fillRect l="-898" t="-7407" r="-1497" b="-29630"/>
                 </a:stretch>
               </a:blipFill>
             </p:spPr>
@@ -11494,7 +8732,7 @@
         </p:nvSpPr>
         <p:spPr>
           <a:xfrm>
-            <a:off x="9969438" y="2502054"/>
+            <a:off x="10383429" y="2528412"/>
             <a:ext cx="827982" cy="664946"/>
           </a:xfrm>
           <a:prstGeom prst="roundRect">
@@ -11589,8 +8827,8 @@
         </p:nvCxnSpPr>
         <p:spPr>
           <a:xfrm rot="5400000" flipH="1" flipV="1">
-            <a:off x="9207661" y="3000624"/>
-            <a:ext cx="1009391" cy="1342145"/>
+            <a:off x="9427836" y="2806807"/>
+            <a:ext cx="983033" cy="1756136"/>
           </a:xfrm>
           <a:prstGeom prst="curvedConnector3">
             <a:avLst>
@@ -11633,7 +8871,7 @@
 </p:sld>
 </file>
 
-<file path=ppt/slides/slide6.xml><?xml version="1.0" encoding="utf-8"?>
+<file path=ppt/slides/slide5.xml><?xml version="1.0" encoding="utf-8"?>
 <p:sld xmlns:a="http://schemas.openxmlformats.org/drawingml/2006/main" xmlns:r="http://schemas.openxmlformats.org/officeDocument/2006/relationships" xmlns:p="http://schemas.openxmlformats.org/presentationml/2006/main">
   <p:cSld>
     <p:spTree>
@@ -11707,7 +8945,7 @@
           <a:p>
             <a:fld id="{F02AFB4B-EED2-CD4B-9AB0-9DB25B714611}" type="slidenum">
               <a:rPr lang="en-US" smtClean="0"/>
-              <a:t>6</a:t>
+              <a:t>5</a:t>
             </a:fld>
             <a:endParaRPr lang="en-US"/>
           </a:p>
@@ -11771,7 +9009,7 @@
 </p:sld>
 </file>
 
-<file path=ppt/slides/slide7.xml><?xml version="1.0" encoding="utf-8"?>
+<file path=ppt/slides/slide6.xml><?xml version="1.0" encoding="utf-8"?>
 <p:sld xmlns:a="http://schemas.openxmlformats.org/drawingml/2006/main" xmlns:r="http://schemas.openxmlformats.org/officeDocument/2006/relationships" xmlns:p="http://schemas.openxmlformats.org/presentationml/2006/main">
   <p:cSld>
     <p:spTree>
@@ -11845,7 +9083,7 @@
           <a:p>
             <a:fld id="{F02AFB4B-EED2-CD4B-9AB0-9DB25B714611}" type="slidenum">
               <a:rPr lang="en-US" smtClean="0"/>
-              <a:t>7</a:t>
+              <a:t>6</a:t>
             </a:fld>
             <a:endParaRPr lang="en-US"/>
           </a:p>
@@ -11931,7 +9169,7 @@
             </a:pPr>
             <a:r>
               <a:rPr lang="en-US" dirty="0"/>
-              <a:t>Non-interpretable composition</a:t>
+              <a:t>Non-interpretable weights</a:t>
             </a:r>
           </a:p>
           <a:p>
@@ -11991,7 +9229,7 @@
                   <a:srgbClr val="FF0000"/>
                 </a:solidFill>
               </a:rPr>
-              <a:t>Interpretable composition (network topologies correspond to symbolic formulae)</a:t>
+              <a:t>Interpretable formulae (network topologies correspond to symbols)</a:t>
             </a:r>
           </a:p>
         </p:txBody>
@@ -12043,6 +9281,61 @@
           </a:extLst>
         </p:spPr>
       </p:pic>
+      <p:sp>
+        <p:nvSpPr>
+          <p:cNvPr id="3" name="Rounded Rectangle 2">
+            <a:extLst>
+              <a:ext uri="{FF2B5EF4-FFF2-40B4-BE49-F238E27FC236}">
+                <a16:creationId xmlns:a16="http://schemas.microsoft.com/office/drawing/2014/main" id="{C82EABF9-473A-5FC9-9B3B-0A2E0B5B2358}"/>
+              </a:ext>
+            </a:extLst>
+          </p:cNvPr>
+          <p:cNvSpPr/>
+          <p:nvPr/>
+        </p:nvSpPr>
+        <p:spPr>
+          <a:xfrm>
+            <a:off x="7687340" y="1690687"/>
+            <a:ext cx="3742660" cy="999349"/>
+          </a:xfrm>
+          <a:prstGeom prst="roundRect">
+            <a:avLst>
+              <a:gd name="adj" fmla="val 5500"/>
+            </a:avLst>
+          </a:prstGeom>
+          <a:noFill/>
+          <a:ln w="28575">
+            <a:solidFill>
+              <a:srgbClr val="FF0000"/>
+            </a:solidFill>
+            <a:prstDash val="dash"/>
+          </a:ln>
+        </p:spPr>
+        <p:style>
+          <a:lnRef idx="2">
+            <a:schemeClr val="accent1">
+              <a:shade val="15000"/>
+            </a:schemeClr>
+          </a:lnRef>
+          <a:fillRef idx="1">
+            <a:schemeClr val="accent1"/>
+          </a:fillRef>
+          <a:effectRef idx="0">
+            <a:schemeClr val="accent1"/>
+          </a:effectRef>
+          <a:fontRef idx="minor">
+            <a:schemeClr val="lt1"/>
+          </a:fontRef>
+        </p:style>
+        <p:txBody>
+          <a:bodyPr rtlCol="0" anchor="ctr"/>
+          <a:lstStyle/>
+          <a:p>
+            <a:pPr algn="ctr"/>
+            <a:endParaRPr lang="en-US"/>
+          </a:p>
+        </p:txBody>
+      </p:sp>
     </p:spTree>
     <p:extLst>
       <p:ext uri="{BB962C8B-B14F-4D97-AF65-F5344CB8AC3E}">
@@ -12056,7 +9349,7 @@
 </p:sld>
 </file>
 
-<file path=ppt/slides/slide8.xml><?xml version="1.0" encoding="utf-8"?>
+<file path=ppt/slides/slide7.xml><?xml version="1.0" encoding="utf-8"?>
 <p:sld xmlns:a="http://schemas.openxmlformats.org/drawingml/2006/main" xmlns:r="http://schemas.openxmlformats.org/officeDocument/2006/relationships" xmlns:p="http://schemas.openxmlformats.org/presentationml/2006/main">
   <p:cSld>
     <p:spTree>
@@ -12130,7 +9423,7 @@
           <a:p>
             <a:fld id="{F02AFB4B-EED2-CD4B-9AB0-9DB25B714611}" type="slidenum">
               <a:rPr lang="en-US" smtClean="0"/>
-              <a:t>8</a:t>
+              <a:t>7</a:t>
             </a:fld>
             <a:endParaRPr lang="en-US"/>
           </a:p>
@@ -12447,8 +9740,8 @@
         </p:blipFill>
         <p:spPr>
           <a:xfrm>
-            <a:off x="6451600" y="1246086"/>
-            <a:ext cx="4902200" cy="4127500"/>
+            <a:off x="6451600" y="1575430"/>
+            <a:ext cx="4511040" cy="3798155"/>
           </a:xfrm>
           <a:prstGeom prst="rect">
             <a:avLst/>
@@ -12505,7 +9798,7 @@
         </p:nvSpPr>
         <p:spPr>
           <a:xfrm>
-            <a:off x="8185123" y="5320819"/>
+            <a:off x="8035572" y="5332064"/>
             <a:ext cx="635110" cy="400110"/>
           </a:xfrm>
           <a:prstGeom prst="rect">
@@ -12541,7 +9834,7 @@
         </p:nvSpPr>
         <p:spPr>
           <a:xfrm>
-            <a:off x="9568834" y="5320819"/>
+            <a:off x="9302290" y="5332064"/>
             <a:ext cx="320921" cy="400110"/>
           </a:xfrm>
           <a:prstGeom prst="rect">
@@ -12577,7 +9870,7 @@
         </p:nvSpPr>
         <p:spPr>
           <a:xfrm>
-            <a:off x="10638356" y="5320819"/>
+            <a:off x="10306490" y="5331517"/>
             <a:ext cx="620684" cy="400110"/>
           </a:xfrm>
           <a:prstGeom prst="rect">
@@ -12615,8 +9908,8 @@
             </p:nvSpPr>
             <p:spPr>
               <a:xfrm>
-                <a:off x="8512316" y="788115"/>
-                <a:ext cx="1255472" cy="400110"/>
+                <a:off x="8193011" y="1178053"/>
+                <a:ext cx="1430200" cy="400110"/>
               </a:xfrm>
               <a:prstGeom prst="rect">
                 <a:avLst/>
@@ -12669,7 +9962,7 @@
                             <a:rPr lang="en-US" sz="2000" b="1" i="0" smtClean="0">
                               <a:latin typeface="Cambria Math" panose="02040503050406030204" pitchFamily="18" charset="0"/>
                             </a:rPr>
-                            <m:t>GPP</m:t>
+                            <m:t>RECO</m:t>
                           </m:r>
                           <m:r>
                             <m:rPr>
@@ -12707,8 +10000,8 @@
             </p:nvSpPr>
             <p:spPr>
               <a:xfrm>
-                <a:off x="8512316" y="788115"/>
-                <a:ext cx="1255472" cy="400110"/>
+                <a:off x="8193011" y="1178053"/>
+                <a:ext cx="1430200" cy="400110"/>
               </a:xfrm>
               <a:prstGeom prst="rect">
                 <a:avLst/>
@@ -12716,7 +10009,7 @@
               <a:blipFill>
                 <a:blip r:embed="rId4"/>
                 <a:stretch>
-                  <a:fillRect l="-2020" b="-15152"/>
+                  <a:fillRect l="-1770" b="-15152"/>
                 </a:stretch>
               </a:blipFill>
             </p:spPr>
@@ -13014,8 +10307,8 @@
         </p:nvSpPr>
         <p:spPr>
           <a:xfrm>
-            <a:off x="10224365" y="4081337"/>
-            <a:ext cx="1301328" cy="1639592"/>
+            <a:off x="9850488" y="4090573"/>
+            <a:ext cx="1228672" cy="1639592"/>
           </a:xfrm>
           <a:prstGeom prst="roundRect">
             <a:avLst>
@@ -13069,8 +10362,8 @@
         </p:nvSpPr>
         <p:spPr>
           <a:xfrm>
-            <a:off x="10653824" y="2466158"/>
-            <a:ext cx="1399951" cy="1015663"/>
+            <a:off x="10306490" y="2475082"/>
+            <a:ext cx="1399951" cy="1323439"/>
           </a:xfrm>
           <a:prstGeom prst="rect">
             <a:avLst/>
@@ -13086,7 +10379,7 @@
             <a:pPr algn="ctr"/>
             <a:r>
               <a:rPr lang="en-US" sz="2000" i="1" dirty="0"/>
-              <a:t>Positive </a:t>
+              <a:t>Physically valid </a:t>
             </a:r>
           </a:p>
           <a:p>
@@ -13116,8 +10409,8 @@
         </p:nvCxnSpPr>
         <p:spPr>
           <a:xfrm rot="5400000">
-            <a:off x="10814657" y="3542194"/>
-            <a:ext cx="599516" cy="478771"/>
+            <a:off x="10589619" y="3673726"/>
+            <a:ext cx="292052" cy="541642"/>
           </a:xfrm>
           <a:prstGeom prst="curvedConnector3">
             <a:avLst>
@@ -13161,8 +10454,8 @@
         </p:nvSpPr>
         <p:spPr>
           <a:xfrm>
-            <a:off x="9234223" y="4824833"/>
-            <a:ext cx="938739" cy="896096"/>
+            <a:off x="9122753" y="4835531"/>
+            <a:ext cx="620684" cy="896096"/>
           </a:xfrm>
           <a:prstGeom prst="roundRect">
             <a:avLst>
@@ -13256,8 +10549,8 @@
         </p:nvCxnSpPr>
         <p:spPr>
           <a:xfrm flipV="1">
-            <a:off x="8193011" y="5720929"/>
-            <a:ext cx="1510582" cy="432510"/>
+            <a:off x="8193011" y="5731627"/>
+            <a:ext cx="1240084" cy="421812"/>
           </a:xfrm>
           <a:prstGeom prst="curvedConnector2">
             <a:avLst/>
@@ -13299,7 +10592,7 @@
         </p:nvSpPr>
         <p:spPr>
           <a:xfrm>
-            <a:off x="10559064" y="857172"/>
+            <a:off x="10262664" y="1149519"/>
             <a:ext cx="1399951" cy="1015663"/>
           </a:xfrm>
           <a:prstGeom prst="rect">
@@ -13316,7 +10609,7 @@
             <a:pPr algn="ctr"/>
             <a:r>
               <a:rPr lang="en-US" sz="2000" i="1" dirty="0"/>
-              <a:t>Domain knowledge input</a:t>
+              <a:t>Domain knowledge assistance</a:t>
             </a:r>
           </a:p>
         </p:txBody>
@@ -13339,8 +10632,8 @@
         </p:nvCxnSpPr>
         <p:spPr>
           <a:xfrm rot="10800000">
-            <a:off x="9767788" y="988170"/>
-            <a:ext cx="791276" cy="376834"/>
+            <a:off x="9623212" y="1378109"/>
+            <a:ext cx="639453" cy="279243"/>
           </a:xfrm>
           <a:prstGeom prst="curvedConnector3">
             <a:avLst>
@@ -13384,7 +10677,7 @@
         </p:nvSpPr>
         <p:spPr>
           <a:xfrm>
-            <a:off x="8448121" y="681037"/>
+            <a:off x="8216180" y="1070975"/>
             <a:ext cx="1255472" cy="583000"/>
           </a:xfrm>
           <a:prstGeom prst="roundRect">
@@ -13425,6 +10718,133 @@
           </a:p>
         </p:txBody>
       </p:sp>
+      <p:pic>
+        <p:nvPicPr>
+          <p:cNvPr id="59" name="Picture 58">
+            <a:extLst>
+              <a:ext uri="{FF2B5EF4-FFF2-40B4-BE49-F238E27FC236}">
+                <a16:creationId xmlns:a16="http://schemas.microsoft.com/office/drawing/2014/main" id="{77279DE9-48B2-3A7A-7109-85EECBCB9063}"/>
+              </a:ext>
+            </a:extLst>
+          </p:cNvPr>
+          <p:cNvPicPr>
+            <a:picLocks noChangeAspect="1"/>
+          </p:cNvPicPr>
+          <p:nvPr/>
+        </p:nvPicPr>
+        <p:blipFill>
+          <a:blip r:embed="rId6"/>
+          <a:stretch>
+            <a:fillRect/>
+          </a:stretch>
+        </p:blipFill>
+        <p:spPr>
+          <a:xfrm>
+            <a:off x="6349903" y="431864"/>
+            <a:ext cx="4988026" cy="400109"/>
+          </a:xfrm>
+          <a:prstGeom prst="rect">
+            <a:avLst/>
+          </a:prstGeom>
+        </p:spPr>
+      </p:pic>
+      <p:cxnSp>
+        <p:nvCxnSpPr>
+          <p:cNvPr id="61" name="Straight Arrow Connector 60">
+            <a:extLst>
+              <a:ext uri="{FF2B5EF4-FFF2-40B4-BE49-F238E27FC236}">
+                <a16:creationId xmlns:a16="http://schemas.microsoft.com/office/drawing/2014/main" id="{B0799E7F-07C6-1143-385E-25CAB714FF3F}"/>
+              </a:ext>
+            </a:extLst>
+          </p:cNvPr>
+          <p:cNvCxnSpPr>
+            <a:stCxn id="44" idx="0"/>
+            <a:endCxn id="59" idx="2"/>
+          </p:cNvCxnSpPr>
+          <p:nvPr/>
+        </p:nvCxnSpPr>
+        <p:spPr>
+          <a:xfrm flipV="1">
+            <a:off x="8843916" y="831973"/>
+            <a:ext cx="0" cy="239002"/>
+          </a:xfrm>
+          <a:prstGeom prst="straightConnector1">
+            <a:avLst/>
+          </a:prstGeom>
+          <a:ln w="19050">
+            <a:tailEnd type="triangle"/>
+          </a:ln>
+        </p:spPr>
+        <p:style>
+          <a:lnRef idx="1">
+            <a:schemeClr val="dk1"/>
+          </a:lnRef>
+          <a:fillRef idx="0">
+            <a:schemeClr val="dk1"/>
+          </a:fillRef>
+          <a:effectRef idx="0">
+            <a:schemeClr val="dk1"/>
+          </a:effectRef>
+          <a:fontRef idx="minor">
+            <a:schemeClr val="tx1"/>
+          </a:fontRef>
+        </p:style>
+      </p:cxnSp>
+      <p:sp>
+        <p:nvSpPr>
+          <p:cNvPr id="63" name="Rounded Rectangle 62">
+            <a:extLst>
+              <a:ext uri="{FF2B5EF4-FFF2-40B4-BE49-F238E27FC236}">
+                <a16:creationId xmlns:a16="http://schemas.microsoft.com/office/drawing/2014/main" id="{E9086D5E-F6DB-8DDA-0E4B-BD41FDF51427}"/>
+              </a:ext>
+            </a:extLst>
+          </p:cNvPr>
+          <p:cNvSpPr/>
+          <p:nvPr/>
+        </p:nvSpPr>
+        <p:spPr>
+          <a:xfrm>
+            <a:off x="6290302" y="340418"/>
+            <a:ext cx="5063497" cy="583000"/>
+          </a:xfrm>
+          <a:prstGeom prst="roundRect">
+            <a:avLst>
+              <a:gd name="adj" fmla="val 5500"/>
+            </a:avLst>
+          </a:prstGeom>
+          <a:noFill/>
+          <a:ln w="28575">
+            <a:solidFill>
+              <a:srgbClr val="FF0000"/>
+            </a:solidFill>
+            <a:prstDash val="dash"/>
+          </a:ln>
+        </p:spPr>
+        <p:style>
+          <a:lnRef idx="2">
+            <a:schemeClr val="accent1">
+              <a:shade val="15000"/>
+            </a:schemeClr>
+          </a:lnRef>
+          <a:fillRef idx="1">
+            <a:schemeClr val="accent1"/>
+          </a:fillRef>
+          <a:effectRef idx="0">
+            <a:schemeClr val="accent1"/>
+          </a:effectRef>
+          <a:fontRef idx="minor">
+            <a:schemeClr val="lt1"/>
+          </a:fontRef>
+        </p:style>
+        <p:txBody>
+          <a:bodyPr rtlCol="0" anchor="ctr"/>
+          <a:lstStyle/>
+          <a:p>
+            <a:pPr algn="ctr"/>
+            <a:endParaRPr lang="en-US"/>
+          </a:p>
+        </p:txBody>
+      </p:sp>
     </p:spTree>
     <p:extLst>
       <p:ext uri="{BB962C8B-B14F-4D97-AF65-F5344CB8AC3E}">
@@ -13438,7 +10858,7 @@
 </p:sld>
 </file>
 
-<file path=ppt/slides/slide9.xml><?xml version="1.0" encoding="utf-8"?>
+<file path=ppt/slides/slide8.xml><?xml version="1.0" encoding="utf-8"?>
 <p:sld xmlns:a="http://schemas.openxmlformats.org/drawingml/2006/main" xmlns:r="http://schemas.openxmlformats.org/officeDocument/2006/relationships" xmlns:p="http://schemas.openxmlformats.org/presentationml/2006/main">
   <p:cSld>
     <p:spTree>
@@ -13512,7 +10932,7 @@
           <a:p>
             <a:fld id="{F02AFB4B-EED2-CD4B-9AB0-9DB25B714611}" type="slidenum">
               <a:rPr lang="en-US" smtClean="0"/>
-              <a:t>9</a:t>
+              <a:t>8</a:t>
             </a:fld>
             <a:endParaRPr lang="en-US"/>
           </a:p>
@@ -13708,8 +11128,8 @@
             </p:nvSpPr>
             <p:spPr>
               <a:xfrm>
-                <a:off x="8512316" y="788115"/>
-                <a:ext cx="1255472" cy="400110"/>
+                <a:off x="8424952" y="788115"/>
+                <a:ext cx="1430200" cy="400110"/>
               </a:xfrm>
               <a:prstGeom prst="rect">
                 <a:avLst/>
@@ -13762,7 +11182,7 @@
                             <a:rPr lang="en-US" sz="2000" b="1" i="0" smtClean="0">
                               <a:latin typeface="Cambria Math" panose="02040503050406030204" pitchFamily="18" charset="0"/>
                             </a:rPr>
-                            <m:t>GPP</m:t>
+                            <m:t>RECO</m:t>
                           </m:r>
                           <m:r>
                             <m:rPr>
@@ -13800,8 +11220,8 @@
             </p:nvSpPr>
             <p:spPr>
               <a:xfrm>
-                <a:off x="8512316" y="788115"/>
-                <a:ext cx="1255472" cy="400110"/>
+                <a:off x="8424952" y="788115"/>
+                <a:ext cx="1430200" cy="400110"/>
               </a:xfrm>
               <a:prstGeom prst="rect">
                 <a:avLst/>
@@ -13809,7 +11229,7 @@
               <a:blipFill>
                 <a:blip r:embed="rId4"/>
                 <a:stretch>
-                  <a:fillRect l="-2020" b="-15152"/>
+                  <a:fillRect l="-1754" b="-15152"/>
                 </a:stretch>
               </a:blipFill>
             </p:spPr>
@@ -13866,9 +11286,38 @@
             </a:pPr>
             <a:r>
               <a:rPr lang="en-US" b="1" dirty="0"/>
-              <a:t>Physics-Informed KAN</a:t>
-            </a:r>
-            <a:endParaRPr lang="en-US" b="0" i="0" dirty="0">
+              <a:t>Eco-Native KAN</a:t>
+            </a:r>
+          </a:p>
+          <a:p>
+            <a:pPr lvl="1">
+              <a:spcBef>
+                <a:spcPts val="0"/>
+              </a:spcBef>
+              <a:spcAft>
+                <a:spcPts val="1000"/>
+              </a:spcAft>
+            </a:pPr>
+            <a:r>
+              <a:rPr lang="en-US" i="0" dirty="0">
+                <a:solidFill>
+                  <a:srgbClr val="1F2328"/>
+                </a:solidFill>
+                <a:effectLst/>
+                <a:latin typeface="-apple-system"/>
+              </a:rPr>
+              <a:t>KAN is </a:t>
+            </a:r>
+            <a:r>
+              <a:rPr lang="en-US" dirty="0">
+                <a:solidFill>
+                  <a:srgbClr val="1F2328"/>
+                </a:solidFill>
+                <a:latin typeface="-apple-system"/>
+              </a:rPr>
+              <a:t>originally designed for physics</a:t>
+            </a:r>
+            <a:endParaRPr lang="en-US" i="0" dirty="0">
               <a:solidFill>
                 <a:srgbClr val="1F2328"/>
               </a:solidFill>
@@ -13983,6 +11432,565 @@
   <p:clrMapOvr>
     <a:masterClrMapping/>
   </p:clrMapOvr>
+</p:sld>
+</file>
+
+<file path=ppt/slides/slide9.xml><?xml version="1.0" encoding="utf-8"?>
+<p:sld xmlns:a="http://schemas.openxmlformats.org/drawingml/2006/main" xmlns:r="http://schemas.openxmlformats.org/officeDocument/2006/relationships" xmlns:p="http://schemas.openxmlformats.org/presentationml/2006/main">
+  <p:cSld>
+    <p:spTree>
+      <p:nvGrpSpPr>
+        <p:cNvPr id="1" name=""/>
+        <p:cNvGrpSpPr/>
+        <p:nvPr/>
+      </p:nvGrpSpPr>
+      <p:grpSpPr>
+        <a:xfrm>
+          <a:off x="0" y="0"/>
+          <a:ext cx="0" cy="0"/>
+          <a:chOff x="0" y="0"/>
+          <a:chExt cx="0" cy="0"/>
+        </a:xfrm>
+      </p:grpSpPr>
+      <p:sp>
+        <p:nvSpPr>
+          <p:cNvPr id="4" name="Slide Number Placeholder 3">
+            <a:extLst>
+              <a:ext uri="{FF2B5EF4-FFF2-40B4-BE49-F238E27FC236}">
+                <a16:creationId xmlns:a16="http://schemas.microsoft.com/office/drawing/2014/main" id="{F4C31815-7CA9-9C7D-7FC4-8A6E9DB3BABD}"/>
+              </a:ext>
+            </a:extLst>
+          </p:cNvPr>
+          <p:cNvSpPr>
+            <a:spLocks noGrp="1"/>
+          </p:cNvSpPr>
+          <p:nvPr>
+            <p:ph type="sldNum" sz="quarter" idx="12"/>
+          </p:nvPr>
+        </p:nvSpPr>
+        <p:spPr/>
+        <p:txBody>
+          <a:bodyPr/>
+          <a:lstStyle/>
+          <a:p>
+            <a:fld id="{F02AFB4B-EED2-CD4B-9AB0-9DB25B714611}" type="slidenum">
+              <a:rPr lang="en-US" smtClean="0"/>
+              <a:t>9</a:t>
+            </a:fld>
+            <a:endParaRPr lang="en-US"/>
+          </a:p>
+        </p:txBody>
+      </p:sp>
+      <p:sp>
+        <p:nvSpPr>
+          <p:cNvPr id="5" name="Title 1">
+            <a:extLst>
+              <a:ext uri="{FF2B5EF4-FFF2-40B4-BE49-F238E27FC236}">
+                <a16:creationId xmlns:a16="http://schemas.microsoft.com/office/drawing/2014/main" id="{AEBEA98D-F588-92B2-D1C1-D654179ED64F}"/>
+              </a:ext>
+            </a:extLst>
+          </p:cNvPr>
+          <p:cNvSpPr txBox="1">
+            <a:spLocks/>
+          </p:cNvSpPr>
+          <p:nvPr/>
+        </p:nvSpPr>
+        <p:spPr>
+          <a:xfrm>
+            <a:off x="1141296" y="2388995"/>
+            <a:ext cx="4002236" cy="1325563"/>
+          </a:xfrm>
+          <a:prstGeom prst="rect">
+            <a:avLst/>
+          </a:prstGeom>
+        </p:spPr>
+        <p:txBody>
+          <a:bodyPr vert="horz" lIns="91440" tIns="45720" rIns="91440" bIns="45720" rtlCol="0" anchor="ctr">
+            <a:normAutofit/>
+          </a:bodyPr>
+          <a:lstStyle>
+            <a:lvl1pPr algn="l" defTabSz="914400" rtl="0" eaLnBrk="1" latinLnBrk="0" hangingPunct="1">
+              <a:lnSpc>
+                <a:spcPct val="90000"/>
+              </a:lnSpc>
+              <a:spcBef>
+                <a:spcPct val="0"/>
+              </a:spcBef>
+              <a:buNone/>
+              <a:defRPr sz="4400" kern="1200">
+                <a:solidFill>
+                  <a:schemeClr val="tx1"/>
+                </a:solidFill>
+                <a:latin typeface="+mj-lt"/>
+                <a:ea typeface="+mj-ea"/>
+                <a:cs typeface="+mj-cs"/>
+              </a:defRPr>
+            </a:lvl1pPr>
+          </a:lstStyle>
+          <a:p>
+            <a:r>
+              <a:rPr lang="en-US" b="1" dirty="0">
+                <a:latin typeface="Avenir Next Heavy" panose="020B0503020202020204" pitchFamily="34" charset="0"/>
+              </a:rPr>
+              <a:t>Thank you!</a:t>
+            </a:r>
+          </a:p>
+        </p:txBody>
+      </p:sp>
+      <p:sp>
+        <p:nvSpPr>
+          <p:cNvPr id="6" name="TextBox 5">
+            <a:extLst>
+              <a:ext uri="{FF2B5EF4-FFF2-40B4-BE49-F238E27FC236}">
+                <a16:creationId xmlns:a16="http://schemas.microsoft.com/office/drawing/2014/main" id="{A0BFDE45-F6F4-CEC6-4605-8D01CFC71178}"/>
+              </a:ext>
+            </a:extLst>
+          </p:cNvPr>
+          <p:cNvSpPr txBox="1"/>
+          <p:nvPr/>
+        </p:nvSpPr>
+        <p:spPr>
+          <a:xfrm>
+            <a:off x="1181192" y="3370253"/>
+            <a:ext cx="3329758" cy="400110"/>
+          </a:xfrm>
+          <a:prstGeom prst="rect">
+            <a:avLst/>
+          </a:prstGeom>
+          <a:noFill/>
+        </p:spPr>
+        <p:txBody>
+          <a:bodyPr wrap="none" rtlCol="0">
+            <a:spAutoFit/>
+          </a:bodyPr>
+          <a:lstStyle/>
+          <a:p>
+            <a:r>
+              <a:rPr lang="en-US" sz="2000" dirty="0" err="1">
+                <a:latin typeface="Avenir Next" panose="020B0503020202020204" pitchFamily="34" charset="0"/>
+              </a:rPr>
+              <a:t>zhangyu.wang@maine.edu</a:t>
+            </a:r>
+            <a:endParaRPr lang="en-US" sz="2000" dirty="0">
+              <a:latin typeface="Avenir Next" panose="020B0503020202020204" pitchFamily="34" charset="0"/>
+            </a:endParaRPr>
+          </a:p>
+        </p:txBody>
+      </p:sp>
+      <p:sp>
+        <p:nvSpPr>
+          <p:cNvPr id="9" name="Title 1">
+            <a:extLst>
+              <a:ext uri="{FF2B5EF4-FFF2-40B4-BE49-F238E27FC236}">
+                <a16:creationId xmlns:a16="http://schemas.microsoft.com/office/drawing/2014/main" id="{FF8B9C2C-8527-DB12-43E8-B235674CF938}"/>
+              </a:ext>
+            </a:extLst>
+          </p:cNvPr>
+          <p:cNvSpPr txBox="1">
+            <a:spLocks/>
+          </p:cNvSpPr>
+          <p:nvPr/>
+        </p:nvSpPr>
+        <p:spPr>
+          <a:xfrm>
+            <a:off x="6408301" y="1559557"/>
+            <a:ext cx="4002236" cy="1325563"/>
+          </a:xfrm>
+          <a:prstGeom prst="rect">
+            <a:avLst/>
+          </a:prstGeom>
+        </p:spPr>
+        <p:txBody>
+          <a:bodyPr vert="horz" lIns="91440" tIns="45720" rIns="91440" bIns="45720" rtlCol="0" anchor="ctr">
+            <a:normAutofit/>
+          </a:bodyPr>
+          <a:lstStyle>
+            <a:lvl1pPr algn="l" defTabSz="914400" rtl="0" eaLnBrk="1" latinLnBrk="0" hangingPunct="1">
+              <a:lnSpc>
+                <a:spcPct val="90000"/>
+              </a:lnSpc>
+              <a:spcBef>
+                <a:spcPct val="0"/>
+              </a:spcBef>
+              <a:buNone/>
+              <a:defRPr sz="4400" kern="1200">
+                <a:solidFill>
+                  <a:schemeClr val="tx1"/>
+                </a:solidFill>
+                <a:latin typeface="+mj-lt"/>
+                <a:ea typeface="+mj-ea"/>
+                <a:cs typeface="+mj-cs"/>
+              </a:defRPr>
+            </a:lvl1pPr>
+          </a:lstStyle>
+          <a:p>
+            <a:r>
+              <a:rPr lang="en-US" sz="3200" b="1" dirty="0">
+                <a:latin typeface="Avenir Next Heavy" panose="020B0503020202020204" pitchFamily="34" charset="0"/>
+              </a:rPr>
+              <a:t>Acknowledgment</a:t>
+            </a:r>
+            <a:endParaRPr lang="en-US" sz="2800" b="1" dirty="0">
+              <a:latin typeface="Avenir Next Heavy" panose="020B0503020202020204" pitchFamily="34" charset="0"/>
+            </a:endParaRPr>
+          </a:p>
+        </p:txBody>
+      </p:sp>
+      <p:sp>
+        <p:nvSpPr>
+          <p:cNvPr id="12" name="Title 1">
+            <a:extLst>
+              <a:ext uri="{FF2B5EF4-FFF2-40B4-BE49-F238E27FC236}">
+                <a16:creationId xmlns:a16="http://schemas.microsoft.com/office/drawing/2014/main" id="{7950666D-2F1D-CE9B-758C-110729A50CF0}"/>
+              </a:ext>
+            </a:extLst>
+          </p:cNvPr>
+          <p:cNvSpPr txBox="1">
+            <a:spLocks/>
+          </p:cNvSpPr>
+          <p:nvPr/>
+        </p:nvSpPr>
+        <p:spPr>
+          <a:xfrm>
+            <a:off x="6408301" y="3957953"/>
+            <a:ext cx="4537789" cy="1325563"/>
+          </a:xfrm>
+          <a:prstGeom prst="rect">
+            <a:avLst/>
+          </a:prstGeom>
+        </p:spPr>
+        <p:txBody>
+          <a:bodyPr vert="horz" lIns="91440" tIns="45720" rIns="91440" bIns="45720" rtlCol="0" anchor="ctr">
+            <a:normAutofit/>
+          </a:bodyPr>
+          <a:lstStyle>
+            <a:lvl1pPr algn="l" defTabSz="914400" rtl="0" eaLnBrk="1" latinLnBrk="0" hangingPunct="1">
+              <a:lnSpc>
+                <a:spcPct val="90000"/>
+              </a:lnSpc>
+              <a:spcBef>
+                <a:spcPct val="0"/>
+              </a:spcBef>
+              <a:buNone/>
+              <a:defRPr sz="4400" kern="1200">
+                <a:solidFill>
+                  <a:schemeClr val="tx1"/>
+                </a:solidFill>
+                <a:latin typeface="+mj-lt"/>
+                <a:ea typeface="+mj-ea"/>
+                <a:cs typeface="+mj-cs"/>
+              </a:defRPr>
+            </a:lvl1pPr>
+          </a:lstStyle>
+          <a:p>
+            <a:pPr>
+              <a:lnSpc>
+                <a:spcPct val="100000"/>
+              </a:lnSpc>
+            </a:pPr>
+            <a:r>
+              <a:rPr lang="en-US" sz="2000" dirty="0">
+                <a:latin typeface="Avenir Next" panose="020B0503020202020204" pitchFamily="34" charset="0"/>
+              </a:rPr>
+              <a:t>Collaborators: </a:t>
+            </a:r>
+            <a:r>
+              <a:rPr lang="en-US" sz="2000" dirty="0" err="1">
+                <a:latin typeface="Avenir Next" panose="020B0503020202020204" pitchFamily="34" charset="0"/>
+              </a:rPr>
+              <a:t>Yanghui</a:t>
+            </a:r>
+            <a:r>
+              <a:rPr lang="en-US" sz="2000" dirty="0">
+                <a:latin typeface="Avenir Next" panose="020B0503020202020204" pitchFamily="34" charset="0"/>
+              </a:rPr>
+              <a:t> Kang</a:t>
+            </a:r>
+          </a:p>
+          <a:p>
+            <a:pPr>
+              <a:lnSpc>
+                <a:spcPct val="100000"/>
+              </a:lnSpc>
+            </a:pPr>
+            <a:r>
+              <a:rPr lang="en-US" sz="2000" dirty="0">
+                <a:latin typeface="Avenir Next" panose="020B0503020202020204" pitchFamily="34" charset="0"/>
+              </a:rPr>
+              <a:t>Special Thanks: Aaron </a:t>
+            </a:r>
+            <a:r>
+              <a:rPr lang="en-US" sz="2000" dirty="0" err="1">
+                <a:latin typeface="Avenir Next" panose="020B0503020202020204" pitchFamily="34" charset="0"/>
+              </a:rPr>
+              <a:t>Weiskittel</a:t>
+            </a:r>
+            <a:endParaRPr lang="en-US" sz="2800" dirty="0">
+              <a:latin typeface="Avenir Next" panose="020B0503020202020204" pitchFamily="34" charset="0"/>
+            </a:endParaRPr>
+          </a:p>
+        </p:txBody>
+      </p:sp>
+      <p:pic>
+        <p:nvPicPr>
+          <p:cNvPr id="2" name="Picture 8" descr="logo">
+            <a:extLst>
+              <a:ext uri="{FF2B5EF4-FFF2-40B4-BE49-F238E27FC236}">
+                <a16:creationId xmlns:a16="http://schemas.microsoft.com/office/drawing/2014/main" id="{92937418-F7FD-4C2B-CF90-D523D87C0D45}"/>
+              </a:ext>
+            </a:extLst>
+          </p:cNvPr>
+          <p:cNvPicPr>
+            <a:picLocks noChangeAspect="1" noChangeArrowheads="1"/>
+          </p:cNvPicPr>
+          <p:nvPr/>
+        </p:nvPicPr>
+        <p:blipFill>
+          <a:blip r:embed="rId2">
+            <a:extLst>
+              <a:ext uri="{28A0092B-C50C-407E-A947-70E740481C1C}">
+                <a14:useLocalDpi xmlns:a14="http://schemas.microsoft.com/office/drawing/2010/main" val="0"/>
+              </a:ext>
+            </a:extLst>
+          </a:blip>
+          <a:srcRect/>
+          <a:stretch>
+            <a:fillRect/>
+          </a:stretch>
+        </p:blipFill>
+        <p:spPr bwMode="auto">
+          <a:xfrm>
+            <a:off x="6483763" y="2511127"/>
+            <a:ext cx="1374048" cy="1461754"/>
+          </a:xfrm>
+          <a:prstGeom prst="rect">
+            <a:avLst/>
+          </a:prstGeom>
+          <a:noFill/>
+          <a:extLst>
+            <a:ext uri="{909E8E84-426E-40DD-AFC4-6F175D3DCCD1}">
+              <a14:hiddenFill xmlns:a14="http://schemas.microsoft.com/office/drawing/2010/main">
+                <a:solidFill>
+                  <a:srgbClr val="FFFFFF"/>
+                </a:solidFill>
+              </a14:hiddenFill>
+            </a:ext>
+          </a:extLst>
+        </p:spPr>
+      </p:pic>
+      <p:pic>
+        <p:nvPicPr>
+          <p:cNvPr id="8194" name="Picture 2" descr="National Science Foundation - Wikipedia">
+            <a:extLst>
+              <a:ext uri="{FF2B5EF4-FFF2-40B4-BE49-F238E27FC236}">
+                <a16:creationId xmlns:a16="http://schemas.microsoft.com/office/drawing/2014/main" id="{915E0307-9A42-7FAF-607B-819EBB12E040}"/>
+              </a:ext>
+            </a:extLst>
+          </p:cNvPr>
+          <p:cNvPicPr>
+            <a:picLocks noChangeAspect="1" noChangeArrowheads="1"/>
+          </p:cNvPicPr>
+          <p:nvPr/>
+        </p:nvPicPr>
+        <p:blipFill>
+          <a:blip r:embed="rId3">
+            <a:extLst>
+              <a:ext uri="{28A0092B-C50C-407E-A947-70E740481C1C}">
+                <a14:useLocalDpi xmlns:a14="http://schemas.microsoft.com/office/drawing/2010/main" val="0"/>
+              </a:ext>
+            </a:extLst>
+          </a:blip>
+          <a:srcRect/>
+          <a:stretch>
+            <a:fillRect/>
+          </a:stretch>
+        </p:blipFill>
+        <p:spPr bwMode="auto">
+          <a:xfrm>
+            <a:off x="7933273" y="2511128"/>
+            <a:ext cx="1457017" cy="1461754"/>
+          </a:xfrm>
+          <a:prstGeom prst="rect">
+            <a:avLst/>
+          </a:prstGeom>
+          <a:noFill/>
+          <a:extLst>
+            <a:ext uri="{909E8E84-426E-40DD-AFC4-6F175D3DCCD1}">
+              <a14:hiddenFill xmlns:a14="http://schemas.microsoft.com/office/drawing/2010/main">
+                <a:solidFill>
+                  <a:srgbClr val="FFFFFF"/>
+                </a:solidFill>
+              </a14:hiddenFill>
+            </a:ext>
+          </a:extLst>
+        </p:spPr>
+      </p:pic>
+      <p:pic>
+        <p:nvPicPr>
+          <p:cNvPr id="8196" name="Picture 4" descr="Stream NASA | Listen to podcast episodes online for free on SoundCloud">
+            <a:extLst>
+              <a:ext uri="{FF2B5EF4-FFF2-40B4-BE49-F238E27FC236}">
+                <a16:creationId xmlns:a16="http://schemas.microsoft.com/office/drawing/2014/main" id="{46BC9EB1-620D-3C59-26BC-31038F623598}"/>
+              </a:ext>
+            </a:extLst>
+          </p:cNvPr>
+          <p:cNvPicPr>
+            <a:picLocks noChangeAspect="1" noChangeArrowheads="1"/>
+          </p:cNvPicPr>
+          <p:nvPr/>
+        </p:nvPicPr>
+        <p:blipFill>
+          <a:blip r:embed="rId4">
+            <a:extLst>
+              <a:ext uri="{28A0092B-C50C-407E-A947-70E740481C1C}">
+                <a14:useLocalDpi xmlns:a14="http://schemas.microsoft.com/office/drawing/2010/main" val="0"/>
+              </a:ext>
+            </a:extLst>
+          </a:blip>
+          <a:srcRect/>
+          <a:stretch>
+            <a:fillRect/>
+          </a:stretch>
+        </p:blipFill>
+        <p:spPr bwMode="auto">
+          <a:xfrm>
+            <a:off x="9459821" y="2511127"/>
+            <a:ext cx="1446826" cy="1446826"/>
+          </a:xfrm>
+          <a:prstGeom prst="rect">
+            <a:avLst/>
+          </a:prstGeom>
+          <a:noFill/>
+          <a:extLst>
+            <a:ext uri="{909E8E84-426E-40DD-AFC4-6F175D3DCCD1}">
+              <a14:hiddenFill xmlns:a14="http://schemas.microsoft.com/office/drawing/2010/main">
+                <a:solidFill>
+                  <a:srgbClr val="FFFFFF"/>
+                </a:solidFill>
+              </a14:hiddenFill>
+            </a:ext>
+          </a:extLst>
+        </p:spPr>
+      </p:pic>
+      <p:sp>
+        <p:nvSpPr>
+          <p:cNvPr id="3" name="TextBox 2">
+            <a:extLst>
+              <a:ext uri="{FF2B5EF4-FFF2-40B4-BE49-F238E27FC236}">
+                <a16:creationId xmlns:a16="http://schemas.microsoft.com/office/drawing/2014/main" id="{58690DA2-4BD7-264D-1B68-3572A079E2F3}"/>
+              </a:ext>
+            </a:extLst>
+          </p:cNvPr>
+          <p:cNvSpPr txBox="1"/>
+          <p:nvPr/>
+        </p:nvSpPr>
+        <p:spPr>
+          <a:xfrm>
+            <a:off x="1181193" y="3770363"/>
+            <a:ext cx="3329758" cy="646331"/>
+          </a:xfrm>
+          <a:prstGeom prst="rect">
+            <a:avLst/>
+          </a:prstGeom>
+          <a:noFill/>
+        </p:spPr>
+        <p:txBody>
+          <a:bodyPr wrap="square" rtlCol="0">
+            <a:spAutoFit/>
+          </a:bodyPr>
+          <a:lstStyle/>
+          <a:p>
+            <a:r>
+              <a:rPr lang="en-US" u="sng" dirty="0">
+                <a:solidFill>
+                  <a:schemeClr val="accent1"/>
+                </a:solidFill>
+              </a:rPr>
+              <a:t>https://</a:t>
+            </a:r>
+            <a:r>
+              <a:rPr lang="en-US" u="sng" dirty="0" err="1">
+                <a:solidFill>
+                  <a:schemeClr val="accent1"/>
+                </a:solidFill>
+              </a:rPr>
+              <a:t>github.com</a:t>
+            </a:r>
+            <a:r>
+              <a:rPr lang="en-US" u="sng" dirty="0">
+                <a:solidFill>
+                  <a:schemeClr val="accent1"/>
+                </a:solidFill>
+              </a:rPr>
+              <a:t>/Spatial-Info-</a:t>
+            </a:r>
+            <a:r>
+              <a:rPr lang="en-US" u="sng" dirty="0" err="1">
+                <a:solidFill>
+                  <a:schemeClr val="accent1"/>
+                </a:solidFill>
+              </a:rPr>
+              <a:t>Telligence</a:t>
+            </a:r>
+            <a:r>
+              <a:rPr lang="en-US" u="sng" dirty="0">
+                <a:solidFill>
+                  <a:schemeClr val="accent1"/>
+                </a:solidFill>
+              </a:rPr>
+              <a:t>-Lab/KAN-EC</a:t>
+            </a:r>
+          </a:p>
+        </p:txBody>
+      </p:sp>
+      <p:pic>
+        <p:nvPicPr>
+          <p:cNvPr id="10" name="Picture 9" descr="A qr code on a white background&#10;&#10;Description automatically generated">
+            <a:extLst>
+              <a:ext uri="{FF2B5EF4-FFF2-40B4-BE49-F238E27FC236}">
+                <a16:creationId xmlns:a16="http://schemas.microsoft.com/office/drawing/2014/main" id="{2DA04E70-D2A2-A591-492B-AB32F6713A84}"/>
+              </a:ext>
+            </a:extLst>
+          </p:cNvPr>
+          <p:cNvPicPr>
+            <a:picLocks noChangeAspect="1"/>
+          </p:cNvPicPr>
+          <p:nvPr/>
+        </p:nvPicPr>
+        <p:blipFill>
+          <a:blip r:embed="rId5"/>
+          <a:stretch>
+            <a:fillRect/>
+          </a:stretch>
+        </p:blipFill>
+        <p:spPr>
+          <a:xfrm>
+            <a:off x="4513062" y="2557453"/>
+            <a:ext cx="1325563" cy="1325563"/>
+          </a:xfrm>
+          <a:prstGeom prst="rect">
+            <a:avLst/>
+          </a:prstGeom>
+        </p:spPr>
+      </p:pic>
+    </p:spTree>
+    <p:extLst>
+      <p:ext uri="{BB962C8B-B14F-4D97-AF65-F5344CB8AC3E}">
+        <p14:creationId xmlns:p14="http://schemas.microsoft.com/office/powerpoint/2010/main" val="1084214139"/>
+      </p:ext>
+    </p:extLst>
+  </p:cSld>
+  <p:clrMapOvr>
+    <a:masterClrMapping/>
+  </p:clrMapOvr>
+  <mc:AlternateContent xmlns:mc="http://schemas.openxmlformats.org/markup-compatibility/2006" xmlns:p14="http://schemas.microsoft.com/office/powerpoint/2010/main">
+    <mc:Choice Requires="p14">
+      <p:transition spd="slow" p14:dur="2000" advTm="16377"/>
+    </mc:Choice>
+    <mc:Fallback xmlns="">
+      <p:transition spd="slow" advTm="16377"/>
+    </mc:Fallback>
+  </mc:AlternateContent>
 </p:sld>
 </file>
 
